--- a/slides/CSC270-Lecture-01-Introduction-to-Databases-and-Information-Systems.pptx
+++ b/slides/CSC270-Lecture-01-Introduction-to-Databases-and-Information-Systems.pptx
@@ -8,15 +8,26 @@
     <p:sldId id="256" r:id="rId2"/>
     <p:sldId id="257" r:id="rId3"/>
     <p:sldId id="258" r:id="rId4"/>
+    <p:sldId id="268" r:id="rId19"/>
     <p:sldId id="259" r:id="rId5"/>
+    <p:sldId id="269" r:id="rId20"/>
     <p:sldId id="260" r:id="rId6"/>
+    <p:sldId id="270" r:id="rId21"/>
     <p:sldId id="261" r:id="rId7"/>
+    <p:sldId id="271" r:id="rId22"/>
+    <p:sldId id="272" r:id="rId23"/>
     <p:sldId id="262" r:id="rId8"/>
+    <p:sldId id="273" r:id="rId24"/>
     <p:sldId id="263" r:id="rId9"/>
+    <p:sldId id="274" r:id="rId25"/>
     <p:sldId id="264" r:id="rId10"/>
     <p:sldId id="265" r:id="rId11"/>
+    <p:sldId id="275" r:id="rId26"/>
     <p:sldId id="266" r:id="rId12"/>
+    <p:sldId id="276" r:id="rId27"/>
+    <p:sldId id="277" r:id="rId28"/>
     <p:sldId id="267" r:id="rId13"/>
+    <p:sldId id="278" r:id="rId29"/>
   </p:sldIdLst>
   <p:notesMasterIdLst>
     <p:notesMasterId r:id="rId14"/>
@@ -1879,7 +1890,7 @@
               <a:buNone/>
             </a:pPr>
             <a:r>
-              <a:rPr lang="en-US" sz="1600" b="1" spc="300" kern="0" dirty="0">
+              <a:rPr lang="en-US" sz="1800" b="1" spc="300" kern="0" dirty="0">
                 <a:solidFill>
                   <a:srgbClr val="2FE6C4"/>
                 </a:solidFill>
@@ -1889,7 +1900,7 @@
               </a:rPr>
               <a:t>LECTURE 1</a:t>
             </a:r>
-            <a:endParaRPr lang="en-US" sz="1600" dirty="0"/>
+            <a:endParaRPr lang="en-US" sz="1800" dirty="0"/>
           </a:p>
         </p:txBody>
       </p:sp>
@@ -1996,7 +2007,7 @@
               <a:buNone/>
             </a:pPr>
             <a:r>
-              <a:rPr lang="en-US" sz="1300" dirty="0">
+              <a:rPr lang="en-US" sz="1800" dirty="0">
                 <a:solidFill>
                   <a:srgbClr val="8A939B"/>
                 </a:solidFill>
@@ -2006,7 +2017,7 @@
               </a:rPr>
               <a:t>COMSATS University Islamabad, Lahore Campus</a:t>
             </a:r>
-            <a:endParaRPr lang="en-US" sz="1300" dirty="0"/>
+            <a:endParaRPr lang="en-US" sz="1800" dirty="0"/>
           </a:p>
         </p:txBody>
       </p:sp>
@@ -2035,7 +2046,7 @@
               <a:buNone/>
             </a:pPr>
             <a:r>
-              <a:rPr lang="en-US" sz="1000" u="sng" dirty="0">
+              <a:rPr lang="en-US" sz="1200" u="sng" dirty="0">
                 <a:solidFill>
                   <a:srgbClr val="8A939B"/>
                 </a:solidFill>
@@ -2056,7 +2067,7 @@
               <a:buNone/>
             </a:pPr>
             <a:r>
-              <a:rPr lang="en-US" sz="1000" dirty="0">
+              <a:rPr lang="en-US" sz="1200" dirty="0">
                 <a:solidFill>
                   <a:srgbClr val="8A939B"/>
                 </a:solidFill>
@@ -2066,7 +2077,7 @@
               </a:rPr>
               <a:t>  ·  1</a:t>
             </a:r>
-            <a:endParaRPr lang="en-US" sz="1000" dirty="0"/>
+            <a:endParaRPr lang="en-US" sz="1200" dirty="0"/>
           </a:p>
         </p:txBody>
       </p:sp>
@@ -2166,7 +2177,7 @@
               <a:buNone/>
             </a:pPr>
             <a:r>
-              <a:rPr lang="en-US" sz="1000" u="sng" dirty="0">
+              <a:rPr lang="en-US" sz="1200" u="sng" dirty="0">
                 <a:solidFill>
                   <a:srgbClr val="8A939B"/>
                 </a:solidFill>
@@ -2187,7 +2198,7 @@
               <a:buNone/>
             </a:pPr>
             <a:r>
-              <a:rPr lang="en-US" sz="1000" dirty="0">
+              <a:rPr lang="en-US" sz="1200" dirty="0">
                 <a:solidFill>
                   <a:srgbClr val="8A939B"/>
                 </a:solidFill>
@@ -2195,9 +2206,9 @@
                 <a:ea typeface="Calibri" pitchFamily="34" charset="-122"/>
                 <a:cs typeface="Calibri" pitchFamily="34" charset="-120"/>
               </a:rPr>
-              <a:t>  ·  10</a:t>
-            </a:r>
-            <a:endParaRPr lang="en-US" sz="1000" dirty="0"/>
+              <a:t>  ·  17</a:t>
+            </a:r>
+            <a:endParaRPr lang="en-US" sz="1200" dirty="0"/>
           </a:p>
         </p:txBody>
       </p:sp>
@@ -2230,7 +2241,7 @@
               <a:buChar char="•"/>
             </a:pPr>
             <a:r>
-              <a:rPr lang="en-US" sz="1400" b="1" dirty="0">
+              <a:rPr lang="en-US" sz="1800" b="1" dirty="0">
                 <a:solidFill>
                   <a:srgbClr val="1F2429"/>
                 </a:solidFill>
@@ -2247,7 +2258,7 @@
               <a:buNone/>
             </a:pPr>
             <a:r>
-              <a:rPr lang="en-US" sz="1400" dirty="0">
+              <a:rPr lang="en-US" sz="1800" dirty="0">
                 <a:solidFill>
                   <a:srgbClr val="1F2429"/>
                 </a:solidFill>
@@ -2257,7 +2268,7 @@
               </a:rPr>
               <a:t> — date and ID formats enforced centrally, not per-programmer</a:t>
             </a:r>
-            <a:endParaRPr lang="en-US" sz="1400" dirty="0"/>
+            <a:endParaRPr lang="en-US" sz="1800" dirty="0"/>
           </a:p>
           <a:p>
             <a:pPr marL="342900" indent="-342900">
@@ -2268,7 +2279,7 @@
               <a:buChar char="•"/>
             </a:pPr>
             <a:r>
-              <a:rPr lang="en-US" sz="1400" b="1" dirty="0">
+              <a:rPr lang="en-US" sz="1800" b="1" dirty="0">
                 <a:solidFill>
                   <a:srgbClr val="1F2429"/>
                 </a:solidFill>
@@ -2285,7 +2296,7 @@
               <a:buNone/>
             </a:pPr>
             <a:r>
-              <a:rPr lang="en-US" sz="1400" dirty="0">
+              <a:rPr lang="en-US" sz="1800" dirty="0">
                 <a:solidFill>
                   <a:srgbClr val="1F2429"/>
                 </a:solidFill>
@@ -2295,7 +2306,7 @@
               </a:rPr>
               <a:t> — one managed system costs less overall than many small ones</a:t>
             </a:r>
-            <a:endParaRPr lang="en-US" sz="1400" dirty="0"/>
+            <a:endParaRPr lang="en-US" sz="1800" dirty="0"/>
           </a:p>
           <a:p>
             <a:pPr marL="342900" indent="-342900">
@@ -2306,7 +2317,7 @@
               <a:buChar char="•"/>
             </a:pPr>
             <a:r>
-              <a:rPr lang="en-US" sz="1400" b="1" dirty="0">
+              <a:rPr lang="en-US" sz="1800" b="1" dirty="0">
                 <a:solidFill>
                   <a:srgbClr val="1F2429"/>
                 </a:solidFill>
@@ -2323,7 +2334,7 @@
               <a:buNone/>
             </a:pPr>
             <a:r>
-              <a:rPr lang="en-US" sz="1400" dirty="0">
+              <a:rPr lang="en-US" sz="1800" dirty="0">
                 <a:solidFill>
                   <a:srgbClr val="1F2429"/>
                 </a:solidFill>
@@ -2333,7 +2344,7 @@
               </a:rPr>
               <a:t> — a DBA arranges data for the organization as a whole</a:t>
             </a:r>
-            <a:endParaRPr lang="en-US" sz="1400" dirty="0"/>
+            <a:endParaRPr lang="en-US" sz="1800" dirty="0"/>
           </a:p>
           <a:p>
             <a:pPr marL="342900" indent="-342900">
@@ -2344,7 +2355,7 @@
               <a:buChar char="•"/>
             </a:pPr>
             <a:r>
-              <a:rPr lang="en-US" sz="1400" b="1" dirty="0">
+              <a:rPr lang="en-US" sz="1800" b="1" dirty="0">
                 <a:solidFill>
                   <a:srgbClr val="1F2429"/>
                 </a:solidFill>
@@ -2361,7 +2372,7 @@
               <a:buNone/>
             </a:pPr>
             <a:r>
-              <a:rPr lang="en-US" sz="1400" dirty="0">
+              <a:rPr lang="en-US" sz="1800" dirty="0">
                 <a:solidFill>
                   <a:srgbClr val="1F2429"/>
                 </a:solidFill>
@@ -2371,7 +2382,7 @@
               </a:rPr>
               <a:t> — query languages answer unanticipated questions directly</a:t>
             </a:r>
-            <a:endParaRPr lang="en-US" sz="1400" dirty="0"/>
+            <a:endParaRPr lang="en-US" sz="1800" dirty="0"/>
           </a:p>
           <a:p>
             <a:pPr marL="342900" indent="-342900">
@@ -2382,7 +2393,7 @@
               <a:buChar char="•"/>
             </a:pPr>
             <a:r>
-              <a:rPr lang="en-US" sz="1400" b="1" dirty="0">
+              <a:rPr lang="en-US" sz="1800" b="1" dirty="0">
                 <a:solidFill>
                   <a:srgbClr val="1F2429"/>
                 </a:solidFill>
@@ -2399,7 +2410,7 @@
               <a:buNone/>
             </a:pPr>
             <a:r>
-              <a:rPr lang="en-US" sz="1400" dirty="0">
+              <a:rPr lang="en-US" sz="1800" dirty="0">
                 <a:solidFill>
                   <a:srgbClr val="1F2429"/>
                 </a:solidFill>
@@ -2409,7 +2420,7 @@
               </a:rPr>
               <a:t> — the DBMS provides storage, retrieval, concurrency, and recovery</a:t>
             </a:r>
-            <a:endParaRPr lang="en-US" sz="1400" dirty="0"/>
+            <a:endParaRPr lang="en-US" sz="1800" dirty="0"/>
           </a:p>
           <a:p>
             <a:pPr marL="342900" indent="-342900">
@@ -2420,7 +2431,7 @@
               <a:buChar char="•"/>
             </a:pPr>
             <a:r>
-              <a:rPr lang="en-US" sz="1400" b="1" dirty="0">
+              <a:rPr lang="en-US" sz="1800" b="1" dirty="0">
                 <a:solidFill>
                   <a:srgbClr val="1F2429"/>
                 </a:solidFill>
@@ -2437,7 +2448,7 @@
               <a:buNone/>
             </a:pPr>
             <a:r>
-              <a:rPr lang="en-US" sz="1400" dirty="0">
+              <a:rPr lang="en-US" sz="1800" dirty="0">
                 <a:solidFill>
                   <a:srgbClr val="1F2429"/>
                 </a:solidFill>
@@ -2447,7 +2458,7 @@
               </a:rPr>
               <a:t> — far more robust than one programmer's ad hoc script</a:t>
             </a:r>
-            <a:endParaRPr lang="en-US" sz="1400" dirty="0"/>
+            <a:endParaRPr lang="en-US" sz="1800" dirty="0"/>
           </a:p>
         </p:txBody>
       </p:sp>
@@ -2547,7 +2558,7 @@
               <a:buNone/>
             </a:pPr>
             <a:r>
-              <a:rPr lang="en-US" sz="1000" u="sng" dirty="0">
+              <a:rPr lang="en-US" sz="1200" u="sng" dirty="0">
                 <a:solidFill>
                   <a:srgbClr val="8A939B"/>
                 </a:solidFill>
@@ -2568,7 +2579,7 @@
               <a:buNone/>
             </a:pPr>
             <a:r>
-              <a:rPr lang="en-US" sz="1000" dirty="0">
+              <a:rPr lang="en-US" sz="1200" dirty="0">
                 <a:solidFill>
                   <a:srgbClr val="8A939B"/>
                 </a:solidFill>
@@ -2576,9 +2587,9 @@
                 <a:ea typeface="Calibri" pitchFamily="34" charset="-122"/>
                 <a:cs typeface="Calibri" pitchFamily="34" charset="-120"/>
               </a:rPr>
-              <a:t>  ·  11</a:t>
-            </a:r>
-            <a:endParaRPr lang="en-US" sz="1000" dirty="0"/>
+              <a:t>  ·  19</a:t>
+            </a:r>
+            <a:endParaRPr lang="en-US" sz="1200" dirty="0"/>
           </a:p>
         </p:txBody>
       </p:sp>
@@ -2607,7 +2618,7 @@
               <a:buNone/>
             </a:pPr>
             <a:r>
-              <a:rPr lang="en-US" sz="1400" dirty="0">
+              <a:rPr lang="en-US" sz="1800" dirty="0">
                 <a:solidFill>
                   <a:srgbClr val="1F2429"/>
                 </a:solidFill>
@@ -2617,7 +2628,7 @@
               </a:rPr>
               <a:t>The database approach is not free — it trades one set of problems for another, smaller but real:</a:t>
             </a:r>
-            <a:endParaRPr lang="en-US" sz="1400" dirty="0"/>
+            <a:endParaRPr lang="en-US" sz="1800" dirty="0"/>
           </a:p>
         </p:txBody>
       </p:sp>
@@ -2668,7 +2679,7 @@
               <a:buNone/>
             </a:pPr>
             <a:r>
-              <a:rPr lang="en-US" sz="1350" b="1" dirty="0">
+              <a:rPr lang="en-US" sz="1800" b="1" dirty="0">
                 <a:solidFill>
                   <a:srgbClr val="FFFFFF"/>
                 </a:solidFill>
@@ -2678,7 +2689,7 @@
               </a:rPr>
               <a:t>Complexity</a:t>
             </a:r>
-            <a:endParaRPr lang="en-US" sz="1350" dirty="0"/>
+            <a:endParaRPr lang="en-US" sz="1800" dirty="0"/>
           </a:p>
         </p:txBody>
       </p:sp>
@@ -2707,7 +2718,7 @@
               <a:buNone/>
             </a:pPr>
             <a:r>
-              <a:rPr lang="en-US" sz="1050" dirty="0">
+              <a:rPr lang="en-US" sz="1800" dirty="0">
                 <a:solidFill>
                   <a:srgbClr val="FFFFFF"/>
                 </a:solidFill>
@@ -2717,7 +2728,7 @@
               </a:rPr>
               <a:t>Designers, developers, DBAs, and end users all need to understand enough of the DBMS to use it well</a:t>
             </a:r>
-            <a:endParaRPr lang="en-US" sz="1050" dirty="0"/>
+            <a:endParaRPr lang="en-US" sz="1800" dirty="0"/>
           </a:p>
         </p:txBody>
       </p:sp>
@@ -2768,7 +2779,7 @@
               <a:buNone/>
             </a:pPr>
             <a:r>
-              <a:rPr lang="en-US" sz="1350" b="1" dirty="0">
+              <a:rPr lang="en-US" sz="1800" b="1" dirty="0">
                 <a:solidFill>
                   <a:srgbClr val="FFFFFF"/>
                 </a:solidFill>
@@ -2778,7 +2789,7 @@
               </a:rPr>
               <a:t>Cost</a:t>
             </a:r>
-            <a:endParaRPr lang="en-US" sz="1350" dirty="0"/>
+            <a:endParaRPr lang="en-US" sz="1800" dirty="0"/>
           </a:p>
         </p:txBody>
       </p:sp>
@@ -2807,7 +2818,7 @@
               <a:buNone/>
             </a:pPr>
             <a:r>
-              <a:rPr lang="en-US" sz="1050" dirty="0">
+              <a:rPr lang="en-US" sz="1800" dirty="0">
                 <a:solidFill>
                   <a:srgbClr val="FFFFFF"/>
                 </a:solidFill>
@@ -2817,7 +2828,7 @@
               </a:rPr>
               <a:t>DBMS software and the hardware it demands add significant up-front and ongoing expense</a:t>
             </a:r>
-            <a:endParaRPr lang="en-US" sz="1050" dirty="0"/>
+            <a:endParaRPr lang="en-US" sz="1800" dirty="0"/>
           </a:p>
         </p:txBody>
       </p:sp>
@@ -2868,7 +2879,7 @@
               <a:buNone/>
             </a:pPr>
             <a:r>
-              <a:rPr lang="en-US" sz="1350" b="1" dirty="0">
+              <a:rPr lang="en-US" sz="1800" b="1" dirty="0">
                 <a:solidFill>
                   <a:srgbClr val="FFFFFF"/>
                 </a:solidFill>
@@ -2878,7 +2889,7 @@
               </a:rPr>
               <a:t>Reduced performance for narrow needs</a:t>
             </a:r>
-            <a:endParaRPr lang="en-US" sz="1350" dirty="0"/>
+            <a:endParaRPr lang="en-US" sz="1800" dirty="0"/>
           </a:p>
         </p:txBody>
       </p:sp>
@@ -2907,7 +2918,7 @@
               <a:buNone/>
             </a:pPr>
             <a:r>
-              <a:rPr lang="en-US" sz="1050" dirty="0">
+              <a:rPr lang="en-US" sz="1800" dirty="0">
                 <a:solidFill>
                   <a:srgbClr val="FFFFFF"/>
                 </a:solidFill>
@@ -2917,7 +2928,7 @@
               </a:rPr>
               <a:t>A general-purpose DBMS can be slower than a program built for exactly one task</a:t>
             </a:r>
-            <a:endParaRPr lang="en-US" sz="1050" dirty="0"/>
+            <a:endParaRPr lang="en-US" sz="1800" dirty="0"/>
           </a:p>
         </p:txBody>
       </p:sp>
@@ -2968,7 +2979,7 @@
               <a:buNone/>
             </a:pPr>
             <a:r>
-              <a:rPr lang="en-US" sz="1350" b="1" dirty="0">
+              <a:rPr lang="en-US" sz="1800" b="1" dirty="0">
                 <a:solidFill>
                   <a:srgbClr val="FFFFFF"/>
                 </a:solidFill>
@@ -2978,7 +2989,7 @@
               </a:rPr>
               <a:t>Higher impact of a failure</a:t>
             </a:r>
-            <a:endParaRPr lang="en-US" sz="1350" dirty="0"/>
+            <a:endParaRPr lang="en-US" sz="1800" dirty="0"/>
           </a:p>
         </p:txBody>
       </p:sp>
@@ -3007,7 +3018,7 @@
               <a:buNone/>
             </a:pPr>
             <a:r>
-              <a:rPr lang="en-US" sz="1050" dirty="0">
+              <a:rPr lang="en-US" sz="1800" dirty="0">
                 <a:solidFill>
                   <a:srgbClr val="FFFFFF"/>
                 </a:solidFill>
@@ -3017,115 +3028,7 @@
               </a:rPr>
               <a:t>A centralized, shared database means an outage affects every dependent application at once</a:t>
             </a:r>
-            <a:endParaRPr lang="en-US" sz="1050" dirty="0"/>
-          </a:p>
-        </p:txBody>
-      </p:sp>
-      <p:sp>
-        <p:nvSpPr>
-          <p:cNvPr id="17" name="Shape 15"/>
-          <p:cNvSpPr/>
-          <p:nvPr/>
-        </p:nvSpPr>
-        <p:spPr>
-          <a:xfrm>
-            <a:off x="640080" y="4480560"/>
-            <a:ext cx="10881360" cy="1554480"/>
-          </a:xfrm>
-          <a:prstGeom prst="roundRect">
-            <a:avLst>
-              <a:gd name="adj" fmla="val 4706"/>
-            </a:avLst>
-          </a:prstGeom>
-          <a:solidFill>
-            <a:srgbClr val="F7F8F9"/>
-          </a:solidFill>
-          <a:ln w="12700">
-            <a:solidFill>
-              <a:srgbClr val="D8DCE1"/>
-            </a:solidFill>
-            <a:prstDash val="solid"/>
-          </a:ln>
-        </p:spPr>
-      </p:sp>
-      <p:sp>
-        <p:nvSpPr>
-          <p:cNvPr id="18" name="Text 16"/>
-          <p:cNvSpPr txBox="1"/>
-          <p:nvPr/>
-        </p:nvSpPr>
-        <p:spPr>
-          <a:xfrm>
-            <a:off x="868680" y="4590288"/>
-            <a:ext cx="10424160" cy="274320"/>
-          </a:xfrm>
-          <a:prstGeom prst="rect">
-            <a:avLst/>
-          </a:prstGeom>
-          <a:noFill/>
-          <a:ln/>
-        </p:spPr>
-        <p:txBody>
-          <a:bodyPr wrap="square" lIns="0" tIns="0" rIns="0" bIns="0" rtlCol="0" anchor="ctr"/>
-          <a:lstStyle/>
-          <a:p>
-            <a:pPr indent="0" marL="0">
-              <a:buNone/>
-            </a:pPr>
-            <a:r>
-              <a:rPr lang="en-US" sz="1250" b="1" dirty="0">
-                <a:solidFill>
-                  <a:srgbClr val="1F2429"/>
-                </a:solidFill>
-                <a:latin typeface="Calibri" pitchFamily="34" charset="0"/>
-                <a:ea typeface="Calibri" pitchFamily="34" charset="-122"/>
-                <a:cs typeface="Calibri" pitchFamily="34" charset="-120"/>
-              </a:rPr>
-              <a:t>Why organizations adopt the database approach anyway  </a:t>
-            </a:r>
-            <a:endParaRPr lang="en-US" sz="1250" dirty="0"/>
-          </a:p>
-        </p:txBody>
-      </p:sp>
-      <p:sp>
-        <p:nvSpPr>
-          <p:cNvPr id="19" name="Text 17"/>
-          <p:cNvSpPr txBox="1"/>
-          <p:nvPr/>
-        </p:nvSpPr>
-        <p:spPr>
-          <a:xfrm>
-            <a:off x="868680" y="4864608"/>
-            <a:ext cx="10424160" cy="1097280"/>
-          </a:xfrm>
-          <a:prstGeom prst="rect">
-            <a:avLst/>
-          </a:prstGeom>
-          <a:noFill/>
-          <a:ln/>
-        </p:spPr>
-        <p:txBody>
-          <a:bodyPr wrap="square" lIns="0" tIns="0" rIns="0" bIns="0" rtlCol="0" anchor="t"/>
-          <a:lstStyle/>
-          <a:p>
-            <a:pPr indent="0" marL="0">
-              <a:lnSpc>
-                <a:spcPct val="120000"/>
-              </a:lnSpc>
-              <a:buNone/>
-            </a:pPr>
-            <a:r>
-              <a:rPr lang="en-US" sz="1200" dirty="0">
-                <a:solidFill>
-                  <a:srgbClr val="8A939B"/>
-                </a:solidFill>
-                <a:latin typeface="Calibri" pitchFamily="34" charset="0"/>
-                <a:ea typeface="Calibri" pitchFamily="34" charset="-122"/>
-                <a:cs typeface="Calibri" pitchFamily="34" charset="-120"/>
-              </a:rPr>
-              <a:t>The redundancy and inconsistency problems only get worse as an organization grows, while the database approach's costs are largely one-time. A tiny, single-user tool with no sharing requirement may genuinely be better served by a plain file — it's a trade-off, not a universal law.</a:t>
-            </a:r>
-            <a:endParaRPr lang="en-US" sz="1200" dirty="0"/>
+            <a:endParaRPr lang="en-US" sz="1800" dirty="0"/>
           </a:p>
         </p:txBody>
       </p:sp>
@@ -3229,7 +3132,7 @@
               <a:buChar char="•"/>
             </a:pPr>
             <a:r>
-              <a:rPr lang="en-US" sz="1600" dirty="0">
+              <a:rPr lang="en-US" sz="1800" dirty="0">
                 <a:solidFill>
                   <a:srgbClr val="FFFFFF"/>
                 </a:solidFill>
@@ -3239,7 +3142,7 @@
               </a:rPr>
               <a:t>A database is shared, organized, logically related data; a DBMS manages it; an information system is the database, DBMS, and applications together</a:t>
             </a:r>
-            <a:endParaRPr lang="en-US" sz="1600" dirty="0"/>
+            <a:endParaRPr lang="en-US" sz="1800" dirty="0"/>
           </a:p>
           <a:p>
             <a:pPr marL="342900" indent="-342900">
@@ -3250,7 +3153,7 @@
               <a:buChar char="•"/>
             </a:pPr>
             <a:r>
-              <a:rPr lang="en-US" sz="1600" dirty="0">
+              <a:rPr lang="en-US" sz="1800" dirty="0">
                 <a:solidFill>
                   <a:srgbClr val="FFFFFF"/>
                 </a:solidFill>
@@ -3260,7 +3163,7 @@
               </a:rPr>
               <a:t>Databases quietly power banking, airlines, university records, telecom, sales, and HR systems</a:t>
             </a:r>
-            <a:endParaRPr lang="en-US" sz="1600" dirty="0"/>
+            <a:endParaRPr lang="en-US" sz="1800" dirty="0"/>
           </a:p>
           <a:p>
             <a:pPr marL="342900" indent="-342900">
@@ -3271,7 +3174,7 @@
               <a:buChar char="•"/>
             </a:pPr>
             <a:r>
-              <a:rPr lang="en-US" sz="1600" dirty="0">
+              <a:rPr lang="en-US" sz="1800" dirty="0">
                 <a:solidFill>
                   <a:srgbClr val="FFFFFF"/>
                 </a:solidFill>
@@ -3281,7 +3184,7 @@
               </a:rPr>
               <a:t>File-based systems gave each application its own private files, causing redundancy, inconsistency, poor sharing, and program-data dependence</a:t>
             </a:r>
-            <a:endParaRPr lang="en-US" sz="1600" dirty="0"/>
+            <a:endParaRPr lang="en-US" sz="1800" dirty="0"/>
           </a:p>
           <a:p>
             <a:pPr marL="342900" indent="-342900">
@@ -3292,7 +3195,7 @@
               <a:buChar char="•"/>
             </a:pPr>
             <a:r>
-              <a:rPr lang="en-US" sz="1600" dirty="0">
+              <a:rPr lang="en-US" sz="1800" dirty="0">
                 <a:solidFill>
                   <a:srgbClr val="FFFFFF"/>
                 </a:solidFill>
@@ -3302,7 +3205,7 @@
               </a:rPr>
               <a:t>The database approach replaces many private files with one centrally managed, shared pool of data accessed through a DBMS</a:t>
             </a:r>
-            <a:endParaRPr lang="en-US" sz="1600" dirty="0"/>
+            <a:endParaRPr lang="en-US" sz="1800" dirty="0"/>
           </a:p>
           <a:p>
             <a:pPr marL="342900" indent="-342900">
@@ -3313,7 +3216,7 @@
               <a:buChar char="•"/>
             </a:pPr>
             <a:r>
-              <a:rPr lang="en-US" sz="1600" dirty="0">
+              <a:rPr lang="en-US" sz="1800" dirty="0">
                 <a:solidFill>
                   <a:srgbClr val="FFFFFF"/>
                 </a:solidFill>
@@ -3323,7 +3226,7 @@
               </a:rPr>
               <a:t>The database approach earns real advantages — consistency, integrity, security, standards, and recovery — at the cost of complexity, expense, and a bigger blast radius on failure</a:t>
             </a:r>
-            <a:endParaRPr lang="en-US" sz="1600" dirty="0"/>
+            <a:endParaRPr lang="en-US" sz="1800" dirty="0"/>
           </a:p>
         </p:txBody>
       </p:sp>
@@ -3352,7 +3255,7 @@
               <a:buNone/>
             </a:pPr>
             <a:r>
-              <a:rPr lang="en-US" sz="1000" u="sng" dirty="0">
+              <a:rPr lang="en-US" sz="1200" u="sng" dirty="0">
                 <a:solidFill>
                   <a:srgbClr val="8A939B"/>
                 </a:solidFill>
@@ -3373,7 +3276,7 @@
               <a:buNone/>
             </a:pPr>
             <a:r>
-              <a:rPr lang="en-US" sz="1000" dirty="0">
+              <a:rPr lang="en-US" sz="1200" dirty="0">
                 <a:solidFill>
                   <a:srgbClr val="8A939B"/>
                 </a:solidFill>
@@ -3381,9 +3284,9 @@
                 <a:ea typeface="Calibri" pitchFamily="34" charset="-122"/>
                 <a:cs typeface="Calibri" pitchFamily="34" charset="-120"/>
               </a:rPr>
-              <a:t>  ·  12</a:t>
-            </a:r>
-            <a:endParaRPr lang="en-US" sz="1000" dirty="0"/>
+              <a:t>  ·  22</a:t>
+            </a:r>
+            <a:endParaRPr lang="en-US" sz="1200" dirty="0"/>
           </a:p>
         </p:txBody>
       </p:sp>
@@ -3395,7 +3298,7 @@
 </p:sld>
 </file>
 
-<file path=ppt/slides/slide2.xml><?xml version="1.0" encoding="utf-8"?>
+<file path=ppt/slides/slide13.xml><?xml version="1.0" encoding="utf-8"?>
 <p:sld xmlns:a="http://schemas.openxmlformats.org/drawingml/2006/main" xmlns:r="http://schemas.openxmlformats.org/officeDocument/2006/relationships" xmlns:p="http://schemas.openxmlformats.org/presentationml/2006/main">
   <p:cSld name="Slide 2">
     <p:bg>
@@ -3452,7 +3355,7 @@
                 <a:ea typeface="Calibri" pitchFamily="34" charset="-122"/>
                 <a:cs typeface="Calibri" pitchFamily="34" charset="-120"/>
               </a:rPr>
-              <a:t>In This Lecture</a:t>
+              <a:t>Database vs. Spreadsheet</a:t>
             </a:r>
             <a:endParaRPr lang="en-US" sz="2800" dirty="0"/>
           </a:p>
@@ -3483,7 +3386,7 @@
               <a:buNone/>
             </a:pPr>
             <a:r>
-              <a:rPr lang="en-US" sz="1000" u="sng" dirty="0">
+              <a:rPr lang="en-US" sz="1200" u="sng" dirty="0">
                 <a:solidFill>
                   <a:srgbClr val="8A939B"/>
                 </a:solidFill>
@@ -3504,7 +3407,7 @@
               <a:buNone/>
             </a:pPr>
             <a:r>
-              <a:rPr lang="en-US" sz="1000" dirty="0">
+              <a:rPr lang="en-US" sz="1200" dirty="0">
                 <a:solidFill>
                   <a:srgbClr val="8A939B"/>
                 </a:solidFill>
@@ -3512,9 +3415,9 @@
                 <a:ea typeface="Calibri" pitchFamily="34" charset="-122"/>
                 <a:cs typeface="Calibri" pitchFamily="34" charset="-120"/>
               </a:rPr>
-              <a:t>  ·  2</a:t>
-            </a:r>
-            <a:endParaRPr lang="en-US" sz="1000" dirty="0"/>
+              <a:t>  ·  4</a:t>
+            </a:r>
+            <a:endParaRPr lang="en-US" sz="1200" dirty="0"/>
           </a:p>
         </p:txBody>
       </p:sp>
@@ -3547,7 +3450,7 @@
               <a:buChar char="•"/>
             </a:pPr>
             <a:r>
-              <a:rPr lang="en-US" sz="1600" dirty="0">
+              <a:rPr lang="en-US" sz="1800" dirty="0">
                 <a:solidFill>
                   <a:srgbClr val="1F2429"/>
                 </a:solidFill>
@@ -3555,9 +3458,9 @@
                 <a:ea typeface="Calibri" pitchFamily="34" charset="-122"/>
                 <a:cs typeface="Calibri" pitchFamily="34" charset="-120"/>
               </a:rPr>
-              <a:t>What a database is, and how it differs from an information system built around one</a:t>
-            </a:r>
-            <a:endParaRPr lang="en-US" sz="1600" dirty="0"/>
+              <a:t>A spreadsheet stores data too — but it has none of a DBMS's built-in guarantees</a:t>
+            </a:r>
+            <a:endParaRPr lang="en-US" sz="1800" dirty="0"/>
           </a:p>
           <a:p>
             <a:pPr marL="342900" indent="-342900">
@@ -3568,7 +3471,7 @@
               <a:buChar char="•"/>
             </a:pPr>
             <a:r>
-              <a:rPr lang="en-US" sz="1600" dirty="0">
+              <a:rPr lang="en-US" sz="1800" dirty="0">
                 <a:solidFill>
                   <a:srgbClr val="1F2429"/>
                 </a:solidFill>
@@ -3576,9 +3479,9 @@
                 <a:ea typeface="Calibri" pitchFamily="34" charset="-122"/>
                 <a:cs typeface="Calibri" pitchFamily="34" charset="-120"/>
               </a:rPr>
-              <a:t>Common categories of database applications you already use</a:t>
-            </a:r>
-            <a:endParaRPr lang="en-US" sz="1600" dirty="0"/>
+              <a:t>No enforced structure: nothing stops a “Student ID” column from holding text, duplicates, or values with no matching student</a:t>
+            </a:r>
+            <a:endParaRPr lang="en-US" sz="1800" dirty="0"/>
           </a:p>
           <a:p>
             <a:pPr marL="342900" indent="-342900">
@@ -3589,7 +3492,7 @@
               <a:buChar char="•"/>
             </a:pPr>
             <a:r>
-              <a:rPr lang="en-US" sz="1600" dirty="0">
+              <a:rPr lang="en-US" sz="1800" dirty="0">
                 <a:solidFill>
                   <a:srgbClr val="1F2429"/>
                 </a:solidFill>
@@ -3597,9 +3500,9 @@
                 <a:ea typeface="Calibri" pitchFamily="34" charset="-122"/>
                 <a:cs typeface="Calibri" pitchFamily="34" charset="-120"/>
               </a:rPr>
-              <a:t>How data management evolved from manual filing to file-based systems to databases</a:t>
-            </a:r>
-            <a:endParaRPr lang="en-US" sz="1600" dirty="0"/>
+              <a:t>No safe concurrent access: a DBMS lets 50 people update the same data at once without corrupting it; a shared spreadsheet file cannot</a:t>
+            </a:r>
+            <a:endParaRPr lang="en-US" sz="1800" dirty="0"/>
           </a:p>
           <a:p>
             <a:pPr marL="342900" indent="-342900">
@@ -3610,7 +3513,7 @@
               <a:buChar char="•"/>
             </a:pPr>
             <a:r>
-              <a:rPr lang="en-US" sz="1600" dirty="0">
+              <a:rPr lang="en-US" sz="1800" dirty="0">
                 <a:solidFill>
                   <a:srgbClr val="1F2429"/>
                 </a:solidFill>
@@ -3618,9 +3521,9 @@
                 <a:ea typeface="Calibri" pitchFamily="34" charset="-122"/>
                 <a:cs typeface="Calibri" pitchFamily="34" charset="-120"/>
               </a:rPr>
-              <a:t>File-based systems: how they worked, and the problems that forced a rethink</a:t>
-            </a:r>
-            <a:endParaRPr lang="en-US" sz="1600" dirty="0"/>
+              <a:t>No crash recovery: a DBMS restores a consistent state after a crash; a spreadsheet application offers no such guarantee</a:t>
+            </a:r>
+            <a:endParaRPr lang="en-US" sz="1800" dirty="0"/>
           </a:p>
           <a:p>
             <a:pPr marL="342900" indent="-342900">
@@ -3631,7 +3534,7 @@
               <a:buChar char="•"/>
             </a:pPr>
             <a:r>
-              <a:rPr lang="en-US" sz="1600" dirty="0">
+              <a:rPr lang="en-US" sz="1800" dirty="0">
                 <a:solidFill>
                   <a:srgbClr val="1F2429"/>
                 </a:solidFill>
@@ -3639,30 +3542,9 @@
                 <a:ea typeface="Calibri" pitchFamily="34" charset="-122"/>
                 <a:cs typeface="Calibri" pitchFamily="34" charset="-120"/>
               </a:rPr>
-              <a:t>The database approach: what changes, concretely, when data is centralized</a:t>
-            </a:r>
-            <a:endParaRPr lang="en-US" sz="1600" dirty="0"/>
-          </a:p>
-          <a:p>
-            <a:pPr marL="342900" indent="-342900">
-              <a:spcAft>
-                <a:spcPts val="1800"/>
-              </a:spcAft>
-              <a:buSzPct val="100000"/>
-              <a:buChar char="•"/>
-            </a:pPr>
-            <a:r>
-              <a:rPr lang="en-US" sz="1600" dirty="0">
-                <a:solidFill>
-                  <a:srgbClr val="1F2429"/>
-                </a:solidFill>
-                <a:latin typeface="Calibri" pitchFamily="34" charset="0"/>
-                <a:ea typeface="Calibri" pitchFamily="34" charset="-122"/>
-                <a:cs typeface="Calibri" pitchFamily="34" charset="-120"/>
-              </a:rPr>
-              <a:t>The advantages a DBMS gives you — and the real costs it imposes in return</a:t>
-            </a:r>
-            <a:endParaRPr lang="en-US" sz="1600" dirty="0"/>
+              <a:t>Rule of thumb: if multiple people must trust the same numbers at the same time, it belongs in a database, not a spreadsheet</a:t>
+            </a:r>
+            <a:endParaRPr lang="en-US" sz="1800" dirty="0"/>
           </a:p>
         </p:txBody>
       </p:sp>
@@ -3674,9 +3556,9 @@
 </p:sld>
 </file>
 
-<file path=ppt/slides/slide3.xml><?xml version="1.0" encoding="utf-8"?>
+<file path=ppt/slides/slide14.xml><?xml version="1.0" encoding="utf-8"?>
 <p:sld xmlns:a="http://schemas.openxmlformats.org/drawingml/2006/main" xmlns:r="http://schemas.openxmlformats.org/officeDocument/2006/relationships" xmlns:p="http://schemas.openxmlformats.org/presentationml/2006/main">
-  <p:cSld name="Slide 3">
+  <p:cSld name="Slide 2">
     <p:bg>
       <p:bgPr>
         <a:solidFill>
@@ -3731,7 +3613,7 @@
                 <a:ea typeface="Calibri" pitchFamily="34" charset="-122"/>
                 <a:cs typeface="Calibri" pitchFamily="34" charset="-120"/>
               </a:rPr>
-              <a:t>Databases and Information Systems</a:t>
+              <a:t>Is This Really a Database Problem?</a:t>
             </a:r>
             <a:endParaRPr lang="en-US" sz="2800" dirty="0"/>
           </a:p>
@@ -3762,7 +3644,7 @@
               <a:buNone/>
             </a:pPr>
             <a:r>
-              <a:rPr lang="en-US" sz="1000" u="sng" dirty="0">
+              <a:rPr lang="en-US" sz="1200" u="sng" dirty="0">
                 <a:solidFill>
                   <a:srgbClr val="8A939B"/>
                 </a:solidFill>
@@ -3783,7 +3665,7 @@
               <a:buNone/>
             </a:pPr>
             <a:r>
-              <a:rPr lang="en-US" sz="1000" dirty="0">
+              <a:rPr lang="en-US" sz="1200" dirty="0">
                 <a:solidFill>
                   <a:srgbClr val="8A939B"/>
                 </a:solidFill>
@@ -3791,9 +3673,9 @@
                 <a:ea typeface="Calibri" pitchFamily="34" charset="-122"/>
                 <a:cs typeface="Calibri" pitchFamily="34" charset="-120"/>
               </a:rPr>
-              <a:t>  ·  3</a:t>
-            </a:r>
-            <a:endParaRPr lang="en-US" sz="1000" dirty="0"/>
+              <a:t>  ·  6</a:t>
+            </a:r>
+            <a:endParaRPr lang="en-US" sz="1200" dirty="0"/>
           </a:p>
         </p:txBody>
       </p:sp>
@@ -3805,8 +3687,8 @@
         </p:nvSpPr>
         <p:spPr>
           <a:xfrm>
-            <a:off x="640080" y="1234440"/>
-            <a:ext cx="10332720" cy="685800"/>
+            <a:off x="640080" y="1371600"/>
+            <a:ext cx="10332720" cy="4846320"/>
           </a:xfrm>
           <a:prstGeom prst="rect">
             <a:avLst/>
@@ -3818,11 +3700,170 @@
           <a:bodyPr wrap="square" lIns="0" tIns="0" rIns="0" bIns="0" rtlCol="0" anchor="t"/>
           <a:lstStyle/>
           <a:p>
+            <a:pPr marL="342900" indent="-342900">
+              <a:spcAft>
+                <a:spcPts val="1800"/>
+              </a:spcAft>
+              <a:buSzPct val="100000"/>
+              <a:buChar char="•"/>
+            </a:pPr>
+            <a:r>
+              <a:rPr lang="en-US" sz="1800" dirty="0">
+                <a:solidFill>
+                  <a:srgbClr val="1F2429"/>
+                </a:solidFill>
+                <a:latin typeface="Calibri" pitchFamily="34" charset="0"/>
+                <a:ea typeface="Calibri" pitchFamily="34" charset="-122"/>
+                <a:cs typeface="Calibri" pitchFamily="34" charset="-120"/>
+              </a:rPr>
+              <a:t>The three-part test: shared by more than one person or program; must stay accurate under concurrent updates; must survive a crash without silent loss</a:t>
+            </a:r>
+            <a:endParaRPr lang="en-US" sz="1800" dirty="0"/>
+          </a:p>
+          <a:p>
+            <a:pPr marL="342900" indent="-342900">
+              <a:spcAft>
+                <a:spcPts val="1800"/>
+              </a:spcAft>
+              <a:buSzPct val="100000"/>
+              <a:buChar char="•"/>
+            </a:pPr>
+            <a:r>
+              <a:rPr lang="en-US" sz="1800" dirty="0">
+                <a:solidFill>
+                  <a:srgbClr val="1F2429"/>
+                </a:solidFill>
+                <a:latin typeface="Calibri" pitchFamily="34" charset="0"/>
+                <a:ea typeface="Calibri" pitchFamily="34" charset="-122"/>
+                <a:cs typeface="Calibri" pitchFamily="34" charset="-120"/>
+              </a:rPr>
+              <a:t>Case A — a professor's personal sign-up sheet that no one else reads: fails all three conditions, so a plain file is fine</a:t>
+            </a:r>
+            <a:endParaRPr lang="en-US" sz="1800" dirty="0"/>
+          </a:p>
+          <a:p>
+            <a:pPr marL="342900" indent="-342900">
+              <a:spcAft>
+                <a:spcPts val="1800"/>
+              </a:spcAft>
+              <a:buSzPct val="100000"/>
+              <a:buChar char="•"/>
+            </a:pPr>
+            <a:r>
+              <a:rPr lang="en-US" sz="1800" dirty="0">
+                <a:solidFill>
+                  <a:srgbClr val="1F2429"/>
+                </a:solidFill>
+                <a:latin typeface="Calibri" pitchFamily="34" charset="0"/>
+                <a:ea typeface="Calibri" pitchFamily="34" charset="-122"/>
+                <a:cs typeface="Calibri" pitchFamily="34" charset="-120"/>
+              </a:rPr>
+              <a:t>Case B — the same sign-up sheet, now also read by the department office and by TAs to confirm attendance: now shared and must stay consistent, so it belongs in a database</a:t>
+            </a:r>
+            <a:endParaRPr lang="en-US" sz="1800" dirty="0"/>
+          </a:p>
+          <a:p>
+            <a:pPr marL="342900" indent="-342900">
+              <a:spcAft>
+                <a:spcPts val="1800"/>
+              </a:spcAft>
+              <a:buSzPct val="100000"/>
+              <a:buChar char="•"/>
+            </a:pPr>
+            <a:r>
+              <a:rPr lang="en-US" sz="1800" dirty="0">
+                <a:solidFill>
+                  <a:srgbClr val="1F2429"/>
+                </a:solidFill>
+                <a:latin typeface="Calibri" pitchFamily="34" charset="0"/>
+                <a:ea typeface="Calibri" pitchFamily="34" charset="-122"/>
+                <a:cs typeface="Calibri" pitchFamily="34" charset="-120"/>
+              </a:rPr>
+              <a:t>The test is about consequences, not size: a small table many people rely on at once needs a database; a huge file only one program ever touches may not</a:t>
+            </a:r>
+            <a:endParaRPr lang="en-US" sz="1800" dirty="0"/>
+          </a:p>
+          <a:p>
+            <a:pPr marL="342900" indent="-342900">
+              <a:spcAft>
+                <a:spcPts val="1800"/>
+              </a:spcAft>
+              <a:buSzPct val="100000"/>
+              <a:buChar char="•"/>
+            </a:pPr>
+            <a:r>
+              <a:rPr lang="en-US" sz="1800" dirty="0">
+                <a:solidFill>
+                  <a:srgbClr val="1F2429"/>
+                </a:solidFill>
+                <a:latin typeface="Calibri" pitchFamily="34" charset="0"/>
+                <a:ea typeface="Calibri" pitchFamily="34" charset="-122"/>
+                <a:cs typeface="Calibri" pitchFamily="34" charset="-120"/>
+              </a:rPr>
+              <a:t>Banking, airlines, and university records all pass this test immediately — that is exactly why they are database applications</a:t>
+            </a:r>
+            <a:endParaRPr lang="en-US" sz="1800" dirty="0"/>
+          </a:p>
+        </p:txBody>
+      </p:sp>
+    </p:spTree>
+  </p:cSld>
+  <p:clrMapOvr>
+    <a:masterClrMapping/>
+  </p:clrMapOvr>
+</p:sld>
+</file>
+
+<file path=ppt/slides/slide15.xml><?xml version="1.0" encoding="utf-8"?>
+<p:sld xmlns:a="http://schemas.openxmlformats.org/drawingml/2006/main" xmlns:r="http://schemas.openxmlformats.org/officeDocument/2006/relationships" xmlns:p="http://schemas.openxmlformats.org/presentationml/2006/main">
+  <p:cSld name="Slide 2">
+    <p:bg>
+      <p:bgPr>
+        <a:solidFill>
+          <a:srgbClr val="F7F8F9"/>
+        </a:solidFill>
+      </p:bgPr>
+    </p:bg>
+    <p:spTree>
+      <p:nvGrpSpPr>
+        <p:cNvPr id="1" name=""/>
+        <p:cNvGrpSpPr/>
+        <p:nvPr/>
+      </p:nvGrpSpPr>
+      <p:grpSpPr>
+        <a:xfrm>
+          <a:off x="0" y="0"/>
+          <a:ext cx="0" cy="0"/>
+          <a:chOff x="0" y="0"/>
+          <a:chExt cx="0" cy="0"/>
+        </a:xfrm>
+      </p:grpSpPr>
+      <p:sp>
+        <p:nvSpPr>
+          <p:cNvPr id="2" name="Text 0"/>
+          <p:cNvSpPr txBox="1"/>
+          <p:nvPr/>
+        </p:nvSpPr>
+        <p:spPr>
+          <a:xfrm>
+            <a:off x="548640" y="365760"/>
+            <a:ext cx="11064240" cy="731520"/>
+          </a:xfrm>
+          <a:prstGeom prst="rect">
+            <a:avLst/>
+          </a:prstGeom>
+          <a:noFill/>
+          <a:ln/>
+        </p:spPr>
+        <p:txBody>
+          <a:bodyPr wrap="square" lIns="0" tIns="0" rIns="0" bIns="0" rtlCol="0" anchor="ctr"/>
+          <a:lstStyle/>
+          <a:p>
             <a:pPr indent="0" marL="0">
               <a:buNone/>
             </a:pPr>
             <a:r>
-              <a:rPr lang="en-US" sz="1600" dirty="0">
+              <a:rPr lang="en-US" sz="2800" b="1" dirty="0">
                 <a:solidFill>
                   <a:srgbClr val="1F2429"/>
                 </a:solidFill>
@@ -3830,50 +3871,82 @@
                 <a:ea typeface="Calibri" pitchFamily="34" charset="-122"/>
                 <a:cs typeface="Calibri" pitchFamily="34" charset="-120"/>
               </a:rPr>
-              <a:t>A </a:t>
-            </a:r>
-            <a:pPr indent="0" marL="0">
-              <a:buNone/>
-            </a:pPr>
-            <a:r>
-              <a:rPr lang="en-US" sz="1600" b="1" dirty="0">
-                <a:solidFill>
-                  <a:srgbClr val="8B7FD9"/>
-                </a:solidFill>
-                <a:latin typeface="Calibri" pitchFamily="34" charset="0"/>
-                <a:ea typeface="Calibri" pitchFamily="34" charset="-122"/>
-                <a:cs typeface="Calibri" pitchFamily="34" charset="-120"/>
-              </a:rPr>
-              <a:t>database</a:t>
-            </a:r>
-            <a:pPr indent="0" marL="0">
-              <a:buNone/>
-            </a:pPr>
-            <a:r>
-              <a:rPr lang="en-US" sz="1600" dirty="0">
-                <a:solidFill>
-                  <a:srgbClr val="1F2429"/>
-                </a:solidFill>
-                <a:latin typeface="Calibri" pitchFamily="34" charset="0"/>
-                <a:ea typeface="Calibri" pitchFamily="34" charset="-122"/>
-                <a:cs typeface="Calibri" pitchFamily="34" charset="-120"/>
-              </a:rPr>
-              <a:t> is a shared, organized collection of logically related data, designed to meet an organization's information needs.</a:t>
-            </a:r>
-            <a:endParaRPr lang="en-US" sz="1600" dirty="0"/>
+              <a:t>Why Focus on File-Based Systems First?</a:t>
+            </a:r>
+            <a:endParaRPr lang="en-US" sz="2800" dirty="0"/>
           </a:p>
         </p:txBody>
       </p:sp>
       <p:sp>
         <p:nvSpPr>
-          <p:cNvPr id="5" name="Text 3"/>
+          <p:cNvPr id="3" name="Text 1"/>
           <p:cNvSpPr txBox="1"/>
           <p:nvPr/>
         </p:nvSpPr>
         <p:spPr>
           <a:xfrm>
-            <a:off x="640080" y="1965960"/>
-            <a:ext cx="10332720" cy="1554480"/>
+            <a:off x="9951415" y="6455664"/>
+            <a:ext cx="2011680" cy="292608"/>
+          </a:xfrm>
+          <a:prstGeom prst="rect">
+            <a:avLst/>
+          </a:prstGeom>
+          <a:noFill/>
+          <a:ln/>
+        </p:spPr>
+        <p:txBody>
+          <a:bodyPr wrap="square" lIns="0" tIns="0" rIns="0" bIns="0" rtlCol="0" anchor="ctr"/>
+          <a:lstStyle/>
+          <a:p>
+            <a:pPr algn="r" indent="0" marL="0">
+              <a:buNone/>
+            </a:pPr>
+            <a:r>
+              <a:rPr lang="en-US" sz="1200" u="sng" dirty="0">
+                <a:solidFill>
+                  <a:srgbClr val="8A939B"/>
+                </a:solidFill>
+                <a:latin typeface="Calibri" pitchFamily="34" charset="0"/>
+                <a:ea typeface="Calibri" pitchFamily="34" charset="-122"/>
+                <a:cs typeface="Calibri" pitchFamily="34" charset="-120"/>
+                <a:hlinkClick r:id="rId1" invalidUrl="" action="" tgtFrame="" tooltip="" history="1" highlightClick="0" endSnd="0">
+                  <a:extLst>
+                    <a:ext uri="{A12FA001-AC4F-418D-AE19-62706E023703}">
+                      <ahyp:hlinkClr xmlns:ahyp="http://schemas.microsoft.com/office/drawing/2018/hyperlinkcolor" val="tx"/>
+                    </a:ext>
+                  </a:extLst>
+                </a:hlinkClick>
+              </a:rPr>
+              <a:t>cuinotes.com</a:t>
+            </a:r>
+            <a:pPr algn="r" indent="0" marL="0">
+              <a:buNone/>
+            </a:pPr>
+            <a:r>
+              <a:rPr lang="en-US" sz="1200" dirty="0">
+                <a:solidFill>
+                  <a:srgbClr val="8A939B"/>
+                </a:solidFill>
+                <a:latin typeface="Calibri" pitchFamily="34" charset="0"/>
+                <a:ea typeface="Calibri" pitchFamily="34" charset="-122"/>
+                <a:cs typeface="Calibri" pitchFamily="34" charset="-120"/>
+              </a:rPr>
+              <a:t>  ·  8</a:t>
+            </a:r>
+            <a:endParaRPr lang="en-US" sz="1200" dirty="0"/>
+          </a:p>
+        </p:txBody>
+      </p:sp>
+      <p:sp>
+        <p:nvSpPr>
+          <p:cNvPr id="4" name="Text 2"/>
+          <p:cNvSpPr txBox="1"/>
+          <p:nvPr/>
+        </p:nvSpPr>
+        <p:spPr>
+          <a:xfrm>
+            <a:off x="640080" y="1371600"/>
+            <a:ext cx="10332720" cy="4846320"/>
           </a:xfrm>
           <a:prstGeom prst="rect">
             <a:avLst/>
@@ -3887,13 +3960,13 @@
           <a:p>
             <a:pPr marL="342900" indent="-342900">
               <a:spcAft>
-                <a:spcPts val="800"/>
+                <a:spcPts val="1800"/>
               </a:spcAft>
               <a:buSzPct val="100000"/>
               <a:buChar char="•"/>
             </a:pPr>
             <a:r>
-              <a:rPr lang="en-US" sz="1350" dirty="0">
+              <a:rPr lang="en-US" sz="1800" dirty="0">
                 <a:solidFill>
                   <a:srgbClr val="1F2429"/>
                 </a:solidFill>
@@ -3901,20 +3974,20 @@
                 <a:ea typeface="Calibri" pitchFamily="34" charset="-122"/>
                 <a:cs typeface="Calibri" pitchFamily="34" charset="-120"/>
               </a:rPr>
-              <a:t>Shared — many users and programs draw on the same data, not private copies</a:t>
-            </a:r>
-            <a:endParaRPr lang="en-US" sz="1350" dirty="0"/>
+              <a:t>Memorizing the three stages — manual filing, file-based systems, the database approach — is not the point of this lecture</a:t>
+            </a:r>
+            <a:endParaRPr lang="en-US" sz="1800" dirty="0"/>
           </a:p>
           <a:p>
             <a:pPr marL="342900" indent="-342900">
               <a:spcAft>
-                <a:spcPts val="800"/>
+                <a:spcPts val="1800"/>
               </a:spcAft>
               <a:buSzPct val="100000"/>
               <a:buChar char="•"/>
             </a:pPr>
             <a:r>
-              <a:rPr lang="en-US" sz="1350" dirty="0">
+              <a:rPr lang="en-US" sz="1800" dirty="0">
                 <a:solidFill>
                   <a:srgbClr val="1F2429"/>
                 </a:solidFill>
@@ -3922,20 +3995,20 @@
                 <a:ea typeface="Calibri" pitchFamily="34" charset="-122"/>
                 <a:cs typeface="Calibri" pitchFamily="34" charset="-120"/>
               </a:rPr>
-              <a:t>Organized — structured so it can be found, related, and reasoned about</a:t>
-            </a:r>
-            <a:endParaRPr lang="en-US" sz="1350" dirty="0"/>
+              <a:t>What matters is understanding why each stage failed, because that failure is exactly what the next stage was built to fix</a:t>
+            </a:r>
+            <a:endParaRPr lang="en-US" sz="1800" dirty="0"/>
           </a:p>
           <a:p>
             <a:pPr marL="342900" indent="-342900">
               <a:spcAft>
-                <a:spcPts val="800"/>
+                <a:spcPts val="1800"/>
               </a:spcAft>
               <a:buSzPct val="100000"/>
               <a:buChar char="•"/>
             </a:pPr>
             <a:r>
-              <a:rPr lang="en-US" sz="1350" dirty="0">
+              <a:rPr lang="en-US" sz="1800" dirty="0">
                 <a:solidFill>
                   <a:srgbClr val="1F2429"/>
                 </a:solidFill>
@@ -3943,388 +4016,30 @@
                 <a:ea typeface="Calibri" pitchFamily="34" charset="-122"/>
                 <a:cs typeface="Calibri" pitchFamily="34" charset="-120"/>
               </a:rPr>
-              <a:t>Logically related — records about the same real-world entity are known to be connected</a:t>
-            </a:r>
-            <a:endParaRPr lang="en-US" sz="1350" dirty="0"/>
-          </a:p>
-        </p:txBody>
-      </p:sp>
-      <p:sp>
-        <p:nvSpPr>
-          <p:cNvPr id="6" name="Text 4"/>
-          <p:cNvSpPr txBox="1"/>
-          <p:nvPr/>
-        </p:nvSpPr>
-        <p:spPr>
-          <a:xfrm>
-            <a:off x="640080" y="3703320"/>
-            <a:ext cx="10881360" cy="274320"/>
-          </a:xfrm>
-          <a:prstGeom prst="rect">
-            <a:avLst/>
-          </a:prstGeom>
-          <a:noFill/>
-          <a:ln/>
-        </p:spPr>
-        <p:txBody>
-          <a:bodyPr wrap="square" lIns="0" tIns="0" rIns="0" bIns="0" rtlCol="0" anchor="ctr"/>
-          <a:lstStyle/>
-          <a:p>
-            <a:pPr indent="0" marL="0">
-              <a:buNone/>
-            </a:pPr>
-            <a:r>
-              <a:rPr lang="en-US" sz="1200" b="1" dirty="0">
-                <a:solidFill>
-                  <a:srgbClr val="8A939B"/>
-                </a:solidFill>
-                <a:latin typeface="Calibri" pitchFamily="34" charset="0"/>
-                <a:ea typeface="Calibri" pitchFamily="34" charset="-122"/>
-                <a:cs typeface="Calibri" pitchFamily="34" charset="-120"/>
-              </a:rPr>
-              <a:t>From data to an information system</a:t>
-            </a:r>
-            <a:endParaRPr lang="en-US" sz="1200" dirty="0"/>
-          </a:p>
-        </p:txBody>
-      </p:sp>
-      <p:sp>
-        <p:nvSpPr>
-          <p:cNvPr id="7" name="Shape 5"/>
-          <p:cNvSpPr/>
-          <p:nvPr/>
-        </p:nvSpPr>
-        <p:spPr>
-          <a:xfrm>
-            <a:off x="640080" y="4023360"/>
-            <a:ext cx="3352800" cy="1097280"/>
-          </a:xfrm>
-          <a:prstGeom prst="roundRect">
-            <a:avLst>
-              <a:gd name="adj" fmla="val 6667"/>
-            </a:avLst>
-          </a:prstGeom>
-          <a:solidFill>
-            <a:srgbClr val="2FE6C4"/>
-          </a:solidFill>
-          <a:ln/>
-        </p:spPr>
-      </p:sp>
-      <p:sp>
-        <p:nvSpPr>
-          <p:cNvPr id="8" name="Text 6"/>
-          <p:cNvSpPr txBox="1"/>
-          <p:nvPr/>
-        </p:nvSpPr>
-        <p:spPr>
-          <a:xfrm>
-            <a:off x="777240" y="4133088"/>
-            <a:ext cx="3078480" cy="320040"/>
-          </a:xfrm>
-          <a:prstGeom prst="rect">
-            <a:avLst/>
-          </a:prstGeom>
-          <a:noFill/>
-          <a:ln/>
-        </p:spPr>
-        <p:txBody>
-          <a:bodyPr wrap="square" lIns="0" tIns="0" rIns="0" bIns="0" rtlCol="0" anchor="ctr"/>
-          <a:lstStyle/>
-          <a:p>
-            <a:pPr indent="0" marL="0">
-              <a:buNone/>
-            </a:pPr>
-            <a:r>
-              <a:rPr lang="en-US" sz="1300" b="1" dirty="0">
-                <a:solidFill>
-                  <a:srgbClr val="FFFFFF"/>
-                </a:solidFill>
-                <a:latin typeface="Calibri" pitchFamily="34" charset="0"/>
-                <a:ea typeface="Calibri" pitchFamily="34" charset="-122"/>
-                <a:cs typeface="Calibri" pitchFamily="34" charset="-120"/>
-              </a:rPr>
-              <a:t>Database</a:t>
-            </a:r>
-            <a:endParaRPr lang="en-US" sz="1300" dirty="0"/>
-          </a:p>
-        </p:txBody>
-      </p:sp>
-      <p:sp>
-        <p:nvSpPr>
-          <p:cNvPr id="9" name="Text 7"/>
-          <p:cNvSpPr txBox="1"/>
-          <p:nvPr/>
-        </p:nvSpPr>
-        <p:spPr>
-          <a:xfrm>
-            <a:off x="777240" y="4480560"/>
-            <a:ext cx="3078480" cy="548640"/>
-          </a:xfrm>
-          <a:prstGeom prst="rect">
-            <a:avLst/>
-          </a:prstGeom>
-          <a:noFill/>
-          <a:ln/>
-        </p:spPr>
-        <p:txBody>
-          <a:bodyPr wrap="square" lIns="0" tIns="0" rIns="0" bIns="0" rtlCol="0" anchor="t"/>
-          <a:lstStyle/>
-          <a:p>
-            <a:pPr indent="0" marL="0">
-              <a:buNone/>
-            </a:pPr>
-            <a:r>
-              <a:rPr lang="en-US" sz="1000" dirty="0">
-                <a:solidFill>
-                  <a:srgbClr val="FFFFFF"/>
-                </a:solidFill>
-                <a:latin typeface="Calibri" pitchFamily="34" charset="0"/>
-                <a:ea typeface="Calibri" pitchFamily="34" charset="-122"/>
-                <a:cs typeface="Calibri" pitchFamily="34" charset="-120"/>
-              </a:rPr>
-              <a:t>Organized, shared, logically related data</a:t>
-            </a:r>
-            <a:endParaRPr lang="en-US" sz="1000" dirty="0"/>
-          </a:p>
-        </p:txBody>
-      </p:sp>
-      <p:sp>
-        <p:nvSpPr>
-          <p:cNvPr id="10" name="Shape 8"/>
-          <p:cNvSpPr/>
-          <p:nvPr/>
-        </p:nvSpPr>
-        <p:spPr>
-          <a:xfrm>
-            <a:off x="4038600" y="4489704"/>
-            <a:ext cx="320040" cy="164592"/>
-          </a:xfrm>
-          <a:prstGeom prst="rightArrow">
-            <a:avLst/>
-          </a:prstGeom>
-          <a:solidFill>
-            <a:srgbClr val="8A939B"/>
-          </a:solidFill>
-          <a:ln/>
-        </p:spPr>
-      </p:sp>
-      <p:sp>
-        <p:nvSpPr>
-          <p:cNvPr id="11" name="Shape 9"/>
-          <p:cNvSpPr/>
-          <p:nvPr/>
-        </p:nvSpPr>
-        <p:spPr>
-          <a:xfrm>
-            <a:off x="4404360" y="4023360"/>
-            <a:ext cx="3352800" cy="1097280"/>
-          </a:xfrm>
-          <a:prstGeom prst="roundRect">
-            <a:avLst>
-              <a:gd name="adj" fmla="val 6667"/>
-            </a:avLst>
-          </a:prstGeom>
-          <a:solidFill>
-            <a:srgbClr val="8B7FD9"/>
-          </a:solidFill>
-          <a:ln/>
-        </p:spPr>
-      </p:sp>
-      <p:sp>
-        <p:nvSpPr>
-          <p:cNvPr id="12" name="Text 10"/>
-          <p:cNvSpPr txBox="1"/>
-          <p:nvPr/>
-        </p:nvSpPr>
-        <p:spPr>
-          <a:xfrm>
-            <a:off x="4541520" y="4133088"/>
-            <a:ext cx="3078480" cy="320040"/>
-          </a:xfrm>
-          <a:prstGeom prst="rect">
-            <a:avLst/>
-          </a:prstGeom>
-          <a:noFill/>
-          <a:ln/>
-        </p:spPr>
-        <p:txBody>
-          <a:bodyPr wrap="square" lIns="0" tIns="0" rIns="0" bIns="0" rtlCol="0" anchor="ctr"/>
-          <a:lstStyle/>
-          <a:p>
-            <a:pPr indent="0" marL="0">
-              <a:buNone/>
-            </a:pPr>
-            <a:r>
-              <a:rPr lang="en-US" sz="1300" b="1" dirty="0">
-                <a:solidFill>
-                  <a:srgbClr val="FFFFFF"/>
-                </a:solidFill>
-                <a:latin typeface="Calibri" pitchFamily="34" charset="0"/>
-                <a:ea typeface="Calibri" pitchFamily="34" charset="-122"/>
-                <a:cs typeface="Calibri" pitchFamily="34" charset="-120"/>
-              </a:rPr>
-              <a:t>DBMS</a:t>
-            </a:r>
-            <a:endParaRPr lang="en-US" sz="1300" dirty="0"/>
-          </a:p>
-        </p:txBody>
-      </p:sp>
-      <p:sp>
-        <p:nvSpPr>
-          <p:cNvPr id="13" name="Text 11"/>
-          <p:cNvSpPr txBox="1"/>
-          <p:nvPr/>
-        </p:nvSpPr>
-        <p:spPr>
-          <a:xfrm>
-            <a:off x="4541520" y="4480560"/>
-            <a:ext cx="3078480" cy="548640"/>
-          </a:xfrm>
-          <a:prstGeom prst="rect">
-            <a:avLst/>
-          </a:prstGeom>
-          <a:noFill/>
-          <a:ln/>
-        </p:spPr>
-        <p:txBody>
-          <a:bodyPr wrap="square" lIns="0" tIns="0" rIns="0" bIns="0" rtlCol="0" anchor="t"/>
-          <a:lstStyle/>
-          <a:p>
-            <a:pPr indent="0" marL="0">
-              <a:buNone/>
-            </a:pPr>
-            <a:r>
-              <a:rPr lang="en-US" sz="1000" dirty="0">
-                <a:solidFill>
-                  <a:srgbClr val="FFFFFF"/>
-                </a:solidFill>
-                <a:latin typeface="Calibri" pitchFamily="34" charset="0"/>
-                <a:ea typeface="Calibri" pitchFamily="34" charset="-122"/>
-                <a:cs typeface="Calibri" pitchFamily="34" charset="-120"/>
-              </a:rPr>
-              <a:t>Software that stores, retrieves, and protects that data</a:t>
-            </a:r>
-            <a:endParaRPr lang="en-US" sz="1000" dirty="0"/>
-          </a:p>
-        </p:txBody>
-      </p:sp>
-      <p:sp>
-        <p:nvSpPr>
-          <p:cNvPr id="14" name="Shape 12"/>
-          <p:cNvSpPr/>
-          <p:nvPr/>
-        </p:nvSpPr>
-        <p:spPr>
-          <a:xfrm>
-            <a:off x="7802880" y="4489704"/>
-            <a:ext cx="320040" cy="164592"/>
-          </a:xfrm>
-          <a:prstGeom prst="rightArrow">
-            <a:avLst/>
-          </a:prstGeom>
-          <a:solidFill>
-            <a:srgbClr val="8A939B"/>
-          </a:solidFill>
-          <a:ln/>
-        </p:spPr>
-      </p:sp>
-      <p:sp>
-        <p:nvSpPr>
-          <p:cNvPr id="15" name="Shape 13"/>
-          <p:cNvSpPr/>
-          <p:nvPr/>
-        </p:nvSpPr>
-        <p:spPr>
-          <a:xfrm>
-            <a:off x="8168640" y="4023360"/>
-            <a:ext cx="3352800" cy="1097280"/>
-          </a:xfrm>
-          <a:prstGeom prst="roundRect">
-            <a:avLst>
-              <a:gd name="adj" fmla="val 6667"/>
-            </a:avLst>
-          </a:prstGeom>
-          <a:solidFill>
-            <a:srgbClr val="E8A33D"/>
-          </a:solidFill>
-          <a:ln/>
-        </p:spPr>
-      </p:sp>
-      <p:sp>
-        <p:nvSpPr>
-          <p:cNvPr id="16" name="Text 14"/>
-          <p:cNvSpPr txBox="1"/>
-          <p:nvPr/>
-        </p:nvSpPr>
-        <p:spPr>
-          <a:xfrm>
-            <a:off x="8305800" y="4133088"/>
-            <a:ext cx="3078480" cy="320040"/>
-          </a:xfrm>
-          <a:prstGeom prst="rect">
-            <a:avLst/>
-          </a:prstGeom>
-          <a:noFill/>
-          <a:ln/>
-        </p:spPr>
-        <p:txBody>
-          <a:bodyPr wrap="square" lIns="0" tIns="0" rIns="0" bIns="0" rtlCol="0" anchor="ctr"/>
-          <a:lstStyle/>
-          <a:p>
-            <a:pPr indent="0" marL="0">
-              <a:buNone/>
-            </a:pPr>
-            <a:r>
-              <a:rPr lang="en-US" sz="1300" b="1" dirty="0">
-                <a:solidFill>
-                  <a:srgbClr val="FFFFFF"/>
-                </a:solidFill>
-                <a:latin typeface="Calibri" pitchFamily="34" charset="0"/>
-                <a:ea typeface="Calibri" pitchFamily="34" charset="-122"/>
-                <a:cs typeface="Calibri" pitchFamily="34" charset="-120"/>
-              </a:rPr>
-              <a:t>Information System</a:t>
-            </a:r>
-            <a:endParaRPr lang="en-US" sz="1300" dirty="0"/>
-          </a:p>
-        </p:txBody>
-      </p:sp>
-      <p:sp>
-        <p:nvSpPr>
-          <p:cNvPr id="17" name="Text 15"/>
-          <p:cNvSpPr txBox="1"/>
-          <p:nvPr/>
-        </p:nvSpPr>
-        <p:spPr>
-          <a:xfrm>
-            <a:off x="8305800" y="4480560"/>
-            <a:ext cx="3078480" cy="548640"/>
-          </a:xfrm>
-          <a:prstGeom prst="rect">
-            <a:avLst/>
-          </a:prstGeom>
-          <a:noFill/>
-          <a:ln/>
-        </p:spPr>
-        <p:txBody>
-          <a:bodyPr wrap="square" lIns="0" tIns="0" rIns="0" bIns="0" rtlCol="0" anchor="t"/>
-          <a:lstStyle/>
-          <a:p>
-            <a:pPr indent="0" marL="0">
-              <a:buNone/>
-            </a:pPr>
-            <a:r>
-              <a:rPr lang="en-US" sz="1000" dirty="0">
-                <a:solidFill>
-                  <a:srgbClr val="FFFFFF"/>
-                </a:solidFill>
-                <a:latin typeface="Calibri" pitchFamily="34" charset="0"/>
-                <a:ea typeface="Calibri" pitchFamily="34" charset="-122"/>
-                <a:cs typeface="Calibri" pitchFamily="34" charset="-120"/>
-              </a:rPr>
-              <a:t>Database + DBMS + applications + people + procedures</a:t>
-            </a:r>
-            <a:endParaRPr lang="en-US" sz="1000" dirty="0"/>
+              <a:t>File-based systems reward close study: structured enough to resemble a database, yet broken in ways a database directly solves</a:t>
+            </a:r>
+            <a:endParaRPr lang="en-US" sz="1800" dirty="0"/>
+          </a:p>
+          <a:p>
+            <a:pPr marL="342900" indent="-342900">
+              <a:spcAft>
+                <a:spcPts val="1800"/>
+              </a:spcAft>
+              <a:buSzPct val="100000"/>
+              <a:buChar char="•"/>
+            </a:pPr>
+            <a:r>
+              <a:rPr lang="en-US" sz="1800" dirty="0">
+                <a:solidFill>
+                  <a:srgbClr val="1F2429"/>
+                </a:solidFill>
+                <a:latin typeface="Calibri" pitchFamily="34" charset="0"/>
+                <a:ea typeface="Calibri" pitchFamily="34" charset="-122"/>
+                <a:cs typeface="Calibri" pitchFamily="34" charset="-120"/>
+              </a:rPr>
+              <a:t>The next few slides stay inside the file-based world and look hard at exactly how it breaks, before showing how the database approach fixes it</a:t>
+            </a:r>
+            <a:endParaRPr lang="en-US" sz="1800" dirty="0"/>
           </a:p>
         </p:txBody>
       </p:sp>
@@ -4336,7 +4051,7 @@
 </p:sld>
 </file>
 
-<file path=ppt/slides/slide4.xml><?xml version="1.0" encoding="utf-8"?>
+<file path=ppt/slides/slide16.xml><?xml version="1.0" encoding="utf-8"?>
 <p:sld xmlns:a="http://schemas.openxmlformats.org/drawingml/2006/main" xmlns:r="http://schemas.openxmlformats.org/officeDocument/2006/relationships" xmlns:p="http://schemas.openxmlformats.org/presentationml/2006/main">
   <p:cSld name="Slide 4">
     <p:bg>
@@ -4393,7 +4108,7 @@
                 <a:ea typeface="Calibri" pitchFamily="34" charset="-122"/>
                 <a:cs typeface="Calibri" pitchFamily="34" charset="-120"/>
               </a:rPr>
-              <a:t>Database Applications</a:t>
+              <a:t>Worked Example: Tracing an Inconsistency</a:t>
             </a:r>
             <a:endParaRPr lang="en-US" sz="2800" dirty="0"/>
           </a:p>
@@ -4424,7 +4139,7 @@
               <a:buNone/>
             </a:pPr>
             <a:r>
-              <a:rPr lang="en-US" sz="1000" u="sng" dirty="0">
+              <a:rPr lang="en-US" sz="1200" u="sng" dirty="0">
                 <a:solidFill>
                   <a:srgbClr val="8A939B"/>
                 </a:solidFill>
@@ -4445,7 +4160,7 @@
               <a:buNone/>
             </a:pPr>
             <a:r>
-              <a:rPr lang="en-US" sz="1000" dirty="0">
+              <a:rPr lang="en-US" sz="1200" dirty="0">
                 <a:solidFill>
                   <a:srgbClr val="8A939B"/>
                 </a:solidFill>
@@ -4453,9 +4168,9 @@
                 <a:ea typeface="Calibri" pitchFamily="34" charset="-122"/>
                 <a:cs typeface="Calibri" pitchFamily="34" charset="-120"/>
               </a:rPr>
-              <a:t>  ·  4</a:t>
-            </a:r>
-            <a:endParaRPr lang="en-US" sz="1000" dirty="0"/>
+              <a:t>  ·  10</a:t>
+            </a:r>
+            <a:endParaRPr lang="en-US" sz="1200" dirty="0"/>
           </a:p>
         </p:txBody>
       </p:sp>
@@ -4496,7 +4211,7 @@
                         <a:buNone/>
                       </a:pPr>
                       <a:r>
-                        <a:rPr lang="en-US" sz="1200" b="1" dirty="0">
+                        <a:rPr lang="en-US" sz="1400" b="1" dirty="0">
                           <a:solidFill>
                             <a:srgbClr val="FFFFFF"/>
                           </a:solidFill>
@@ -4504,9 +4219,9 @@
                           <a:ea typeface="Calibri" pitchFamily="34" charset="-122"/>
                           <a:cs typeface="Calibri" pitchFamily="34" charset="-120"/>
                         </a:rPr>
-                        <a:t>Domain</a:t>
+                        <a:t>When</a:t>
                       </a:r>
-                      <a:endParaRPr lang="en-US" sz="1200" dirty="0">
+                      <a:endParaRPr lang="en-US" sz="1400" dirty="0">
                         <a:latin typeface="Calibri" charset="0"/>
                         <a:ea typeface="Calibri" charset="0"/>
                         <a:cs typeface="Calibri" charset="0"/>
@@ -4564,7 +4279,7 @@
                         <a:buNone/>
                       </a:pPr>
                       <a:r>
-                        <a:rPr lang="en-US" sz="1200" b="1" dirty="0">
+                        <a:rPr lang="en-US" sz="1400" b="1" dirty="0">
                           <a:solidFill>
                             <a:srgbClr val="FFFFFF"/>
                           </a:solidFill>
@@ -4572,9 +4287,9 @@
                           <a:ea typeface="Calibri" pitchFamily="34" charset="-122"/>
                           <a:cs typeface="Calibri" pitchFamily="34" charset="-120"/>
                         </a:rPr>
-                        <a:t>What's stored</a:t>
+                        <a:t>What Happens</a:t>
                       </a:r>
-                      <a:endParaRPr lang="en-US" sz="1200" dirty="0">
+                      <a:endParaRPr lang="en-US" sz="1400" dirty="0">
                         <a:latin typeface="Calibri" charset="0"/>
                         <a:ea typeface="Calibri" charset="0"/>
                         <a:cs typeface="Calibri" charset="0"/>
@@ -4632,7 +4347,7 @@
                         <a:buNone/>
                       </a:pPr>
                       <a:r>
-                        <a:rPr lang="en-US" sz="1200" b="1" dirty="0">
+                        <a:rPr lang="en-US" sz="1400" b="1" dirty="0">
                           <a:solidFill>
                             <a:srgbClr val="FFFFFF"/>
                           </a:solidFill>
@@ -4640,9 +4355,9 @@
                           <a:ea typeface="Calibri" pitchFamily="34" charset="-122"/>
                           <a:cs typeface="Calibri" pitchFamily="34" charset="-120"/>
                         </a:rPr>
-                        <a:t>Example</a:t>
+                        <a:t>State of the Three Copies</a:t>
                       </a:r>
-                      <a:endParaRPr lang="en-US" sz="1200" dirty="0">
+                      <a:endParaRPr lang="en-US" sz="1400" dirty="0">
                         <a:latin typeface="Calibri" charset="0"/>
                         <a:ea typeface="Calibri" charset="0"/>
                         <a:cs typeface="Calibri" charset="0"/>
@@ -4702,7 +4417,7 @@
                         <a:buNone/>
                       </a:pPr>
                       <a:r>
-                        <a:rPr lang="en-US" sz="1250" dirty="0">
+                        <a:rPr lang="en-US" sz="1400" dirty="0">
                           <a:solidFill>
                             <a:srgbClr val="1F2429"/>
                           </a:solidFill>
@@ -4710,9 +4425,9 @@
                           <a:ea typeface="Calibri" pitchFamily="34" charset="-122"/>
                           <a:cs typeface="Calibri" pitchFamily="34" charset="-120"/>
                         </a:rPr>
-                        <a:t>Banking</a:t>
+                        <a:t>Day 1</a:t>
                       </a:r>
-                      <a:endParaRPr lang="en-US" sz="1250" dirty="0">
+                      <a:endParaRPr lang="en-US" sz="1400" dirty="0">
                         <a:latin typeface="Calibri" charset="0"/>
                         <a:ea typeface="Calibri" charset="0"/>
                         <a:cs typeface="Calibri" charset="0"/>
@@ -4767,7 +4482,7 @@
                         <a:buNone/>
                       </a:pPr>
                       <a:r>
-                        <a:rPr lang="en-US" sz="1250" dirty="0">
+                        <a:rPr lang="en-US" sz="1400" dirty="0">
                           <a:solidFill>
                             <a:srgbClr val="1F2429"/>
                           </a:solidFill>
@@ -4775,9 +4490,9 @@
                           <a:ea typeface="Calibri" pitchFamily="34" charset="-122"/>
                           <a:cs typeface="Calibri" pitchFamily="34" charset="-120"/>
                         </a:rPr>
-                        <a:t>Accounts, balances, transactions</a:t>
+                        <a:t>All three offices' files are created together</a:t>
                       </a:r>
-                      <a:endParaRPr lang="en-US" sz="1250" dirty="0">
+                      <a:endParaRPr lang="en-US" sz="1400" dirty="0">
                         <a:latin typeface="Calibri" charset="0"/>
                         <a:ea typeface="Calibri" charset="0"/>
                         <a:cs typeface="Calibri" charset="0"/>
@@ -4832,7 +4547,7 @@
                         <a:buNone/>
                       </a:pPr>
                       <a:r>
-                        <a:rPr lang="en-US" sz="1250" dirty="0">
+                        <a:rPr lang="en-US" sz="1400" dirty="0">
                           <a:solidFill>
                             <a:srgbClr val="1F2429"/>
                           </a:solidFill>
@@ -4840,9 +4555,9 @@
                           <a:ea typeface="Calibri" pitchFamily="34" charset="-122"/>
                           <a:cs typeface="Calibri" pitchFamily="34" charset="-120"/>
                         </a:rPr>
-                        <a:t>Approving a debit card transaction</a:t>
+                        <a:t>All three show the same address</a:t>
                       </a:r>
-                      <a:endParaRPr lang="en-US" sz="1250" dirty="0">
+                      <a:endParaRPr lang="en-US" sz="1400" dirty="0">
                         <a:latin typeface="Calibri" charset="0"/>
                         <a:ea typeface="Calibri" charset="0"/>
                         <a:cs typeface="Calibri" charset="0"/>
@@ -4899,7 +4614,7 @@
                         <a:buNone/>
                       </a:pPr>
                       <a:r>
-                        <a:rPr lang="en-US" sz="1250" dirty="0">
+                        <a:rPr lang="en-US" sz="1400" dirty="0">
                           <a:solidFill>
                             <a:srgbClr val="1F2429"/>
                           </a:solidFill>
@@ -4907,9 +4622,9 @@
                           <a:ea typeface="Calibri" pitchFamily="34" charset="-122"/>
                           <a:cs typeface="Calibri" pitchFamily="34" charset="-120"/>
                         </a:rPr>
-                        <a:t>Airlines</a:t>
+                        <a:t>Week 6</a:t>
                       </a:r>
-                      <a:endParaRPr lang="en-US" sz="1250" dirty="0">
+                      <a:endParaRPr lang="en-US" sz="1400" dirty="0">
                         <a:latin typeface="Calibri" charset="0"/>
                         <a:ea typeface="Calibri" charset="0"/>
                         <a:cs typeface="Calibri" charset="0"/>
@@ -4964,7 +4679,7 @@
                         <a:buNone/>
                       </a:pPr>
                       <a:r>
-                        <a:rPr lang="en-US" sz="1250" dirty="0">
+                        <a:rPr lang="en-US" sz="1400" dirty="0">
                           <a:solidFill>
                             <a:srgbClr val="1F2429"/>
                           </a:solidFill>
@@ -4972,9 +4687,9 @@
                           <a:ea typeface="Calibri" pitchFamily="34" charset="-122"/>
                           <a:cs typeface="Calibri" pitchFamily="34" charset="-120"/>
                         </a:rPr>
-                        <a:t>Reservations, schedules, seat maps</a:t>
+                        <a:t>Student moves; tells only the Registrar</a:t>
                       </a:r>
-                      <a:endParaRPr lang="en-US" sz="1250" dirty="0">
+                      <a:endParaRPr lang="en-US" sz="1400" dirty="0">
                         <a:latin typeface="Calibri" charset="0"/>
                         <a:ea typeface="Calibri" charset="0"/>
                         <a:cs typeface="Calibri" charset="0"/>
@@ -5029,7 +4744,7 @@
                         <a:buNone/>
                       </a:pPr>
                       <a:r>
-                        <a:rPr lang="en-US" sz="1250" dirty="0">
+                        <a:rPr lang="en-US" sz="1400" dirty="0">
                           <a:solidFill>
                             <a:srgbClr val="1F2429"/>
                           </a:solidFill>
@@ -5037,9 +4752,9 @@
                           <a:ea typeface="Calibri" pitchFamily="34" charset="-122"/>
                           <a:cs typeface="Calibri" pitchFamily="34" charset="-120"/>
                         </a:rPr>
-                        <a:t>Confirming a seat on flight PK-301</a:t>
+                        <a:t>Registrar updated; Library &amp; Finance stale</a:t>
                       </a:r>
-                      <a:endParaRPr lang="en-US" sz="1250" dirty="0">
+                      <a:endParaRPr lang="en-US" sz="1400" dirty="0">
                         <a:latin typeface="Calibri" charset="0"/>
                         <a:ea typeface="Calibri" charset="0"/>
                         <a:cs typeface="Calibri" charset="0"/>
@@ -5096,7 +4811,7 @@
                         <a:buNone/>
                       </a:pPr>
                       <a:r>
-                        <a:rPr lang="en-US" sz="1250" dirty="0">
+                        <a:rPr lang="en-US" sz="1400" dirty="0">
                           <a:solidFill>
                             <a:srgbClr val="1F2429"/>
                           </a:solidFill>
@@ -5104,9 +4819,9 @@
                           <a:ea typeface="Calibri" pitchFamily="34" charset="-122"/>
                           <a:cs typeface="Calibri" pitchFamily="34" charset="-120"/>
                         </a:rPr>
-                        <a:t>University records</a:t>
+                        <a:t>Week 10</a:t>
                       </a:r>
-                      <a:endParaRPr lang="en-US" sz="1250" dirty="0">
+                      <a:endParaRPr lang="en-US" sz="1400" dirty="0">
                         <a:latin typeface="Calibri" charset="0"/>
                         <a:ea typeface="Calibri" charset="0"/>
                         <a:cs typeface="Calibri" charset="0"/>
@@ -5161,7 +4876,7 @@
                         <a:buNone/>
                       </a:pPr>
                       <a:r>
-                        <a:rPr lang="en-US" sz="1250" dirty="0">
+                        <a:rPr lang="en-US" sz="1400" dirty="0">
                           <a:solidFill>
                             <a:srgbClr val="1F2429"/>
                           </a:solidFill>
@@ -5169,9 +4884,9 @@
                           <a:ea typeface="Calibri" pitchFamily="34" charset="-122"/>
                           <a:cs typeface="Calibri" pitchFamily="34" charset="-120"/>
                         </a:rPr>
-                        <a:t>Students, courses, enrollments, grades</a:t>
+                        <a:t>Library mails a notice to the file address</a:t>
                       </a:r>
-                      <a:endParaRPr lang="en-US" sz="1250" dirty="0">
+                      <a:endParaRPr lang="en-US" sz="1400" dirty="0">
                         <a:latin typeface="Calibri" charset="0"/>
                         <a:ea typeface="Calibri" charset="0"/>
                         <a:cs typeface="Calibri" charset="0"/>
@@ -5226,7 +4941,7 @@
                         <a:buNone/>
                       </a:pPr>
                       <a:r>
-                        <a:rPr lang="en-US" sz="1250" dirty="0">
+                        <a:rPr lang="en-US" sz="1400" dirty="0">
                           <a:solidFill>
                             <a:srgbClr val="1F2429"/>
                           </a:solidFill>
@@ -5234,9 +4949,9 @@
                           <a:ea typeface="Calibri" pitchFamily="34" charset="-122"/>
                           <a:cs typeface="Calibri" pitchFamily="34" charset="-120"/>
                         </a:rPr>
-                        <a:t>Producing a graduate's transcript</a:t>
+                        <a:t>Sent to the OLD address — never arrives</a:t>
                       </a:r>
-                      <a:endParaRPr lang="en-US" sz="1250" dirty="0">
+                      <a:endParaRPr lang="en-US" sz="1400" dirty="0">
                         <a:latin typeface="Calibri" charset="0"/>
                         <a:ea typeface="Calibri" charset="0"/>
                         <a:cs typeface="Calibri" charset="0"/>
@@ -5293,7 +5008,7 @@
                         <a:buNone/>
                       </a:pPr>
                       <a:r>
-                        <a:rPr lang="en-US" sz="1250" dirty="0">
+                        <a:rPr lang="en-US" sz="1400" dirty="0">
                           <a:solidFill>
                             <a:srgbClr val="1F2429"/>
                           </a:solidFill>
@@ -5301,9 +5016,9 @@
                           <a:ea typeface="Calibri" pitchFamily="34" charset="-122"/>
                           <a:cs typeface="Calibri" pitchFamily="34" charset="-120"/>
                         </a:rPr>
-                        <a:t>Telecom</a:t>
+                        <a:t>Week 14</a:t>
                       </a:r>
-                      <a:endParaRPr lang="en-US" sz="1250" dirty="0">
+                      <a:endParaRPr lang="en-US" sz="1400" dirty="0">
                         <a:latin typeface="Calibri" charset="0"/>
                         <a:ea typeface="Calibri" charset="0"/>
                         <a:cs typeface="Calibri" charset="0"/>
@@ -5358,7 +5073,7 @@
                         <a:buNone/>
                       </a:pPr>
                       <a:r>
-                        <a:rPr lang="en-US" sz="1250" dirty="0">
+                        <a:rPr lang="en-US" sz="1400" dirty="0">
                           <a:solidFill>
                             <a:srgbClr val="1F2429"/>
                           </a:solidFill>
@@ -5366,9 +5081,9 @@
                           <a:ea typeface="Calibri" pitchFamily="34" charset="-122"/>
                           <a:cs typeface="Calibri" pitchFamily="34" charset="-120"/>
                         </a:rPr>
-                        <a:t>Call records, subscriber accounts</a:t>
+                        <a:t>Finance computes a late fee from its copy</a:t>
                       </a:r>
-                      <a:endParaRPr lang="en-US" sz="1250" dirty="0">
+                      <a:endParaRPr lang="en-US" sz="1400" dirty="0">
                         <a:latin typeface="Calibri" charset="0"/>
                         <a:ea typeface="Calibri" charset="0"/>
                         <a:cs typeface="Calibri" charset="0"/>
@@ -5423,7 +5138,7 @@
                         <a:buNone/>
                       </a:pPr>
                       <a:r>
-                        <a:rPr lang="en-US" sz="1250" dirty="0">
+                        <a:rPr lang="en-US" sz="1400" dirty="0">
                           <a:solidFill>
                             <a:srgbClr val="1F2429"/>
                           </a:solidFill>
@@ -5431,9 +5146,9 @@
                           <a:ea typeface="Calibri" pitchFamily="34" charset="-122"/>
                           <a:cs typeface="Calibri" pitchFamily="34" charset="-120"/>
                         </a:rPr>
-                        <a:t>Generating a monthly phone bill</a:t>
+                        <a:t>Fee is wrong — the move was unrecorded</a:t>
                       </a:r>
-                      <a:endParaRPr lang="en-US" sz="1250" dirty="0">
+                      <a:endParaRPr lang="en-US" sz="1400" dirty="0">
                         <a:latin typeface="Calibri" charset="0"/>
                         <a:ea typeface="Calibri" charset="0"/>
                         <a:cs typeface="Calibri" charset="0"/>
@@ -5490,7 +5205,7 @@
                         <a:buNone/>
                       </a:pPr>
                       <a:r>
-                        <a:rPr lang="en-US" sz="1250" dirty="0">
+                        <a:rPr lang="en-US" sz="1400" dirty="0">
                           <a:solidFill>
                             <a:srgbClr val="1F2429"/>
                           </a:solidFill>
@@ -5498,9 +5213,9 @@
                           <a:ea typeface="Calibri" pitchFamily="34" charset="-122"/>
                           <a:cs typeface="Calibri" pitchFamily="34" charset="-120"/>
                         </a:rPr>
-                        <a:t>Sales / e-commerce</a:t>
+                        <a:t>Week 16</a:t>
                       </a:r>
-                      <a:endParaRPr lang="en-US" sz="1250" dirty="0">
+                      <a:endParaRPr lang="en-US" sz="1400" dirty="0">
                         <a:latin typeface="Calibri" charset="0"/>
                         <a:ea typeface="Calibri" charset="0"/>
                         <a:cs typeface="Calibri" charset="0"/>
@@ -5555,7 +5270,7 @@
                         <a:buNone/>
                       </a:pPr>
                       <a:r>
-                        <a:rPr lang="en-US" sz="1250" dirty="0">
+                        <a:rPr lang="en-US" sz="1400" dirty="0">
                           <a:solidFill>
                             <a:srgbClr val="1F2429"/>
                           </a:solidFill>
@@ -5563,9 +5278,9 @@
                           <a:ea typeface="Calibri" pitchFamily="34" charset="-122"/>
                           <a:cs typeface="Calibri" pitchFamily="34" charset="-120"/>
                         </a:rPr>
-                        <a:t>Products, orders, customers, inventory</a:t>
+                        <a:t>Student applies for a transcript</a:t>
                       </a:r>
-                      <a:endParaRPr lang="en-US" sz="1250" dirty="0">
+                      <a:endParaRPr lang="en-US" sz="1400" dirty="0">
                         <a:latin typeface="Calibri" charset="0"/>
                         <a:ea typeface="Calibri" charset="0"/>
                         <a:cs typeface="Calibri" charset="0"/>
@@ -5620,7 +5335,7 @@
                         <a:buNone/>
                       </a:pPr>
                       <a:r>
-                        <a:rPr lang="en-US" sz="1250" dirty="0">
+                        <a:rPr lang="en-US" sz="1400" dirty="0">
                           <a:solidFill>
                             <a:srgbClr val="1F2429"/>
                           </a:solidFill>
@@ -5628,9 +5343,9 @@
                           <a:ea typeface="Calibri" pitchFamily="34" charset="-122"/>
                           <a:cs typeface="Calibri" pitchFamily="34" charset="-120"/>
                         </a:rPr>
-                        <a:t>“Only 3 left in stock”</a:t>
+                        <a:t>Registrar and Finance now disagree</a:t>
                       </a:r>
-                      <a:endParaRPr lang="en-US" sz="1250" dirty="0">
+                      <a:endParaRPr lang="en-US" sz="1400" dirty="0">
                         <a:latin typeface="Calibri" charset="0"/>
                         <a:ea typeface="Calibri" charset="0"/>
                         <a:cs typeface="Calibri" charset="0"/>
@@ -5687,7 +5402,7 @@
                         <a:buNone/>
                       </a:pPr>
                       <a:r>
-                        <a:rPr lang="en-US" sz="1250" dirty="0">
+                        <a:rPr lang="en-US" sz="1400" dirty="0">
                           <a:solidFill>
                             <a:srgbClr val="1F2429"/>
                           </a:solidFill>
@@ -5695,9 +5410,9 @@
                           <a:ea typeface="Calibri" pitchFamily="34" charset="-122"/>
                           <a:cs typeface="Calibri" pitchFamily="34" charset="-120"/>
                         </a:rPr>
-                        <a:t>Human resources</a:t>
+                        <a:t>Result</a:t>
                       </a:r>
-                      <a:endParaRPr lang="en-US" sz="1250" dirty="0">
+                      <a:endParaRPr lang="en-US" sz="1400" dirty="0">
                         <a:latin typeface="Calibri" charset="0"/>
                         <a:ea typeface="Calibri" charset="0"/>
                         <a:cs typeface="Calibri" charset="0"/>
@@ -5752,7 +5467,7 @@
                         <a:buNone/>
                       </a:pPr>
                       <a:r>
-                        <a:rPr lang="en-US" sz="1250" dirty="0">
+                        <a:rPr lang="en-US" sz="1400" dirty="0">
                           <a:solidFill>
                             <a:srgbClr val="1F2429"/>
                           </a:solidFill>
@@ -5760,9 +5475,9 @@
                           <a:ea typeface="Calibri" pitchFamily="34" charset="-122"/>
                           <a:cs typeface="Calibri" pitchFamily="34" charset="-120"/>
                         </a:rPr>
-                        <a:t>Employees, salaries, positions</a:t>
+                        <a:t>Three independent “truths,” one real fact</a:t>
                       </a:r>
-                      <a:endParaRPr lang="en-US" sz="1250" dirty="0">
+                      <a:endParaRPr lang="en-US" sz="1400" dirty="0">
                         <a:latin typeface="Calibri" charset="0"/>
                         <a:ea typeface="Calibri" charset="0"/>
                         <a:cs typeface="Calibri" charset="0"/>
@@ -5817,7 +5532,7 @@
                         <a:buNone/>
                       </a:pPr>
                       <a:r>
-                        <a:rPr lang="en-US" sz="1250" dirty="0">
+                        <a:rPr lang="en-US" sz="1400" dirty="0">
                           <a:solidFill>
                             <a:srgbClr val="1F2429"/>
                           </a:solidFill>
@@ -5825,9 +5540,9 @@
                           <a:ea typeface="Calibri" pitchFamily="34" charset="-122"/>
                           <a:cs typeface="Calibri" pitchFamily="34" charset="-120"/>
                         </a:rPr>
-                        <a:t>Running monthly payroll</a:t>
+                        <a:t>No file alone knows which copy is current</a:t>
                       </a:r>
-                      <a:endParaRPr lang="en-US" sz="1250" dirty="0">
+                      <a:endParaRPr lang="en-US" sz="1400" dirty="0">
                         <a:latin typeface="Calibri" charset="0"/>
                         <a:ea typeface="Calibri" charset="0"/>
                         <a:cs typeface="Calibri" charset="0"/>
@@ -5930,7 +5645,7 @@
               <a:buNone/>
             </a:pPr>
             <a:r>
-              <a:rPr lang="en-US" sz="1250" b="1" dirty="0">
+              <a:rPr lang="en-US" sz="1800" b="1" dirty="0">
                 <a:solidFill>
                   <a:srgbClr val="1F2429"/>
                 </a:solidFill>
@@ -5938,13 +5653,13 @@
                 <a:ea typeface="Calibri" pitchFamily="34" charset="-122"/>
                 <a:cs typeface="Calibri" pitchFamily="34" charset="-120"/>
               </a:rPr>
-              <a:t>A quick test: is this really a database problem?  </a:t>
+              <a:t>Why this matters:  </a:t>
             </a:r>
             <a:pPr indent="0" marL="0">
               <a:buNone/>
             </a:pPr>
             <a:r>
-              <a:rPr lang="en-US" sz="1250" dirty="0">
+              <a:rPr lang="en-US" sz="1800" dirty="0">
                 <a:solidFill>
                   <a:srgbClr val="1F2429"/>
                 </a:solidFill>
@@ -5952,9 +5667,5758 @@
                 <a:ea typeface="Calibri" pitchFamily="34" charset="-122"/>
                 <a:cs typeface="Calibri" pitchFamily="34" charset="-120"/>
               </a:rPr>
+              <a:t>Three files, one fact, and no single place to look for the truth — this is exactly the inconsistency problem file-based systems cannot solve on their own.</a:t>
+            </a:r>
+            <a:endParaRPr lang="en-US" sz="1800" dirty="0"/>
+          </a:p>
+        </p:txBody>
+      </p:sp>
+    </p:spTree>
+  </p:cSld>
+  <p:clrMapOvr>
+    <a:masterClrMapping/>
+  </p:clrMapOvr>
+</p:sld>
+</file>
+
+<file path=ppt/slides/slide17.xml><?xml version="1.0" encoding="utf-8"?>
+<p:sld xmlns:a="http://schemas.openxmlformats.org/drawingml/2006/main" xmlns:r="http://schemas.openxmlformats.org/officeDocument/2006/relationships" xmlns:p="http://schemas.openxmlformats.org/presentationml/2006/main">
+  <p:cSld name="Slide 2">
+    <p:bg>
+      <p:bgPr>
+        <a:solidFill>
+          <a:srgbClr val="F7F8F9"/>
+        </a:solidFill>
+      </p:bgPr>
+    </p:bg>
+    <p:spTree>
+      <p:nvGrpSpPr>
+        <p:cNvPr id="1" name=""/>
+        <p:cNvGrpSpPr/>
+        <p:nvPr/>
+      </p:nvGrpSpPr>
+      <p:grpSpPr>
+        <a:xfrm>
+          <a:off x="0" y="0"/>
+          <a:ext cx="0" cy="0"/>
+          <a:chOff x="0" y="0"/>
+          <a:chExt cx="0" cy="0"/>
+        </a:xfrm>
+      </p:grpSpPr>
+      <p:sp>
+        <p:nvSpPr>
+          <p:cNvPr id="2" name="Text 0"/>
+          <p:cNvSpPr txBox="1"/>
+          <p:nvPr/>
+        </p:nvSpPr>
+        <p:spPr>
+          <a:xfrm>
+            <a:off x="548640" y="365760"/>
+            <a:ext cx="11064240" cy="731520"/>
+          </a:xfrm>
+          <a:prstGeom prst="rect">
+            <a:avLst/>
+          </a:prstGeom>
+          <a:noFill/>
+          <a:ln/>
+        </p:spPr>
+        <p:txBody>
+          <a:bodyPr wrap="square" lIns="0" tIns="0" rIns="0" bIns="0" rtlCol="0" anchor="ctr"/>
+          <a:lstStyle/>
+          <a:p>
+            <a:pPr indent="0" marL="0">
+              <a:buNone/>
+            </a:pPr>
+            <a:r>
+              <a:rPr lang="en-US" sz="2800" b="1" dirty="0">
+                <a:solidFill>
+                  <a:srgbClr val="1F2429"/>
+                </a:solidFill>
+                <a:latin typeface="Calibri" pitchFamily="34" charset="0"/>
+                <a:ea typeface="Calibri" pitchFamily="34" charset="-122"/>
+                <a:cs typeface="Calibri" pitchFamily="34" charset="-120"/>
+              </a:rPr>
+              <a:t>Poor Sharing &amp; Program-Data Dependence</a:t>
+            </a:r>
+            <a:endParaRPr lang="en-US" sz="2800" dirty="0"/>
+          </a:p>
+        </p:txBody>
+      </p:sp>
+      <p:sp>
+        <p:nvSpPr>
+          <p:cNvPr id="3" name="Text 1"/>
+          <p:cNvSpPr txBox="1"/>
+          <p:nvPr/>
+        </p:nvSpPr>
+        <p:spPr>
+          <a:xfrm>
+            <a:off x="9951415" y="6455664"/>
+            <a:ext cx="2011680" cy="292608"/>
+          </a:xfrm>
+          <a:prstGeom prst="rect">
+            <a:avLst/>
+          </a:prstGeom>
+          <a:noFill/>
+          <a:ln/>
+        </p:spPr>
+        <p:txBody>
+          <a:bodyPr wrap="square" lIns="0" tIns="0" rIns="0" bIns="0" rtlCol="0" anchor="ctr"/>
+          <a:lstStyle/>
+          <a:p>
+            <a:pPr algn="r" indent="0" marL="0">
+              <a:buNone/>
+            </a:pPr>
+            <a:r>
+              <a:rPr lang="en-US" sz="1200" u="sng" dirty="0">
+                <a:solidFill>
+                  <a:srgbClr val="8A939B"/>
+                </a:solidFill>
+                <a:latin typeface="Calibri" pitchFamily="34" charset="0"/>
+                <a:ea typeface="Calibri" pitchFamily="34" charset="-122"/>
+                <a:cs typeface="Calibri" pitchFamily="34" charset="-120"/>
+                <a:hlinkClick r:id="rId1" invalidUrl="" action="" tgtFrame="" tooltip="" history="1" highlightClick="0" endSnd="0">
+                  <a:extLst>
+                    <a:ext uri="{A12FA001-AC4F-418D-AE19-62706E023703}">
+                      <ahyp:hlinkClr xmlns:ahyp="http://schemas.microsoft.com/office/drawing/2018/hyperlinkcolor" val="tx"/>
+                    </a:ext>
+                  </a:extLst>
+                </a:hlinkClick>
+              </a:rPr>
+              <a:t>cuinotes.com</a:t>
+            </a:r>
+            <a:pPr algn="r" indent="0" marL="0">
+              <a:buNone/>
+            </a:pPr>
+            <a:r>
+              <a:rPr lang="en-US" sz="1200" dirty="0">
+                <a:solidFill>
+                  <a:srgbClr val="8A939B"/>
+                </a:solidFill>
+                <a:latin typeface="Calibri" pitchFamily="34" charset="0"/>
+                <a:ea typeface="Calibri" pitchFamily="34" charset="-122"/>
+                <a:cs typeface="Calibri" pitchFamily="34" charset="-120"/>
+              </a:rPr>
+              <a:t>  ·  11</a:t>
+            </a:r>
+            <a:endParaRPr lang="en-US" sz="1200" dirty="0"/>
+          </a:p>
+        </p:txBody>
+      </p:sp>
+      <p:sp>
+        <p:nvSpPr>
+          <p:cNvPr id="4" name="Text 2"/>
+          <p:cNvSpPr txBox="1"/>
+          <p:nvPr/>
+        </p:nvSpPr>
+        <p:spPr>
+          <a:xfrm>
+            <a:off x="640080" y="1371600"/>
+            <a:ext cx="10332720" cy="4846320"/>
+          </a:xfrm>
+          <a:prstGeom prst="rect">
+            <a:avLst/>
+          </a:prstGeom>
+          <a:noFill/>
+          <a:ln/>
+        </p:spPr>
+        <p:txBody>
+          <a:bodyPr wrap="square" lIns="0" tIns="0" rIns="0" bIns="0" rtlCol="0" anchor="t"/>
+          <a:lstStyle/>
+          <a:p>
+            <a:pPr marL="342900" indent="-342900">
+              <a:spcAft>
+                <a:spcPts val="1800"/>
+              </a:spcAft>
+              <a:buSzPct val="100000"/>
+              <a:buChar char="•"/>
+            </a:pPr>
+            <a:r>
+              <a:rPr lang="en-US" sz="1800" dirty="0">
+                <a:solidFill>
+                  <a:srgbClr val="1F2429"/>
+                </a:solidFill>
+                <a:latin typeface="Calibri" pitchFamily="34" charset="0"/>
+                <a:ea typeface="Calibri" pitchFamily="34" charset="-122"/>
+                <a:cs typeface="Calibri" pitchFamily="34" charset="-120"/>
+              </a:rPr>
+              <a:t>Poor data sharing — the library's program cannot simply ask the registrar's file “is this student still enrolled?”; the files were never designed to talk to each other</a:t>
+            </a:r>
+            <a:endParaRPr lang="en-US" sz="1800" dirty="0"/>
+          </a:p>
+          <a:p>
+            <a:pPr marL="342900" indent="-342900">
+              <a:spcAft>
+                <a:spcPts val="1800"/>
+              </a:spcAft>
+              <a:buSzPct val="100000"/>
+              <a:buChar char="•"/>
+            </a:pPr>
+            <a:r>
+              <a:rPr lang="en-US" sz="1800" dirty="0">
+                <a:solidFill>
+                  <a:srgbClr val="1F2429"/>
+                </a:solidFill>
+                <a:latin typeface="Calibri" pitchFamily="34" charset="0"/>
+                <a:ea typeface="Calibri" pitchFamily="34" charset="-122"/>
+                <a:cs typeface="Calibri" pitchFamily="34" charset="-120"/>
+              </a:rPr>
+              <a:t>Program-data dependence — a file's physical layout (field order, field sizes, data types) is hard-coded directly into the program that reads it</a:t>
+            </a:r>
+            <a:endParaRPr lang="en-US" sz="1800" dirty="0"/>
+          </a:p>
+          <a:p>
+            <a:pPr marL="342900" indent="-342900">
+              <a:spcAft>
+                <a:spcPts val="1800"/>
+              </a:spcAft>
+              <a:buSzPct val="100000"/>
+              <a:buChar char="•"/>
+            </a:pPr>
+            <a:r>
+              <a:rPr lang="en-US" sz="1800" dirty="0">
+                <a:solidFill>
+                  <a:srgbClr val="1F2429"/>
+                </a:solidFill>
+                <a:latin typeface="Calibri" pitchFamily="34" charset="0"/>
+                <a:ea typeface="Calibri" pitchFamily="34" charset="-122"/>
+                <a:cs typeface="Calibri" pitchFamily="34" charset="-120"/>
+              </a:rPr>
+              <a:t>Worked consequence: the registrar decides to add a Major field to its student file</a:t>
+            </a:r>
+            <a:endParaRPr lang="en-US" sz="1800" dirty="0"/>
+          </a:p>
+          <a:p>
+            <a:pPr marL="342900" indent="-342900">
+              <a:spcAft>
+                <a:spcPts val="1800"/>
+              </a:spcAft>
+              <a:buSzPct val="100000"/>
+              <a:buChar char="•"/>
+            </a:pPr>
+            <a:r>
+              <a:rPr lang="en-US" sz="1800" dirty="0">
+                <a:solidFill>
+                  <a:srgbClr val="1F2429"/>
+                </a:solidFill>
+                <a:latin typeface="Calibri" pitchFamily="34" charset="0"/>
+                <a:ea typeface="Calibri" pitchFamily="34" charset="-122"/>
+                <a:cs typeface="Calibri" pitchFamily="34" charset="-120"/>
+              </a:rPr>
+              <a:t>Every program that reads that file — not just the registrar's own software — must be found, rewritten, and recompiled before anything works again</a:t>
+            </a:r>
+            <a:endParaRPr lang="en-US" sz="1800" dirty="0"/>
+          </a:p>
+          <a:p>
+            <a:pPr marL="342900" indent="-342900">
+              <a:spcAft>
+                <a:spcPts val="1800"/>
+              </a:spcAft>
+              <a:buSzPct val="100000"/>
+              <a:buChar char="•"/>
+            </a:pPr>
+            <a:r>
+              <a:rPr lang="en-US" sz="1800" dirty="0">
+                <a:solidFill>
+                  <a:srgbClr val="1F2429"/>
+                </a:solidFill>
+                <a:latin typeface="Calibri" pitchFamily="34" charset="0"/>
+                <a:ea typeface="Calibri" pitchFamily="34" charset="-122"/>
+                <a:cs typeface="Calibri" pitchFamily="34" charset="-120"/>
+              </a:rPr>
+              <a:t>In a database, the same change is one instruction to the DBMS; programs that don't care about Major are not affected at all</a:t>
+            </a:r>
+            <a:endParaRPr lang="en-US" sz="1800" dirty="0"/>
+          </a:p>
+        </p:txBody>
+      </p:sp>
+    </p:spTree>
+  </p:cSld>
+  <p:clrMapOvr>
+    <a:masterClrMapping/>
+  </p:clrMapOvr>
+</p:sld>
+</file>
+
+<file path=ppt/slides/slide18.xml><?xml version="1.0" encoding="utf-8"?>
+<p:sld xmlns:a="http://schemas.openxmlformats.org/drawingml/2006/main" xmlns:r="http://schemas.openxmlformats.org/officeDocument/2006/relationships" xmlns:p="http://schemas.openxmlformats.org/presentationml/2006/main">
+  <p:cSld name="Slide 2">
+    <p:bg>
+      <p:bgPr>
+        <a:solidFill>
+          <a:srgbClr val="F7F8F9"/>
+        </a:solidFill>
+      </p:bgPr>
+    </p:bg>
+    <p:spTree>
+      <p:nvGrpSpPr>
+        <p:cNvPr id="1" name=""/>
+        <p:cNvGrpSpPr/>
+        <p:nvPr/>
+      </p:nvGrpSpPr>
+      <p:grpSpPr>
+        <a:xfrm>
+          <a:off x="0" y="0"/>
+          <a:ext cx="0" cy="0"/>
+          <a:chOff x="0" y="0"/>
+          <a:chExt cx="0" cy="0"/>
+        </a:xfrm>
+      </p:grpSpPr>
+      <p:sp>
+        <p:nvSpPr>
+          <p:cNvPr id="2" name="Text 0"/>
+          <p:cNvSpPr txBox="1"/>
+          <p:nvPr/>
+        </p:nvSpPr>
+        <p:spPr>
+          <a:xfrm>
+            <a:off x="548640" y="365760"/>
+            <a:ext cx="11064240" cy="731520"/>
+          </a:xfrm>
+          <a:prstGeom prst="rect">
+            <a:avLst/>
+          </a:prstGeom>
+          <a:noFill/>
+          <a:ln/>
+        </p:spPr>
+        <p:txBody>
+          <a:bodyPr wrap="square" lIns="0" tIns="0" rIns="0" bIns="0" rtlCol="0" anchor="ctr"/>
+          <a:lstStyle/>
+          <a:p>
+            <a:pPr indent="0" marL="0">
+              <a:buNone/>
+            </a:pPr>
+            <a:r>
+              <a:rPr lang="en-US" sz="2800" b="1" dirty="0">
+                <a:solidFill>
+                  <a:srgbClr val="1F2429"/>
+                </a:solidFill>
+                <a:latin typeface="Calibri" pitchFamily="34" charset="0"/>
+                <a:ea typeface="Calibri" pitchFamily="34" charset="-122"/>
+                <a:cs typeface="Calibri" pitchFamily="34" charset="-120"/>
+              </a:rPr>
+              <a:t>Inconsistency Is the Most Dangerous Failure</a:t>
+            </a:r>
+            <a:endParaRPr lang="en-US" sz="2800" dirty="0"/>
+          </a:p>
+        </p:txBody>
+      </p:sp>
+      <p:sp>
+        <p:nvSpPr>
+          <p:cNvPr id="3" name="Text 1"/>
+          <p:cNvSpPr txBox="1"/>
+          <p:nvPr/>
+        </p:nvSpPr>
+        <p:spPr>
+          <a:xfrm>
+            <a:off x="9951415" y="6455664"/>
+            <a:ext cx="2011680" cy="292608"/>
+          </a:xfrm>
+          <a:prstGeom prst="rect">
+            <a:avLst/>
+          </a:prstGeom>
+          <a:noFill/>
+          <a:ln/>
+        </p:spPr>
+        <p:txBody>
+          <a:bodyPr wrap="square" lIns="0" tIns="0" rIns="0" bIns="0" rtlCol="0" anchor="ctr"/>
+          <a:lstStyle/>
+          <a:p>
+            <a:pPr algn="r" indent="0" marL="0">
+              <a:buNone/>
+            </a:pPr>
+            <a:r>
+              <a:rPr lang="en-US" sz="1200" u="sng" dirty="0">
+                <a:solidFill>
+                  <a:srgbClr val="8A939B"/>
+                </a:solidFill>
+                <a:latin typeface="Calibri" pitchFamily="34" charset="0"/>
+                <a:ea typeface="Calibri" pitchFamily="34" charset="-122"/>
+                <a:cs typeface="Calibri" pitchFamily="34" charset="-120"/>
+                <a:hlinkClick r:id="rId1" invalidUrl="" action="" tgtFrame="" tooltip="" history="1" highlightClick="0" endSnd="0">
+                  <a:extLst>
+                    <a:ext uri="{A12FA001-AC4F-418D-AE19-62706E023703}">
+                      <ahyp:hlinkClr xmlns:ahyp="http://schemas.microsoft.com/office/drawing/2018/hyperlinkcolor" val="tx"/>
+                    </a:ext>
+                  </a:extLst>
+                </a:hlinkClick>
+              </a:rPr>
+              <a:t>cuinotes.com</a:t>
+            </a:r>
+            <a:pPr algn="r" indent="0" marL="0">
+              <a:buNone/>
+            </a:pPr>
+            <a:r>
+              <a:rPr lang="en-US" sz="1200" dirty="0">
+                <a:solidFill>
+                  <a:srgbClr val="8A939B"/>
+                </a:solidFill>
+                <a:latin typeface="Calibri" pitchFamily="34" charset="0"/>
+                <a:ea typeface="Calibri" pitchFamily="34" charset="-122"/>
+                <a:cs typeface="Calibri" pitchFamily="34" charset="-120"/>
+              </a:rPr>
+              <a:t>  ·  13</a:t>
+            </a:r>
+            <a:endParaRPr lang="en-US" sz="1200" dirty="0"/>
+          </a:p>
+        </p:txBody>
+      </p:sp>
+      <p:sp>
+        <p:nvSpPr>
+          <p:cNvPr id="4" name="Text 2"/>
+          <p:cNvSpPr txBox="1"/>
+          <p:nvPr/>
+        </p:nvSpPr>
+        <p:spPr>
+          <a:xfrm>
+            <a:off x="640080" y="1371600"/>
+            <a:ext cx="10332720" cy="4846320"/>
+          </a:xfrm>
+          <a:prstGeom prst="rect">
+            <a:avLst/>
+          </a:prstGeom>
+          <a:noFill/>
+          <a:ln/>
+        </p:spPr>
+        <p:txBody>
+          <a:bodyPr wrap="square" lIns="0" tIns="0" rIns="0" bIns="0" rtlCol="0" anchor="t"/>
+          <a:lstStyle/>
+          <a:p>
+            <a:pPr marL="342900" indent="-342900">
+              <a:spcAft>
+                <a:spcPts val="1800"/>
+              </a:spcAft>
+              <a:buSzPct val="100000"/>
+              <a:buChar char="•"/>
+            </a:pPr>
+            <a:r>
+              <a:rPr lang="en-US" sz="1800" dirty="0">
+                <a:solidFill>
+                  <a:srgbClr val="1F2429"/>
+                </a:solidFill>
+                <a:latin typeface="Calibri" pitchFamily="34" charset="0"/>
+                <a:ea typeface="Calibri" pitchFamily="34" charset="-122"/>
+                <a:cs typeface="Calibri" pitchFamily="34" charset="-120"/>
+              </a:rPr>
+              <a:t>Step 1 — a student pays their entire outstanding tuition balance at the finance office in week 10</a:t>
+            </a:r>
+            <a:endParaRPr lang="en-US" sz="1800" dirty="0"/>
+          </a:p>
+          <a:p>
+            <a:pPr marL="342900" indent="-342900">
+              <a:spcAft>
+                <a:spcPts val="1800"/>
+              </a:spcAft>
+              <a:buSzPct val="100000"/>
+              <a:buChar char="•"/>
+            </a:pPr>
+            <a:r>
+              <a:rPr lang="en-US" sz="1800" dirty="0">
+                <a:solidFill>
+                  <a:srgbClr val="1F2429"/>
+                </a:solidFill>
+                <a:latin typeface="Calibri" pitchFamily="34" charset="0"/>
+                <a:ea typeface="Calibri" pitchFamily="34" charset="-122"/>
+                <a:cs typeface="Calibri" pitchFamily="34" charset="-120"/>
+              </a:rPr>
+              <a:t>Step 2 — the finance office updates only its own file; no other office's file is touched, because the files don't talk to each other</a:t>
+            </a:r>
+            <a:endParaRPr lang="en-US" sz="1800" dirty="0"/>
+          </a:p>
+          <a:p>
+            <a:pPr marL="342900" indent="-342900">
+              <a:spcAft>
+                <a:spcPts val="1800"/>
+              </a:spcAft>
+              <a:buSzPct val="100000"/>
+              <a:buChar char="•"/>
+            </a:pPr>
+            <a:r>
+              <a:rPr lang="en-US" sz="1800" dirty="0">
+                <a:solidFill>
+                  <a:srgbClr val="1F2429"/>
+                </a:solidFill>
+                <a:latin typeface="Calibri" pitchFamily="34" charset="0"/>
+                <a:ea typeface="Calibri" pitchFamily="34" charset="-122"/>
+                <a:cs typeface="Calibri" pitchFamily="34" charset="-120"/>
+              </a:rPr>
+              <a:t>Step 3 — in week 14, the student applies for their transcript at the registrar's office</a:t>
+            </a:r>
+            <a:endParaRPr lang="en-US" sz="1800" dirty="0"/>
+          </a:p>
+          <a:p>
+            <a:pPr marL="342900" indent="-342900">
+              <a:spcAft>
+                <a:spcPts val="1800"/>
+              </a:spcAft>
+              <a:buSzPct val="100000"/>
+              <a:buChar char="•"/>
+            </a:pPr>
+            <a:r>
+              <a:rPr lang="en-US" sz="1800" dirty="0">
+                <a:solidFill>
+                  <a:srgbClr val="1F2429"/>
+                </a:solidFill>
+                <a:latin typeface="Calibri" pitchFamily="34" charset="0"/>
+                <a:ea typeface="Calibri" pitchFamily="34" charset="-122"/>
+                <a:cs typeface="Calibri" pitchFamily="34" charset="-120"/>
+              </a:rPr>
+              <a:t>Step 4 — the registrar's file still shows the balance from before the payment; it was never told the payment happened</a:t>
+            </a:r>
+            <a:endParaRPr lang="en-US" sz="1800" dirty="0"/>
+          </a:p>
+          <a:p>
+            <a:pPr marL="342900" indent="-342900">
+              <a:spcAft>
+                <a:spcPts val="1800"/>
+              </a:spcAft>
+              <a:buSzPct val="100000"/>
+              <a:buChar char="•"/>
+            </a:pPr>
+            <a:r>
+              <a:rPr lang="en-US" sz="1800" dirty="0">
+                <a:solidFill>
+                  <a:srgbClr val="1F2429"/>
+                </a:solidFill>
+                <a:latin typeface="Calibri" pitchFamily="34" charset="0"/>
+                <a:ea typeface="Calibri" pitchFamily="34" charset="-122"/>
+                <a:cs typeface="Calibri" pitchFamily="34" charset="-120"/>
+              </a:rPr>
+              <a:t>Step 5 — the transcript request is blocked, even though the debt no longer exists, because the stale copy looks just as “official” as the current one</a:t>
+            </a:r>
+            <a:endParaRPr lang="en-US" sz="1800" dirty="0"/>
+          </a:p>
+          <a:p>
+            <a:pPr marL="342900" indent="-342900">
+              <a:spcAft>
+                <a:spcPts val="1800"/>
+              </a:spcAft>
+              <a:buSzPct val="100000"/>
+              <a:buChar char="•"/>
+            </a:pPr>
+            <a:r>
+              <a:rPr lang="en-US" sz="1800" dirty="0">
+                <a:solidFill>
+                  <a:srgbClr val="1F2429"/>
+                </a:solidFill>
+                <a:latin typeface="Calibri" pitchFamily="34" charset="0"/>
+                <a:ea typeface="Calibri" pitchFamily="34" charset="-122"/>
+                <a:cs typeface="Calibri" pitchFamily="34" charset="-120"/>
+              </a:rPr>
+              <a:t>Why this is worse than redundancy: wasted storage is a visible, budgetable cost; a wrong “official” answer is invisible until it blocks someone</a:t>
+            </a:r>
+            <a:endParaRPr lang="en-US" sz="1800" dirty="0"/>
+          </a:p>
+        </p:txBody>
+      </p:sp>
+    </p:spTree>
+  </p:cSld>
+  <p:clrMapOvr>
+    <a:masterClrMapping/>
+  </p:clrMapOvr>
+</p:sld>
+</file>
+
+<file path=ppt/slides/slide19.xml><?xml version="1.0" encoding="utf-8"?>
+<p:sld xmlns:a="http://schemas.openxmlformats.org/drawingml/2006/main" xmlns:r="http://schemas.openxmlformats.org/officeDocument/2006/relationships" xmlns:p="http://schemas.openxmlformats.org/presentationml/2006/main">
+  <p:cSld name="Slide 4">
+    <p:bg>
+      <p:bgPr>
+        <a:solidFill>
+          <a:srgbClr val="F7F8F9"/>
+        </a:solidFill>
+      </p:bgPr>
+    </p:bg>
+    <p:spTree>
+      <p:nvGrpSpPr>
+        <p:cNvPr id="1" name=""/>
+        <p:cNvGrpSpPr/>
+        <p:nvPr/>
+      </p:nvGrpSpPr>
+      <p:grpSpPr>
+        <a:xfrm>
+          <a:off x="0" y="0"/>
+          <a:ext cx="0" cy="0"/>
+          <a:chOff x="0" y="0"/>
+          <a:chExt cx="0" cy="0"/>
+        </a:xfrm>
+      </p:grpSpPr>
+      <p:sp>
+        <p:nvSpPr>
+          <p:cNvPr id="2" name="Text 0"/>
+          <p:cNvSpPr txBox="1"/>
+          <p:nvPr/>
+        </p:nvSpPr>
+        <p:spPr>
+          <a:xfrm>
+            <a:off x="548640" y="365760"/>
+            <a:ext cx="11064240" cy="731520"/>
+          </a:xfrm>
+          <a:prstGeom prst="rect">
+            <a:avLst/>
+          </a:prstGeom>
+          <a:noFill/>
+          <a:ln/>
+        </p:spPr>
+        <p:txBody>
+          <a:bodyPr wrap="square" lIns="0" tIns="0" rIns="0" bIns="0" rtlCol="0" anchor="ctr"/>
+          <a:lstStyle/>
+          <a:p>
+            <a:pPr indent="0" marL="0">
+              <a:buNone/>
+            </a:pPr>
+            <a:r>
+              <a:rPr lang="en-US" sz="2800" b="1" dirty="0">
+                <a:solidFill>
+                  <a:srgbClr val="1F2429"/>
+                </a:solidFill>
+                <a:latin typeface="Calibri" pitchFamily="34" charset="0"/>
+                <a:ea typeface="Calibri" pitchFamily="34" charset="-122"/>
+                <a:cs typeface="Calibri" pitchFamily="34" charset="-120"/>
+              </a:rPr>
+              <a:t>Worked Example: Rebuilding the Student Table</a:t>
+            </a:r>
+            <a:endParaRPr lang="en-US" sz="2800" dirty="0"/>
+          </a:p>
+        </p:txBody>
+      </p:sp>
+      <p:sp>
+        <p:nvSpPr>
+          <p:cNvPr id="3" name="Text 1"/>
+          <p:cNvSpPr txBox="1"/>
+          <p:nvPr/>
+        </p:nvSpPr>
+        <p:spPr>
+          <a:xfrm>
+            <a:off x="9951415" y="6455664"/>
+            <a:ext cx="2011680" cy="292608"/>
+          </a:xfrm>
+          <a:prstGeom prst="rect">
+            <a:avLst/>
+          </a:prstGeom>
+          <a:noFill/>
+          <a:ln/>
+        </p:spPr>
+        <p:txBody>
+          <a:bodyPr wrap="square" lIns="0" tIns="0" rIns="0" bIns="0" rtlCol="0" anchor="ctr"/>
+          <a:lstStyle/>
+          <a:p>
+            <a:pPr algn="r" indent="0" marL="0">
+              <a:buNone/>
+            </a:pPr>
+            <a:r>
+              <a:rPr lang="en-US" sz="1200" u="sng" dirty="0">
+                <a:solidFill>
+                  <a:srgbClr val="8A939B"/>
+                </a:solidFill>
+                <a:latin typeface="Calibri" pitchFamily="34" charset="0"/>
+                <a:ea typeface="Calibri" pitchFamily="34" charset="-122"/>
+                <a:cs typeface="Calibri" pitchFamily="34" charset="-120"/>
+                <a:hlinkClick r:id="rId1" invalidUrl="" action="" tgtFrame="" tooltip="" history="1" highlightClick="0" endSnd="0">
+                  <a:extLst>
+                    <a:ext uri="{A12FA001-AC4F-418D-AE19-62706E023703}">
+                      <ahyp:hlinkClr xmlns:ahyp="http://schemas.microsoft.com/office/drawing/2018/hyperlinkcolor" val="tx"/>
+                    </a:ext>
+                  </a:extLst>
+                </a:hlinkClick>
+              </a:rPr>
+              <a:t>cuinotes.com</a:t>
+            </a:r>
+            <a:pPr algn="r" indent="0" marL="0">
+              <a:buNone/>
+            </a:pPr>
+            <a:r>
+              <a:rPr lang="en-US" sz="1200" dirty="0">
+                <a:solidFill>
+                  <a:srgbClr val="8A939B"/>
+                </a:solidFill>
+                <a:latin typeface="Calibri" pitchFamily="34" charset="0"/>
+                <a:ea typeface="Calibri" pitchFamily="34" charset="-122"/>
+                <a:cs typeface="Calibri" pitchFamily="34" charset="-120"/>
+              </a:rPr>
+              <a:t>  ·  15</a:t>
+            </a:r>
+            <a:endParaRPr lang="en-US" sz="1200" dirty="0"/>
+          </a:p>
+        </p:txBody>
+      </p:sp>
+      <p:graphicFrame>
+        <p:nvGraphicFramePr>
+          <p:cNvPr id="5" name="Table 0"/>
+          <p:cNvGraphicFramePr>
+            <a:graphicFrameLocks noGrp="1"/>
+          </p:cNvGraphicFramePr>
+          <p:nvPr>
+            <p:extLst>
+              <p:ext uri="{D42A27DB-BD31-4B8C-83A1-F6EECF244321}">
+                <p14:modId xmlns:p14="http://schemas.microsoft.com/office/powerpoint/2010/main" val="1579011935"/>
+              </p:ext>
+            </p:extLst>
+          </p:nvPr>
+        </p:nvGraphicFramePr>
+        <p:xfrm>
+          <a:off x="640080" y="1234440"/>
+          <a:ext cx="10881360" cy="3108960"/>
+        </p:xfrm>
+        <a:graphic>
+          <a:graphicData uri="http://schemas.openxmlformats.org/drawingml/2006/table">
+            <a:tbl>
+              <a:tblPr/>
+              <a:tblGrid>
+                <a:gridCol w="2377440"/>
+                <a:gridCol w="4663440"/>
+                <a:gridCol w="3840480"/>
+              </a:tblGrid>
+              <a:tr h="444137">
+                <a:tc>
+                  <a:txBody>
+                    <a:bodyPr/>
+                    <a:lstStyle/>
+                    <a:p>
+                      <a:pPr indent="0" marL="0">
+                        <a:buNone/>
+                      </a:pPr>
+                      <a:r>
+                        <a:rPr lang="en-US" sz="1400" b="1" dirty="0">
+                          <a:solidFill>
+                            <a:srgbClr val="FFFFFF"/>
+                          </a:solidFill>
+                          <a:latin typeface="Calibri" pitchFamily="34" charset="0"/>
+                          <a:ea typeface="Calibri" pitchFamily="34" charset="-122"/>
+                          <a:cs typeface="Calibri" pitchFamily="34" charset="-120"/>
+                        </a:rPr>
+                        <a:t>Table</a:t>
+                      </a:r>
+                      <a:endParaRPr lang="en-US" sz="1400" dirty="0">
+                        <a:latin typeface="Calibri" charset="0"/>
+                        <a:ea typeface="Calibri" charset="0"/>
+                        <a:cs typeface="Calibri" charset="0"/>
+                      </a:endParaRPr>
+                    </a:p>
+                  </a:txBody>
+                  <a:tcPr marL="91440" marR="91440" marT="45720" marB="45720" anchor="ctr">
+                    <a:lnL w="9525" cap="flat" cmpd="sng" algn="ctr">
+                      <a:solidFill>
+                        <a:srgbClr val="E1E4E8"/>
+                      </a:solidFill>
+                      <a:prstDash val="solid"/>
+                      <a:round/>
+                      <a:headEnd type="none" w="med" len="med"/>
+                      <a:tailEnd type="none" w="med" len="med"/>
+                    </a:lnL>
+                    <a:lnR w="9525" cap="flat" cmpd="sng" algn="ctr">
+                      <a:solidFill>
+                        <a:srgbClr val="E1E4E8"/>
+                      </a:solidFill>
+                      <a:prstDash val="solid"/>
+                      <a:round/>
+                      <a:headEnd type="none" w="med" len="med"/>
+                      <a:tailEnd type="none" w="med" len="med"/>
+                    </a:lnR>
+                    <a:lnT w="9525" cap="flat" cmpd="sng" algn="ctr">
+                      <a:solidFill>
+                        <a:srgbClr val="E1E4E8"/>
+                      </a:solidFill>
+                      <a:prstDash val="solid"/>
+                      <a:round/>
+                      <a:headEnd type="none" w="med" len="med"/>
+                      <a:tailEnd type="none" w="med" len="med"/>
+                    </a:lnT>
+                    <a:lnB w="9525" cap="flat" cmpd="sng" algn="ctr">
+                      <a:solidFill>
+                        <a:srgbClr val="E1E4E8"/>
+                      </a:solidFill>
+                      <a:prstDash val="solid"/>
+                      <a:round/>
+                      <a:headEnd type="none" w="med" len="med"/>
+                      <a:tailEnd type="none" w="med" len="med"/>
+                    </a:lnB>
+                    <a:solidFill>
+                      <a:srgbClr val="1F2429"/>
+                    </a:solidFill>
+                  </a:tcPr>
+                </a:tc>
+                <a:tc>
+                  <a:txBody>
+                    <a:bodyPr/>
+                    <a:lstStyle/>
+                    <a:p>
+                      <a:pPr indent="0" marL="0">
+                        <a:buNone/>
+                      </a:pPr>
+                      <a:r>
+                        <a:rPr lang="en-US" sz="1400" b="1" dirty="0">
+                          <a:solidFill>
+                            <a:srgbClr val="FFFFFF"/>
+                          </a:solidFill>
+                          <a:latin typeface="Calibri" pitchFamily="34" charset="0"/>
+                          <a:ea typeface="Calibri" pitchFamily="34" charset="-122"/>
+                          <a:cs typeface="Calibri" pitchFamily="34" charset="-120"/>
+                        </a:rPr>
+                        <a:t>Columns It Stores</a:t>
+                      </a:r>
+                      <a:endParaRPr lang="en-US" sz="1400" dirty="0">
+                        <a:latin typeface="Calibri" charset="0"/>
+                        <a:ea typeface="Calibri" charset="0"/>
+                        <a:cs typeface="Calibri" charset="0"/>
+                      </a:endParaRPr>
+                    </a:p>
+                  </a:txBody>
+                  <a:tcPr marL="91440" marR="91440" marT="45720" marB="45720" anchor="ctr">
+                    <a:lnL w="9525" cap="flat" cmpd="sng" algn="ctr">
+                      <a:solidFill>
+                        <a:srgbClr val="E1E4E8"/>
+                      </a:solidFill>
+                      <a:prstDash val="solid"/>
+                      <a:round/>
+                      <a:headEnd type="none" w="med" len="med"/>
+                      <a:tailEnd type="none" w="med" len="med"/>
+                    </a:lnL>
+                    <a:lnR w="9525" cap="flat" cmpd="sng" algn="ctr">
+                      <a:solidFill>
+                        <a:srgbClr val="E1E4E8"/>
+                      </a:solidFill>
+                      <a:prstDash val="solid"/>
+                      <a:round/>
+                      <a:headEnd type="none" w="med" len="med"/>
+                      <a:tailEnd type="none" w="med" len="med"/>
+                    </a:lnR>
+                    <a:lnT w="9525" cap="flat" cmpd="sng" algn="ctr">
+                      <a:solidFill>
+                        <a:srgbClr val="E1E4E8"/>
+                      </a:solidFill>
+                      <a:prstDash val="solid"/>
+                      <a:round/>
+                      <a:headEnd type="none" w="med" len="med"/>
+                      <a:tailEnd type="none" w="med" len="med"/>
+                    </a:lnT>
+                    <a:lnB w="9525" cap="flat" cmpd="sng" algn="ctr">
+                      <a:solidFill>
+                        <a:srgbClr val="E1E4E8"/>
+                      </a:solidFill>
+                      <a:prstDash val="solid"/>
+                      <a:round/>
+                      <a:headEnd type="none" w="med" len="med"/>
+                      <a:tailEnd type="none" w="med" len="med"/>
+                    </a:lnB>
+                    <a:solidFill>
+                      <a:srgbClr val="1F2429"/>
+                    </a:solidFill>
+                  </a:tcPr>
+                </a:tc>
+                <a:tc>
+                  <a:txBody>
+                    <a:bodyPr/>
+                    <a:lstStyle/>
+                    <a:p>
+                      <a:pPr indent="0" marL="0">
+                        <a:buNone/>
+                      </a:pPr>
+                      <a:r>
+                        <a:rPr lang="en-US" sz="1400" b="1" dirty="0">
+                          <a:solidFill>
+                            <a:srgbClr val="FFFFFF"/>
+                          </a:solidFill>
+                          <a:latin typeface="Calibri" pitchFamily="34" charset="0"/>
+                          <a:ea typeface="Calibri" pitchFamily="34" charset="-122"/>
+                          <a:cs typeface="Calibri" pitchFamily="34" charset="-120"/>
+                        </a:rPr>
+                        <a:t>What Changed</a:t>
+                      </a:r>
+                      <a:endParaRPr lang="en-US" sz="1400" dirty="0">
+                        <a:latin typeface="Calibri" charset="0"/>
+                        <a:ea typeface="Calibri" charset="0"/>
+                        <a:cs typeface="Calibri" charset="0"/>
+                      </a:endParaRPr>
+                    </a:p>
+                  </a:txBody>
+                  <a:tcPr marL="91440" marR="91440" marT="45720" marB="45720" anchor="ctr">
+                    <a:lnL w="9525" cap="flat" cmpd="sng" algn="ctr">
+                      <a:solidFill>
+                        <a:srgbClr val="E1E4E8"/>
+                      </a:solidFill>
+                      <a:prstDash val="solid"/>
+                      <a:round/>
+                      <a:headEnd type="none" w="med" len="med"/>
+                      <a:tailEnd type="none" w="med" len="med"/>
+                    </a:lnL>
+                    <a:lnR w="9525" cap="flat" cmpd="sng" algn="ctr">
+                      <a:solidFill>
+                        <a:srgbClr val="E1E4E8"/>
+                      </a:solidFill>
+                      <a:prstDash val="solid"/>
+                      <a:round/>
+                      <a:headEnd type="none" w="med" len="med"/>
+                      <a:tailEnd type="none" w="med" len="med"/>
+                    </a:lnR>
+                    <a:lnT w="9525" cap="flat" cmpd="sng" algn="ctr">
+                      <a:solidFill>
+                        <a:srgbClr val="E1E4E8"/>
+                      </a:solidFill>
+                      <a:prstDash val="solid"/>
+                      <a:round/>
+                      <a:headEnd type="none" w="med" len="med"/>
+                      <a:tailEnd type="none" w="med" len="med"/>
+                    </a:lnT>
+                    <a:lnB w="9525" cap="flat" cmpd="sng" algn="ctr">
+                      <a:solidFill>
+                        <a:srgbClr val="E1E4E8"/>
+                      </a:solidFill>
+                      <a:prstDash val="solid"/>
+                      <a:round/>
+                      <a:headEnd type="none" w="med" len="med"/>
+                      <a:tailEnd type="none" w="med" len="med"/>
+                    </a:lnB>
+                    <a:solidFill>
+                      <a:srgbClr val="1F2429"/>
+                    </a:solidFill>
+                  </a:tcPr>
+                </a:tc>
+              </a:tr>
+              <a:tr h="444137">
+                <a:tc>
+                  <a:txBody>
+                    <a:bodyPr/>
+                    <a:lstStyle/>
+                    <a:p>
+                      <a:pPr indent="0" marL="0">
+                        <a:buNone/>
+                      </a:pPr>
+                      <a:r>
+                        <a:rPr lang="en-US" sz="1400" dirty="0">
+                          <a:solidFill>
+                            <a:srgbClr val="1F2429"/>
+                          </a:solidFill>
+                          <a:latin typeface="Calibri" pitchFamily="34" charset="0"/>
+                          <a:ea typeface="Calibri" pitchFamily="34" charset="-122"/>
+                          <a:cs typeface="Calibri" pitchFamily="34" charset="-120"/>
+                        </a:rPr>
+                        <a:t>Student (one copy)</a:t>
+                      </a:r>
+                      <a:endParaRPr lang="en-US" sz="1400" dirty="0">
+                        <a:latin typeface="Calibri" charset="0"/>
+                        <a:ea typeface="Calibri" charset="0"/>
+                        <a:cs typeface="Calibri" charset="0"/>
+                      </a:endParaRPr>
+                    </a:p>
+                  </a:txBody>
+                  <a:tcPr marL="91440" marR="91440" marT="45720" marB="45720" anchor="ctr">
+                    <a:lnL w="9525" cap="flat" cmpd="sng" algn="ctr">
+                      <a:solidFill>
+                        <a:srgbClr val="E1E4E8"/>
+                      </a:solidFill>
+                      <a:prstDash val="solid"/>
+                      <a:round/>
+                      <a:headEnd type="none" w="med" len="med"/>
+                      <a:tailEnd type="none" w="med" len="med"/>
+                    </a:lnL>
+                    <a:lnR w="9525" cap="flat" cmpd="sng" algn="ctr">
+                      <a:solidFill>
+                        <a:srgbClr val="E1E4E8"/>
+                      </a:solidFill>
+                      <a:prstDash val="solid"/>
+                      <a:round/>
+                      <a:headEnd type="none" w="med" len="med"/>
+                      <a:tailEnd type="none" w="med" len="med"/>
+                    </a:lnR>
+                    <a:lnT w="9525" cap="flat" cmpd="sng" algn="ctr">
+                      <a:solidFill>
+                        <a:srgbClr val="E1E4E8"/>
+                      </a:solidFill>
+                      <a:prstDash val="solid"/>
+                      <a:round/>
+                      <a:headEnd type="none" w="med" len="med"/>
+                      <a:tailEnd type="none" w="med" len="med"/>
+                    </a:lnT>
+                    <a:lnB w="9525" cap="flat" cmpd="sng" algn="ctr">
+                      <a:solidFill>
+                        <a:srgbClr val="E1E4E8"/>
+                      </a:solidFill>
+                      <a:prstDash val="solid"/>
+                      <a:round/>
+                      <a:headEnd type="none" w="med" len="med"/>
+                      <a:tailEnd type="none" w="med" len="med"/>
+                    </a:lnB>
+                  </a:tcPr>
+                </a:tc>
+                <a:tc>
+                  <a:txBody>
+                    <a:bodyPr/>
+                    <a:lstStyle/>
+                    <a:p>
+                      <a:pPr indent="0" marL="0">
+                        <a:buNone/>
+                      </a:pPr>
+                      <a:r>
+                        <a:rPr lang="en-US" sz="1400" dirty="0">
+                          <a:solidFill>
+                            <a:srgbClr val="1F2429"/>
+                          </a:solidFill>
+                          <a:latin typeface="Calibri" pitchFamily="34" charset="0"/>
+                          <a:ea typeface="Calibri" pitchFamily="34" charset="-122"/>
+                          <a:cs typeface="Calibri" pitchFamily="34" charset="-120"/>
+                        </a:rPr>
+                        <a:t>RegNo, Name, Address, Program</a:t>
+                      </a:r>
+                      <a:endParaRPr lang="en-US" sz="1400" dirty="0">
+                        <a:latin typeface="Calibri" charset="0"/>
+                        <a:ea typeface="Calibri" charset="0"/>
+                        <a:cs typeface="Calibri" charset="0"/>
+                      </a:endParaRPr>
+                    </a:p>
+                  </a:txBody>
+                  <a:tcPr marL="91440" marR="91440" marT="45720" marB="45720" anchor="ctr">
+                    <a:lnL w="9525" cap="flat" cmpd="sng" algn="ctr">
+                      <a:solidFill>
+                        <a:srgbClr val="E1E4E8"/>
+                      </a:solidFill>
+                      <a:prstDash val="solid"/>
+                      <a:round/>
+                      <a:headEnd type="none" w="med" len="med"/>
+                      <a:tailEnd type="none" w="med" len="med"/>
+                    </a:lnL>
+                    <a:lnR w="9525" cap="flat" cmpd="sng" algn="ctr">
+                      <a:solidFill>
+                        <a:srgbClr val="E1E4E8"/>
+                      </a:solidFill>
+                      <a:prstDash val="solid"/>
+                      <a:round/>
+                      <a:headEnd type="none" w="med" len="med"/>
+                      <a:tailEnd type="none" w="med" len="med"/>
+                    </a:lnR>
+                    <a:lnT w="9525" cap="flat" cmpd="sng" algn="ctr">
+                      <a:solidFill>
+                        <a:srgbClr val="E1E4E8"/>
+                      </a:solidFill>
+                      <a:prstDash val="solid"/>
+                      <a:round/>
+                      <a:headEnd type="none" w="med" len="med"/>
+                      <a:tailEnd type="none" w="med" len="med"/>
+                    </a:lnT>
+                    <a:lnB w="9525" cap="flat" cmpd="sng" algn="ctr">
+                      <a:solidFill>
+                        <a:srgbClr val="E1E4E8"/>
+                      </a:solidFill>
+                      <a:prstDash val="solid"/>
+                      <a:round/>
+                      <a:headEnd type="none" w="med" len="med"/>
+                      <a:tailEnd type="none" w="med" len="med"/>
+                    </a:lnB>
+                  </a:tcPr>
+                </a:tc>
+                <a:tc>
+                  <a:txBody>
+                    <a:bodyPr/>
+                    <a:lstStyle/>
+                    <a:p>
+                      <a:pPr indent="0" marL="0">
+                        <a:buNone/>
+                      </a:pPr>
+                      <a:r>
+                        <a:rPr lang="en-US" sz="1400" dirty="0">
+                          <a:solidFill>
+                            <a:srgbClr val="1F2429"/>
+                          </a:solidFill>
+                          <a:latin typeface="Calibri" pitchFamily="34" charset="0"/>
+                          <a:ea typeface="Calibri" pitchFamily="34" charset="-122"/>
+                          <a:cs typeface="Calibri" pitchFamily="34" charset="-120"/>
+                        </a:rPr>
+                        <a:t>Lives in one place, via the DBMS</a:t>
+                      </a:r>
+                      <a:endParaRPr lang="en-US" sz="1400" dirty="0">
+                        <a:latin typeface="Calibri" charset="0"/>
+                        <a:ea typeface="Calibri" charset="0"/>
+                        <a:cs typeface="Calibri" charset="0"/>
+                      </a:endParaRPr>
+                    </a:p>
+                  </a:txBody>
+                  <a:tcPr marL="91440" marR="91440" marT="45720" marB="45720" anchor="ctr">
+                    <a:lnL w="9525" cap="flat" cmpd="sng" algn="ctr">
+                      <a:solidFill>
+                        <a:srgbClr val="E1E4E8"/>
+                      </a:solidFill>
+                      <a:prstDash val="solid"/>
+                      <a:round/>
+                      <a:headEnd type="none" w="med" len="med"/>
+                      <a:tailEnd type="none" w="med" len="med"/>
+                    </a:lnL>
+                    <a:lnR w="9525" cap="flat" cmpd="sng" algn="ctr">
+                      <a:solidFill>
+                        <a:srgbClr val="E1E4E8"/>
+                      </a:solidFill>
+                      <a:prstDash val="solid"/>
+                      <a:round/>
+                      <a:headEnd type="none" w="med" len="med"/>
+                      <a:tailEnd type="none" w="med" len="med"/>
+                    </a:lnR>
+                    <a:lnT w="9525" cap="flat" cmpd="sng" algn="ctr">
+                      <a:solidFill>
+                        <a:srgbClr val="E1E4E8"/>
+                      </a:solidFill>
+                      <a:prstDash val="solid"/>
+                      <a:round/>
+                      <a:headEnd type="none" w="med" len="med"/>
+                      <a:tailEnd type="none" w="med" len="med"/>
+                    </a:lnT>
+                    <a:lnB w="9525" cap="flat" cmpd="sng" algn="ctr">
+                      <a:solidFill>
+                        <a:srgbClr val="E1E4E8"/>
+                      </a:solidFill>
+                      <a:prstDash val="solid"/>
+                      <a:round/>
+                      <a:headEnd type="none" w="med" len="med"/>
+                      <a:tailEnd type="none" w="med" len="med"/>
+                    </a:lnB>
+                  </a:tcPr>
+                </a:tc>
+              </a:tr>
+              <a:tr h="444137">
+                <a:tc>
+                  <a:txBody>
+                    <a:bodyPr/>
+                    <a:lstStyle/>
+                    <a:p>
+                      <a:pPr indent="0" marL="0">
+                        <a:buNone/>
+                      </a:pPr>
+                      <a:r>
+                        <a:rPr lang="en-US" sz="1400" dirty="0">
+                          <a:solidFill>
+                            <a:srgbClr val="1F2429"/>
+                          </a:solidFill>
+                          <a:latin typeface="Calibri" pitchFamily="34" charset="0"/>
+                          <a:ea typeface="Calibri" pitchFamily="34" charset="-122"/>
+                          <a:cs typeface="Calibri" pitchFamily="34" charset="-120"/>
+                        </a:rPr>
+                        <a:t>Library's own data</a:t>
+                      </a:r>
+                      <a:endParaRPr lang="en-US" sz="1400" dirty="0">
+                        <a:latin typeface="Calibri" charset="0"/>
+                        <a:ea typeface="Calibri" charset="0"/>
+                        <a:cs typeface="Calibri" charset="0"/>
+                      </a:endParaRPr>
+                    </a:p>
+                  </a:txBody>
+                  <a:tcPr marL="91440" marR="91440" marT="45720" marB="45720" anchor="ctr">
+                    <a:lnL w="9525" cap="flat" cmpd="sng" algn="ctr">
+                      <a:solidFill>
+                        <a:srgbClr val="E1E4E8"/>
+                      </a:solidFill>
+                      <a:prstDash val="solid"/>
+                      <a:round/>
+                      <a:headEnd type="none" w="med" len="med"/>
+                      <a:tailEnd type="none" w="med" len="med"/>
+                    </a:lnL>
+                    <a:lnR w="9525" cap="flat" cmpd="sng" algn="ctr">
+                      <a:solidFill>
+                        <a:srgbClr val="E1E4E8"/>
+                      </a:solidFill>
+                      <a:prstDash val="solid"/>
+                      <a:round/>
+                      <a:headEnd type="none" w="med" len="med"/>
+                      <a:tailEnd type="none" w="med" len="med"/>
+                    </a:lnR>
+                    <a:lnT w="9525" cap="flat" cmpd="sng" algn="ctr">
+                      <a:solidFill>
+                        <a:srgbClr val="E1E4E8"/>
+                      </a:solidFill>
+                      <a:prstDash val="solid"/>
+                      <a:round/>
+                      <a:headEnd type="none" w="med" len="med"/>
+                      <a:tailEnd type="none" w="med" len="med"/>
+                    </a:lnT>
+                    <a:lnB w="9525" cap="flat" cmpd="sng" algn="ctr">
+                      <a:solidFill>
+                        <a:srgbClr val="E1E4E8"/>
+                      </a:solidFill>
+                      <a:prstDash val="solid"/>
+                      <a:round/>
+                      <a:headEnd type="none" w="med" len="med"/>
+                      <a:tailEnd type="none" w="med" len="med"/>
+                    </a:lnB>
+                  </a:tcPr>
+                </a:tc>
+                <a:tc>
+                  <a:txBody>
+                    <a:bodyPr/>
+                    <a:lstStyle/>
+                    <a:p>
+                      <a:pPr indent="0" marL="0">
+                        <a:buNone/>
+                      </a:pPr>
+                      <a:r>
+                        <a:rPr lang="en-US" sz="1400" dirty="0">
+                          <a:solidFill>
+                            <a:srgbClr val="1F2429"/>
+                          </a:solidFill>
+                          <a:latin typeface="Calibri" pitchFamily="34" charset="0"/>
+                          <a:ea typeface="Calibri" pitchFamily="34" charset="-122"/>
+                          <a:cs typeface="Calibri" pitchFamily="34" charset="-120"/>
+                        </a:rPr>
+                        <a:t>RegNo (reference), BooksIssued</a:t>
+                      </a:r>
+                      <a:endParaRPr lang="en-US" sz="1400" dirty="0">
+                        <a:latin typeface="Calibri" charset="0"/>
+                        <a:ea typeface="Calibri" charset="0"/>
+                        <a:cs typeface="Calibri" charset="0"/>
+                      </a:endParaRPr>
+                    </a:p>
+                  </a:txBody>
+                  <a:tcPr marL="91440" marR="91440" marT="45720" marB="45720" anchor="ctr">
+                    <a:lnL w="9525" cap="flat" cmpd="sng" algn="ctr">
+                      <a:solidFill>
+                        <a:srgbClr val="E1E4E8"/>
+                      </a:solidFill>
+                      <a:prstDash val="solid"/>
+                      <a:round/>
+                      <a:headEnd type="none" w="med" len="med"/>
+                      <a:tailEnd type="none" w="med" len="med"/>
+                    </a:lnL>
+                    <a:lnR w="9525" cap="flat" cmpd="sng" algn="ctr">
+                      <a:solidFill>
+                        <a:srgbClr val="E1E4E8"/>
+                      </a:solidFill>
+                      <a:prstDash val="solid"/>
+                      <a:round/>
+                      <a:headEnd type="none" w="med" len="med"/>
+                      <a:tailEnd type="none" w="med" len="med"/>
+                    </a:lnR>
+                    <a:lnT w="9525" cap="flat" cmpd="sng" algn="ctr">
+                      <a:solidFill>
+                        <a:srgbClr val="E1E4E8"/>
+                      </a:solidFill>
+                      <a:prstDash val="solid"/>
+                      <a:round/>
+                      <a:headEnd type="none" w="med" len="med"/>
+                      <a:tailEnd type="none" w="med" len="med"/>
+                    </a:lnT>
+                    <a:lnB w="9525" cap="flat" cmpd="sng" algn="ctr">
+                      <a:solidFill>
+                        <a:srgbClr val="E1E4E8"/>
+                      </a:solidFill>
+                      <a:prstDash val="solid"/>
+                      <a:round/>
+                      <a:headEnd type="none" w="med" len="med"/>
+                      <a:tailEnd type="none" w="med" len="med"/>
+                    </a:lnB>
+                  </a:tcPr>
+                </a:tc>
+                <a:tc>
+                  <a:txBody>
+                    <a:bodyPr/>
+                    <a:lstStyle/>
+                    <a:p>
+                      <a:pPr indent="0" marL="0">
+                        <a:buNone/>
+                      </a:pPr>
+                      <a:r>
+                        <a:rPr lang="en-US" sz="1400" dirty="0">
+                          <a:solidFill>
+                            <a:srgbClr val="1F2429"/>
+                          </a:solidFill>
+                          <a:latin typeface="Calibri" pitchFamily="34" charset="0"/>
+                          <a:ea typeface="Calibri" pitchFamily="34" charset="-122"/>
+                          <a:cs typeface="Calibri" pitchFamily="34" charset="-120"/>
+                        </a:rPr>
+                        <a:t>No Name/Address — lives only in Student</a:t>
+                      </a:r>
+                      <a:endParaRPr lang="en-US" sz="1400" dirty="0">
+                        <a:latin typeface="Calibri" charset="0"/>
+                        <a:ea typeface="Calibri" charset="0"/>
+                        <a:cs typeface="Calibri" charset="0"/>
+                      </a:endParaRPr>
+                    </a:p>
+                  </a:txBody>
+                  <a:tcPr marL="91440" marR="91440" marT="45720" marB="45720" anchor="ctr">
+                    <a:lnL w="9525" cap="flat" cmpd="sng" algn="ctr">
+                      <a:solidFill>
+                        <a:srgbClr val="E1E4E8"/>
+                      </a:solidFill>
+                      <a:prstDash val="solid"/>
+                      <a:round/>
+                      <a:headEnd type="none" w="med" len="med"/>
+                      <a:tailEnd type="none" w="med" len="med"/>
+                    </a:lnL>
+                    <a:lnR w="9525" cap="flat" cmpd="sng" algn="ctr">
+                      <a:solidFill>
+                        <a:srgbClr val="E1E4E8"/>
+                      </a:solidFill>
+                      <a:prstDash val="solid"/>
+                      <a:round/>
+                      <a:headEnd type="none" w="med" len="med"/>
+                      <a:tailEnd type="none" w="med" len="med"/>
+                    </a:lnR>
+                    <a:lnT w="9525" cap="flat" cmpd="sng" algn="ctr">
+                      <a:solidFill>
+                        <a:srgbClr val="E1E4E8"/>
+                      </a:solidFill>
+                      <a:prstDash val="solid"/>
+                      <a:round/>
+                      <a:headEnd type="none" w="med" len="med"/>
+                      <a:tailEnd type="none" w="med" len="med"/>
+                    </a:lnT>
+                    <a:lnB w="9525" cap="flat" cmpd="sng" algn="ctr">
+                      <a:solidFill>
+                        <a:srgbClr val="E1E4E8"/>
+                      </a:solidFill>
+                      <a:prstDash val="solid"/>
+                      <a:round/>
+                      <a:headEnd type="none" w="med" len="med"/>
+                      <a:tailEnd type="none" w="med" len="med"/>
+                    </a:lnB>
+                  </a:tcPr>
+                </a:tc>
+              </a:tr>
+              <a:tr h="444137">
+                <a:tc>
+                  <a:txBody>
+                    <a:bodyPr/>
+                    <a:lstStyle/>
+                    <a:p>
+                      <a:pPr indent="0" marL="0">
+                        <a:buNone/>
+                      </a:pPr>
+                      <a:r>
+                        <a:rPr lang="en-US" sz="1400" dirty="0">
+                          <a:solidFill>
+                            <a:srgbClr val="1F2429"/>
+                          </a:solidFill>
+                          <a:latin typeface="Calibri" pitchFamily="34" charset="0"/>
+                          <a:ea typeface="Calibri" pitchFamily="34" charset="-122"/>
+                          <a:cs typeface="Calibri" pitchFamily="34" charset="-120"/>
+                        </a:rPr>
+                        <a:t>Finance's own data</a:t>
+                      </a:r>
+                      <a:endParaRPr lang="en-US" sz="1400" dirty="0">
+                        <a:latin typeface="Calibri" charset="0"/>
+                        <a:ea typeface="Calibri" charset="0"/>
+                        <a:cs typeface="Calibri" charset="0"/>
+                      </a:endParaRPr>
+                    </a:p>
+                  </a:txBody>
+                  <a:tcPr marL="91440" marR="91440" marT="45720" marB="45720" anchor="ctr">
+                    <a:lnL w="9525" cap="flat" cmpd="sng" algn="ctr">
+                      <a:solidFill>
+                        <a:srgbClr val="E1E4E8"/>
+                      </a:solidFill>
+                      <a:prstDash val="solid"/>
+                      <a:round/>
+                      <a:headEnd type="none" w="med" len="med"/>
+                      <a:tailEnd type="none" w="med" len="med"/>
+                    </a:lnL>
+                    <a:lnR w="9525" cap="flat" cmpd="sng" algn="ctr">
+                      <a:solidFill>
+                        <a:srgbClr val="E1E4E8"/>
+                      </a:solidFill>
+                      <a:prstDash val="solid"/>
+                      <a:round/>
+                      <a:headEnd type="none" w="med" len="med"/>
+                      <a:tailEnd type="none" w="med" len="med"/>
+                    </a:lnR>
+                    <a:lnT w="9525" cap="flat" cmpd="sng" algn="ctr">
+                      <a:solidFill>
+                        <a:srgbClr val="E1E4E8"/>
+                      </a:solidFill>
+                      <a:prstDash val="solid"/>
+                      <a:round/>
+                      <a:headEnd type="none" w="med" len="med"/>
+                      <a:tailEnd type="none" w="med" len="med"/>
+                    </a:lnT>
+                    <a:lnB w="9525" cap="flat" cmpd="sng" algn="ctr">
+                      <a:solidFill>
+                        <a:srgbClr val="E1E4E8"/>
+                      </a:solidFill>
+                      <a:prstDash val="solid"/>
+                      <a:round/>
+                      <a:headEnd type="none" w="med" len="med"/>
+                      <a:tailEnd type="none" w="med" len="med"/>
+                    </a:lnB>
+                  </a:tcPr>
+                </a:tc>
+                <a:tc>
+                  <a:txBody>
+                    <a:bodyPr/>
+                    <a:lstStyle/>
+                    <a:p>
+                      <a:pPr indent="0" marL="0">
+                        <a:buNone/>
+                      </a:pPr>
+                      <a:r>
+                        <a:rPr lang="en-US" sz="1400" dirty="0">
+                          <a:solidFill>
+                            <a:srgbClr val="1F2429"/>
+                          </a:solidFill>
+                          <a:latin typeface="Calibri" pitchFamily="34" charset="0"/>
+                          <a:ea typeface="Calibri" pitchFamily="34" charset="-122"/>
+                          <a:cs typeface="Calibri" pitchFamily="34" charset="-120"/>
+                        </a:rPr>
+                        <a:t>RegNo (reference), FeeBalance</a:t>
+                      </a:r>
+                      <a:endParaRPr lang="en-US" sz="1400" dirty="0">
+                        <a:latin typeface="Calibri" charset="0"/>
+                        <a:ea typeface="Calibri" charset="0"/>
+                        <a:cs typeface="Calibri" charset="0"/>
+                      </a:endParaRPr>
+                    </a:p>
+                  </a:txBody>
+                  <a:tcPr marL="91440" marR="91440" marT="45720" marB="45720" anchor="ctr">
+                    <a:lnL w="9525" cap="flat" cmpd="sng" algn="ctr">
+                      <a:solidFill>
+                        <a:srgbClr val="E1E4E8"/>
+                      </a:solidFill>
+                      <a:prstDash val="solid"/>
+                      <a:round/>
+                      <a:headEnd type="none" w="med" len="med"/>
+                      <a:tailEnd type="none" w="med" len="med"/>
+                    </a:lnL>
+                    <a:lnR w="9525" cap="flat" cmpd="sng" algn="ctr">
+                      <a:solidFill>
+                        <a:srgbClr val="E1E4E8"/>
+                      </a:solidFill>
+                      <a:prstDash val="solid"/>
+                      <a:round/>
+                      <a:headEnd type="none" w="med" len="med"/>
+                      <a:tailEnd type="none" w="med" len="med"/>
+                    </a:lnR>
+                    <a:lnT w="9525" cap="flat" cmpd="sng" algn="ctr">
+                      <a:solidFill>
+                        <a:srgbClr val="E1E4E8"/>
+                      </a:solidFill>
+                      <a:prstDash val="solid"/>
+                      <a:round/>
+                      <a:headEnd type="none" w="med" len="med"/>
+                      <a:tailEnd type="none" w="med" len="med"/>
+                    </a:lnT>
+                    <a:lnB w="9525" cap="flat" cmpd="sng" algn="ctr">
+                      <a:solidFill>
+                        <a:srgbClr val="E1E4E8"/>
+                      </a:solidFill>
+                      <a:prstDash val="solid"/>
+                      <a:round/>
+                      <a:headEnd type="none" w="med" len="med"/>
+                      <a:tailEnd type="none" w="med" len="med"/>
+                    </a:lnB>
+                  </a:tcPr>
+                </a:tc>
+                <a:tc>
+                  <a:txBody>
+                    <a:bodyPr/>
+                    <a:lstStyle/>
+                    <a:p>
+                      <a:pPr indent="0" marL="0">
+                        <a:buNone/>
+                      </a:pPr>
+                      <a:r>
+                        <a:rPr lang="en-US" sz="1400" dirty="0">
+                          <a:solidFill>
+                            <a:srgbClr val="1F2429"/>
+                          </a:solidFill>
+                          <a:latin typeface="Calibri" pitchFamily="34" charset="0"/>
+                          <a:ea typeface="Calibri" pitchFamily="34" charset="-122"/>
+                          <a:cs typeface="Calibri" pitchFamily="34" charset="-120"/>
+                        </a:rPr>
+                        <a:t>No Name/Address — same shared reference</a:t>
+                      </a:r>
+                      <a:endParaRPr lang="en-US" sz="1400" dirty="0">
+                        <a:latin typeface="Calibri" charset="0"/>
+                        <a:ea typeface="Calibri" charset="0"/>
+                        <a:cs typeface="Calibri" charset="0"/>
+                      </a:endParaRPr>
+                    </a:p>
+                  </a:txBody>
+                  <a:tcPr marL="91440" marR="91440" marT="45720" marB="45720" anchor="ctr">
+                    <a:lnL w="9525" cap="flat" cmpd="sng" algn="ctr">
+                      <a:solidFill>
+                        <a:srgbClr val="E1E4E8"/>
+                      </a:solidFill>
+                      <a:prstDash val="solid"/>
+                      <a:round/>
+                      <a:headEnd type="none" w="med" len="med"/>
+                      <a:tailEnd type="none" w="med" len="med"/>
+                    </a:lnL>
+                    <a:lnR w="9525" cap="flat" cmpd="sng" algn="ctr">
+                      <a:solidFill>
+                        <a:srgbClr val="E1E4E8"/>
+                      </a:solidFill>
+                      <a:prstDash val="solid"/>
+                      <a:round/>
+                      <a:headEnd type="none" w="med" len="med"/>
+                      <a:tailEnd type="none" w="med" len="med"/>
+                    </a:lnR>
+                    <a:lnT w="9525" cap="flat" cmpd="sng" algn="ctr">
+                      <a:solidFill>
+                        <a:srgbClr val="E1E4E8"/>
+                      </a:solidFill>
+                      <a:prstDash val="solid"/>
+                      <a:round/>
+                      <a:headEnd type="none" w="med" len="med"/>
+                      <a:tailEnd type="none" w="med" len="med"/>
+                    </a:lnT>
+                    <a:lnB w="9525" cap="flat" cmpd="sng" algn="ctr">
+                      <a:solidFill>
+                        <a:srgbClr val="E1E4E8"/>
+                      </a:solidFill>
+                      <a:prstDash val="solid"/>
+                      <a:round/>
+                      <a:headEnd type="none" w="med" len="med"/>
+                      <a:tailEnd type="none" w="med" len="med"/>
+                    </a:lnB>
+                  </a:tcPr>
+                </a:tc>
+              </a:tr>
+              <a:tr h="444137">
+                <a:tc>
+                  <a:txBody>
+                    <a:bodyPr/>
+                    <a:lstStyle/>
+                    <a:p>
+                      <a:pPr indent="0" marL="0">
+                        <a:buNone/>
+                      </a:pPr>
+                      <a:r>
+                        <a:rPr lang="en-US" sz="1400" dirty="0">
+                          <a:solidFill>
+                            <a:srgbClr val="1F2429"/>
+                          </a:solidFill>
+                          <a:latin typeface="Calibri" pitchFamily="34" charset="0"/>
+                          <a:ea typeface="Calibri" pitchFamily="34" charset="-122"/>
+                          <a:cs typeface="Calibri" pitchFamily="34" charset="-120"/>
+                        </a:rPr>
+                        <a:t>Updating an address</a:t>
+                      </a:r>
+                      <a:endParaRPr lang="en-US" sz="1400" dirty="0">
+                        <a:latin typeface="Calibri" charset="0"/>
+                        <a:ea typeface="Calibri" charset="0"/>
+                        <a:cs typeface="Calibri" charset="0"/>
+                      </a:endParaRPr>
+                    </a:p>
+                  </a:txBody>
+                  <a:tcPr marL="91440" marR="91440" marT="45720" marB="45720" anchor="ctr">
+                    <a:lnL w="9525" cap="flat" cmpd="sng" algn="ctr">
+                      <a:solidFill>
+                        <a:srgbClr val="E1E4E8"/>
+                      </a:solidFill>
+                      <a:prstDash val="solid"/>
+                      <a:round/>
+                      <a:headEnd type="none" w="med" len="med"/>
+                      <a:tailEnd type="none" w="med" len="med"/>
+                    </a:lnL>
+                    <a:lnR w="9525" cap="flat" cmpd="sng" algn="ctr">
+                      <a:solidFill>
+                        <a:srgbClr val="E1E4E8"/>
+                      </a:solidFill>
+                      <a:prstDash val="solid"/>
+                      <a:round/>
+                      <a:headEnd type="none" w="med" len="med"/>
+                      <a:tailEnd type="none" w="med" len="med"/>
+                    </a:lnR>
+                    <a:lnT w="9525" cap="flat" cmpd="sng" algn="ctr">
+                      <a:solidFill>
+                        <a:srgbClr val="E1E4E8"/>
+                      </a:solidFill>
+                      <a:prstDash val="solid"/>
+                      <a:round/>
+                      <a:headEnd type="none" w="med" len="med"/>
+                      <a:tailEnd type="none" w="med" len="med"/>
+                    </a:lnT>
+                    <a:lnB w="9525" cap="flat" cmpd="sng" algn="ctr">
+                      <a:solidFill>
+                        <a:srgbClr val="E1E4E8"/>
+                      </a:solidFill>
+                      <a:prstDash val="solid"/>
+                      <a:round/>
+                      <a:headEnd type="none" w="med" len="med"/>
+                      <a:tailEnd type="none" w="med" len="med"/>
+                    </a:lnB>
+                  </a:tcPr>
+                </a:tc>
+                <a:tc>
+                  <a:txBody>
+                    <a:bodyPr/>
+                    <a:lstStyle/>
+                    <a:p>
+                      <a:pPr indent="0" marL="0">
+                        <a:buNone/>
+                      </a:pPr>
+                      <a:r>
+                        <a:rPr lang="en-US" sz="1400" dirty="0">
+                          <a:solidFill>
+                            <a:srgbClr val="1F2429"/>
+                          </a:solidFill>
+                          <a:latin typeface="Calibri" pitchFamily="34" charset="0"/>
+                          <a:ea typeface="Calibri" pitchFamily="34" charset="-122"/>
+                          <a:cs typeface="Calibri" pitchFamily="34" charset="-120"/>
+                        </a:rPr>
+                        <a:t>Change Student.Address once</a:t>
+                      </a:r>
+                      <a:endParaRPr lang="en-US" sz="1400" dirty="0">
+                        <a:latin typeface="Calibri" charset="0"/>
+                        <a:ea typeface="Calibri" charset="0"/>
+                        <a:cs typeface="Calibri" charset="0"/>
+                      </a:endParaRPr>
+                    </a:p>
+                  </a:txBody>
+                  <a:tcPr marL="91440" marR="91440" marT="45720" marB="45720" anchor="ctr">
+                    <a:lnL w="9525" cap="flat" cmpd="sng" algn="ctr">
+                      <a:solidFill>
+                        <a:srgbClr val="E1E4E8"/>
+                      </a:solidFill>
+                      <a:prstDash val="solid"/>
+                      <a:round/>
+                      <a:headEnd type="none" w="med" len="med"/>
+                      <a:tailEnd type="none" w="med" len="med"/>
+                    </a:lnL>
+                    <a:lnR w="9525" cap="flat" cmpd="sng" algn="ctr">
+                      <a:solidFill>
+                        <a:srgbClr val="E1E4E8"/>
+                      </a:solidFill>
+                      <a:prstDash val="solid"/>
+                      <a:round/>
+                      <a:headEnd type="none" w="med" len="med"/>
+                      <a:tailEnd type="none" w="med" len="med"/>
+                    </a:lnR>
+                    <a:lnT w="9525" cap="flat" cmpd="sng" algn="ctr">
+                      <a:solidFill>
+                        <a:srgbClr val="E1E4E8"/>
+                      </a:solidFill>
+                      <a:prstDash val="solid"/>
+                      <a:round/>
+                      <a:headEnd type="none" w="med" len="med"/>
+                      <a:tailEnd type="none" w="med" len="med"/>
+                    </a:lnT>
+                    <a:lnB w="9525" cap="flat" cmpd="sng" algn="ctr">
+                      <a:solidFill>
+                        <a:srgbClr val="E1E4E8"/>
+                      </a:solidFill>
+                      <a:prstDash val="solid"/>
+                      <a:round/>
+                      <a:headEnd type="none" w="med" len="med"/>
+                      <a:tailEnd type="none" w="med" len="med"/>
+                    </a:lnB>
+                  </a:tcPr>
+                </a:tc>
+                <a:tc>
+                  <a:txBody>
+                    <a:bodyPr/>
+                    <a:lstStyle/>
+                    <a:p>
+                      <a:pPr indent="0" marL="0">
+                        <a:buNone/>
+                      </a:pPr>
+                      <a:r>
+                        <a:rPr lang="en-US" sz="1400" dirty="0">
+                          <a:solidFill>
+                            <a:srgbClr val="1F2429"/>
+                          </a:solidFill>
+                          <a:latin typeface="Calibri" pitchFamily="34" charset="0"/>
+                          <a:ea typeface="Calibri" pitchFamily="34" charset="-122"/>
+                          <a:cs typeface="Calibri" pitchFamily="34" charset="-120"/>
+                        </a:rPr>
+                        <a:t>Library and Finance see it immediately</a:t>
+                      </a:r>
+                      <a:endParaRPr lang="en-US" sz="1400" dirty="0">
+                        <a:latin typeface="Calibri" charset="0"/>
+                        <a:ea typeface="Calibri" charset="0"/>
+                        <a:cs typeface="Calibri" charset="0"/>
+                      </a:endParaRPr>
+                    </a:p>
+                  </a:txBody>
+                  <a:tcPr marL="91440" marR="91440" marT="45720" marB="45720" anchor="ctr">
+                    <a:lnL w="9525" cap="flat" cmpd="sng" algn="ctr">
+                      <a:solidFill>
+                        <a:srgbClr val="E1E4E8"/>
+                      </a:solidFill>
+                      <a:prstDash val="solid"/>
+                      <a:round/>
+                      <a:headEnd type="none" w="med" len="med"/>
+                      <a:tailEnd type="none" w="med" len="med"/>
+                    </a:lnL>
+                    <a:lnR w="9525" cap="flat" cmpd="sng" algn="ctr">
+                      <a:solidFill>
+                        <a:srgbClr val="E1E4E8"/>
+                      </a:solidFill>
+                      <a:prstDash val="solid"/>
+                      <a:round/>
+                      <a:headEnd type="none" w="med" len="med"/>
+                      <a:tailEnd type="none" w="med" len="med"/>
+                    </a:lnR>
+                    <a:lnT w="9525" cap="flat" cmpd="sng" algn="ctr">
+                      <a:solidFill>
+                        <a:srgbClr val="E1E4E8"/>
+                      </a:solidFill>
+                      <a:prstDash val="solid"/>
+                      <a:round/>
+                      <a:headEnd type="none" w="med" len="med"/>
+                      <a:tailEnd type="none" w="med" len="med"/>
+                    </a:lnT>
+                    <a:lnB w="9525" cap="flat" cmpd="sng" algn="ctr">
+                      <a:solidFill>
+                        <a:srgbClr val="E1E4E8"/>
+                      </a:solidFill>
+                      <a:prstDash val="solid"/>
+                      <a:round/>
+                      <a:headEnd type="none" w="med" len="med"/>
+                      <a:tailEnd type="none" w="med" len="med"/>
+                    </a:lnB>
+                  </a:tcPr>
+                </a:tc>
+              </a:tr>
+              <a:tr h="444137">
+                <a:tc>
+                  <a:txBody>
+                    <a:bodyPr/>
+                    <a:lstStyle/>
+                    <a:p>
+                      <a:pPr indent="0" marL="0">
+                        <a:buNone/>
+                      </a:pPr>
+                      <a:r>
+                        <a:rPr lang="en-US" sz="1400" dirty="0">
+                          <a:solidFill>
+                            <a:srgbClr val="1F2429"/>
+                          </a:solidFill>
+                          <a:latin typeface="Calibri" pitchFamily="34" charset="0"/>
+                          <a:ea typeface="Calibri" pitchFamily="34" charset="-122"/>
+                          <a:cs typeface="Calibri" pitchFamily="34" charset="-120"/>
+                        </a:rPr>
+                        <a:t>Cross-office query</a:t>
+                      </a:r>
+                      <a:endParaRPr lang="en-US" sz="1400" dirty="0">
+                        <a:latin typeface="Calibri" charset="0"/>
+                        <a:ea typeface="Calibri" charset="0"/>
+                        <a:cs typeface="Calibri" charset="0"/>
+                      </a:endParaRPr>
+                    </a:p>
+                  </a:txBody>
+                  <a:tcPr marL="91440" marR="91440" marT="45720" marB="45720" anchor="ctr">
+                    <a:lnL w="9525" cap="flat" cmpd="sng" algn="ctr">
+                      <a:solidFill>
+                        <a:srgbClr val="E1E4E8"/>
+                      </a:solidFill>
+                      <a:prstDash val="solid"/>
+                      <a:round/>
+                      <a:headEnd type="none" w="med" len="med"/>
+                      <a:tailEnd type="none" w="med" len="med"/>
+                    </a:lnL>
+                    <a:lnR w="9525" cap="flat" cmpd="sng" algn="ctr">
+                      <a:solidFill>
+                        <a:srgbClr val="E1E4E8"/>
+                      </a:solidFill>
+                      <a:prstDash val="solid"/>
+                      <a:round/>
+                      <a:headEnd type="none" w="med" len="med"/>
+                      <a:tailEnd type="none" w="med" len="med"/>
+                    </a:lnR>
+                    <a:lnT w="9525" cap="flat" cmpd="sng" algn="ctr">
+                      <a:solidFill>
+                        <a:srgbClr val="E1E4E8"/>
+                      </a:solidFill>
+                      <a:prstDash val="solid"/>
+                      <a:round/>
+                      <a:headEnd type="none" w="med" len="med"/>
+                      <a:tailEnd type="none" w="med" len="med"/>
+                    </a:lnT>
+                    <a:lnB w="9525" cap="flat" cmpd="sng" algn="ctr">
+                      <a:solidFill>
+                        <a:srgbClr val="E1E4E8"/>
+                      </a:solidFill>
+                      <a:prstDash val="solid"/>
+                      <a:round/>
+                      <a:headEnd type="none" w="med" len="med"/>
+                      <a:tailEnd type="none" w="med" len="med"/>
+                    </a:lnB>
+                  </a:tcPr>
+                </a:tc>
+                <a:tc>
+                  <a:txBody>
+                    <a:bodyPr/>
+                    <a:lstStyle/>
+                    <a:p>
+                      <a:pPr indent="0" marL="0">
+                        <a:buNone/>
+                      </a:pPr>
+                      <a:r>
+                        <a:rPr lang="en-US" sz="1400" dirty="0">
+                          <a:solidFill>
+                            <a:srgbClr val="1F2429"/>
+                          </a:solidFill>
+                          <a:latin typeface="Calibri" pitchFamily="34" charset="0"/>
+                          <a:ea typeface="Calibri" pitchFamily="34" charset="-122"/>
+                          <a:cs typeface="Calibri" pitchFamily="34" charset="-120"/>
+                        </a:rPr>
+                        <a:t>Fine AND balance, one query</a:t>
+                      </a:r>
+                      <a:endParaRPr lang="en-US" sz="1400" dirty="0">
+                        <a:latin typeface="Calibri" charset="0"/>
+                        <a:ea typeface="Calibri" charset="0"/>
+                        <a:cs typeface="Calibri" charset="0"/>
+                      </a:endParaRPr>
+                    </a:p>
+                  </a:txBody>
+                  <a:tcPr marL="91440" marR="91440" marT="45720" marB="45720" anchor="ctr">
+                    <a:lnL w="9525" cap="flat" cmpd="sng" algn="ctr">
+                      <a:solidFill>
+                        <a:srgbClr val="E1E4E8"/>
+                      </a:solidFill>
+                      <a:prstDash val="solid"/>
+                      <a:round/>
+                      <a:headEnd type="none" w="med" len="med"/>
+                      <a:tailEnd type="none" w="med" len="med"/>
+                    </a:lnL>
+                    <a:lnR w="9525" cap="flat" cmpd="sng" algn="ctr">
+                      <a:solidFill>
+                        <a:srgbClr val="E1E4E8"/>
+                      </a:solidFill>
+                      <a:prstDash val="solid"/>
+                      <a:round/>
+                      <a:headEnd type="none" w="med" len="med"/>
+                      <a:tailEnd type="none" w="med" len="med"/>
+                    </a:lnR>
+                    <a:lnT w="9525" cap="flat" cmpd="sng" algn="ctr">
+                      <a:solidFill>
+                        <a:srgbClr val="E1E4E8"/>
+                      </a:solidFill>
+                      <a:prstDash val="solid"/>
+                      <a:round/>
+                      <a:headEnd type="none" w="med" len="med"/>
+                      <a:tailEnd type="none" w="med" len="med"/>
+                    </a:lnT>
+                    <a:lnB w="9525" cap="flat" cmpd="sng" algn="ctr">
+                      <a:solidFill>
+                        <a:srgbClr val="E1E4E8"/>
+                      </a:solidFill>
+                      <a:prstDash val="solid"/>
+                      <a:round/>
+                      <a:headEnd type="none" w="med" len="med"/>
+                      <a:tailEnd type="none" w="med" len="med"/>
+                    </a:lnB>
+                  </a:tcPr>
+                </a:tc>
+                <a:tc>
+                  <a:txBody>
+                    <a:bodyPr/>
+                    <a:lstStyle/>
+                    <a:p>
+                      <a:pPr indent="0" marL="0">
+                        <a:buNone/>
+                      </a:pPr>
+                      <a:r>
+                        <a:rPr lang="en-US" sz="1400" dirty="0">
+                          <a:solidFill>
+                            <a:srgbClr val="1F2429"/>
+                          </a:solidFill>
+                          <a:latin typeface="Calibri" pitchFamily="34" charset="0"/>
+                          <a:ea typeface="Calibri" pitchFamily="34" charset="-122"/>
+                          <a:cs typeface="Calibri" pitchFamily="34" charset="-120"/>
+                        </a:rPr>
+                        <a:t>Joins on RegNo — no new program needed</a:t>
+                      </a:r>
+                      <a:endParaRPr lang="en-US" sz="1400" dirty="0">
+                        <a:latin typeface="Calibri" charset="0"/>
+                        <a:ea typeface="Calibri" charset="0"/>
+                        <a:cs typeface="Calibri" charset="0"/>
+                      </a:endParaRPr>
+                    </a:p>
+                  </a:txBody>
+                  <a:tcPr marL="91440" marR="91440" marT="45720" marB="45720" anchor="ctr">
+                    <a:lnL w="9525" cap="flat" cmpd="sng" algn="ctr">
+                      <a:solidFill>
+                        <a:srgbClr val="E1E4E8"/>
+                      </a:solidFill>
+                      <a:prstDash val="solid"/>
+                      <a:round/>
+                      <a:headEnd type="none" w="med" len="med"/>
+                      <a:tailEnd type="none" w="med" len="med"/>
+                    </a:lnL>
+                    <a:lnR w="9525" cap="flat" cmpd="sng" algn="ctr">
+                      <a:solidFill>
+                        <a:srgbClr val="E1E4E8"/>
+                      </a:solidFill>
+                      <a:prstDash val="solid"/>
+                      <a:round/>
+                      <a:headEnd type="none" w="med" len="med"/>
+                      <a:tailEnd type="none" w="med" len="med"/>
+                    </a:lnR>
+                    <a:lnT w="9525" cap="flat" cmpd="sng" algn="ctr">
+                      <a:solidFill>
+                        <a:srgbClr val="E1E4E8"/>
+                      </a:solidFill>
+                      <a:prstDash val="solid"/>
+                      <a:round/>
+                      <a:headEnd type="none" w="med" len="med"/>
+                      <a:tailEnd type="none" w="med" len="med"/>
+                    </a:lnT>
+                    <a:lnB w="9525" cap="flat" cmpd="sng" algn="ctr">
+                      <a:solidFill>
+                        <a:srgbClr val="E1E4E8"/>
+                      </a:solidFill>
+                      <a:prstDash val="solid"/>
+                      <a:round/>
+                      <a:headEnd type="none" w="med" len="med"/>
+                      <a:tailEnd type="none" w="med" len="med"/>
+                    </a:lnB>
+                  </a:tcPr>
+                </a:tc>
+              </a:tr>
+              <a:tr h="444137">
+                <a:tc>
+                  <a:txBody>
+                    <a:bodyPr/>
+                    <a:lstStyle/>
+                    <a:p>
+                      <a:pPr indent="0" marL="0">
+                        <a:buNone/>
+                      </a:pPr>
+                      <a:r>
+                        <a:rPr lang="en-US" sz="1400" dirty="0">
+                          <a:solidFill>
+                            <a:srgbClr val="1F2429"/>
+                          </a:solidFill>
+                          <a:latin typeface="Calibri" pitchFamily="34" charset="0"/>
+                          <a:ea typeface="Calibri" pitchFamily="34" charset="-122"/>
+                          <a:cs typeface="Calibri" pitchFamily="34" charset="-120"/>
+                        </a:rPr>
+                        <a:t>Compare to before</a:t>
+                      </a:r>
+                      <a:endParaRPr lang="en-US" sz="1400" dirty="0">
+                        <a:latin typeface="Calibri" charset="0"/>
+                        <a:ea typeface="Calibri" charset="0"/>
+                        <a:cs typeface="Calibri" charset="0"/>
+                      </a:endParaRPr>
+                    </a:p>
+                  </a:txBody>
+                  <a:tcPr marL="91440" marR="91440" marT="45720" marB="45720" anchor="ctr">
+                    <a:lnL w="9525" cap="flat" cmpd="sng" algn="ctr">
+                      <a:solidFill>
+                        <a:srgbClr val="E1E4E8"/>
+                      </a:solidFill>
+                      <a:prstDash val="solid"/>
+                      <a:round/>
+                      <a:headEnd type="none" w="med" len="med"/>
+                      <a:tailEnd type="none" w="med" len="med"/>
+                    </a:lnL>
+                    <a:lnR w="9525" cap="flat" cmpd="sng" algn="ctr">
+                      <a:solidFill>
+                        <a:srgbClr val="E1E4E8"/>
+                      </a:solidFill>
+                      <a:prstDash val="solid"/>
+                      <a:round/>
+                      <a:headEnd type="none" w="med" len="med"/>
+                      <a:tailEnd type="none" w="med" len="med"/>
+                    </a:lnR>
+                    <a:lnT w="9525" cap="flat" cmpd="sng" algn="ctr">
+                      <a:solidFill>
+                        <a:srgbClr val="E1E4E8"/>
+                      </a:solidFill>
+                      <a:prstDash val="solid"/>
+                      <a:round/>
+                      <a:headEnd type="none" w="med" len="med"/>
+                      <a:tailEnd type="none" w="med" len="med"/>
+                    </a:lnT>
+                    <a:lnB w="9525" cap="flat" cmpd="sng" algn="ctr">
+                      <a:solidFill>
+                        <a:srgbClr val="E1E4E8"/>
+                      </a:solidFill>
+                      <a:prstDash val="solid"/>
+                      <a:round/>
+                      <a:headEnd type="none" w="med" len="med"/>
+                      <a:tailEnd type="none" w="med" len="med"/>
+                    </a:lnB>
+                  </a:tcPr>
+                </a:tc>
+                <a:tc>
+                  <a:txBody>
+                    <a:bodyPr/>
+                    <a:lstStyle/>
+                    <a:p>
+                      <a:pPr indent="0" marL="0">
+                        <a:buNone/>
+                      </a:pPr>
+                      <a:r>
+                        <a:rPr lang="en-US" sz="1400" dirty="0">
+                          <a:solidFill>
+                            <a:srgbClr val="1F2429"/>
+                          </a:solidFill>
+                          <a:latin typeface="Calibri" pitchFamily="34" charset="0"/>
+                          <a:ea typeface="Calibri" pitchFamily="34" charset="-122"/>
+                          <a:cs typeface="Calibri" pitchFamily="34" charset="-120"/>
+                        </a:rPr>
+                        <a:t>Same question, file-based world</a:t>
+                      </a:r>
+                      <a:endParaRPr lang="en-US" sz="1400" dirty="0">
+                        <a:latin typeface="Calibri" charset="0"/>
+                        <a:ea typeface="Calibri" charset="0"/>
+                        <a:cs typeface="Calibri" charset="0"/>
+                      </a:endParaRPr>
+                    </a:p>
+                  </a:txBody>
+                  <a:tcPr marL="91440" marR="91440" marT="45720" marB="45720" anchor="ctr">
+                    <a:lnL w="9525" cap="flat" cmpd="sng" algn="ctr">
+                      <a:solidFill>
+                        <a:srgbClr val="E1E4E8"/>
+                      </a:solidFill>
+                      <a:prstDash val="solid"/>
+                      <a:round/>
+                      <a:headEnd type="none" w="med" len="med"/>
+                      <a:tailEnd type="none" w="med" len="med"/>
+                    </a:lnL>
+                    <a:lnR w="9525" cap="flat" cmpd="sng" algn="ctr">
+                      <a:solidFill>
+                        <a:srgbClr val="E1E4E8"/>
+                      </a:solidFill>
+                      <a:prstDash val="solid"/>
+                      <a:round/>
+                      <a:headEnd type="none" w="med" len="med"/>
+                      <a:tailEnd type="none" w="med" len="med"/>
+                    </a:lnR>
+                    <a:lnT w="9525" cap="flat" cmpd="sng" algn="ctr">
+                      <a:solidFill>
+                        <a:srgbClr val="E1E4E8"/>
+                      </a:solidFill>
+                      <a:prstDash val="solid"/>
+                      <a:round/>
+                      <a:headEnd type="none" w="med" len="med"/>
+                      <a:tailEnd type="none" w="med" len="med"/>
+                    </a:lnT>
+                    <a:lnB w="9525" cap="flat" cmpd="sng" algn="ctr">
+                      <a:solidFill>
+                        <a:srgbClr val="E1E4E8"/>
+                      </a:solidFill>
+                      <a:prstDash val="solid"/>
+                      <a:round/>
+                      <a:headEnd type="none" w="med" len="med"/>
+                      <a:tailEnd type="none" w="med" len="med"/>
+                    </a:lnB>
+                  </a:tcPr>
+                </a:tc>
+                <a:tc>
+                  <a:txBody>
+                    <a:bodyPr/>
+                    <a:lstStyle/>
+                    <a:p>
+                      <a:pPr indent="0" marL="0">
+                        <a:buNone/>
+                      </a:pPr>
+                      <a:r>
+                        <a:rPr lang="en-US" sz="1400" dirty="0">
+                          <a:solidFill>
+                            <a:srgbClr val="1F2429"/>
+                          </a:solidFill>
+                          <a:latin typeface="Calibri" pitchFamily="34" charset="0"/>
+                          <a:ea typeface="Calibri" pitchFamily="34" charset="-122"/>
+                          <a:cs typeface="Calibri" pitchFamily="34" charset="-120"/>
+                        </a:rPr>
+                        <a:t>Needed a brand-new program from scratch</a:t>
+                      </a:r>
+                      <a:endParaRPr lang="en-US" sz="1400" dirty="0">
+                        <a:latin typeface="Calibri" charset="0"/>
+                        <a:ea typeface="Calibri" charset="0"/>
+                        <a:cs typeface="Calibri" charset="0"/>
+                      </a:endParaRPr>
+                    </a:p>
+                  </a:txBody>
+                  <a:tcPr marL="91440" marR="91440" marT="45720" marB="45720" anchor="ctr">
+                    <a:lnL w="9525" cap="flat" cmpd="sng" algn="ctr">
+                      <a:solidFill>
+                        <a:srgbClr val="E1E4E8"/>
+                      </a:solidFill>
+                      <a:prstDash val="solid"/>
+                      <a:round/>
+                      <a:headEnd type="none" w="med" len="med"/>
+                      <a:tailEnd type="none" w="med" len="med"/>
+                    </a:lnL>
+                    <a:lnR w="9525" cap="flat" cmpd="sng" algn="ctr">
+                      <a:solidFill>
+                        <a:srgbClr val="E1E4E8"/>
+                      </a:solidFill>
+                      <a:prstDash val="solid"/>
+                      <a:round/>
+                      <a:headEnd type="none" w="med" len="med"/>
+                      <a:tailEnd type="none" w="med" len="med"/>
+                    </a:lnR>
+                    <a:lnT w="9525" cap="flat" cmpd="sng" algn="ctr">
+                      <a:solidFill>
+                        <a:srgbClr val="E1E4E8"/>
+                      </a:solidFill>
+                      <a:prstDash val="solid"/>
+                      <a:round/>
+                      <a:headEnd type="none" w="med" len="med"/>
+                      <a:tailEnd type="none" w="med" len="med"/>
+                    </a:lnT>
+                    <a:lnB w="9525" cap="flat" cmpd="sng" algn="ctr">
+                      <a:solidFill>
+                        <a:srgbClr val="E1E4E8"/>
+                      </a:solidFill>
+                      <a:prstDash val="solid"/>
+                      <a:round/>
+                      <a:headEnd type="none" w="med" len="med"/>
+                      <a:tailEnd type="none" w="med" len="med"/>
+                    </a:lnB>
+                  </a:tcPr>
+                </a:tc>
+              </a:tr>
+            </a:tbl>
+          </a:graphicData>
+        </a:graphic>
+      </p:graphicFrame>
+      <p:sp>
+        <p:nvSpPr>
+          <p:cNvPr id="5" name="Shape 2"/>
+          <p:cNvSpPr/>
+          <p:nvPr/>
+        </p:nvSpPr>
+        <p:spPr>
+          <a:xfrm>
+            <a:off x="640080" y="4617720"/>
+            <a:ext cx="10881360" cy="1417320"/>
+          </a:xfrm>
+          <a:prstGeom prst="roundRect">
+            <a:avLst>
+              <a:gd name="adj" fmla="val 5161"/>
+            </a:avLst>
+          </a:prstGeom>
+          <a:solidFill>
+            <a:srgbClr val="F7F8F9"/>
+          </a:solidFill>
+          <a:ln w="12700">
+            <a:solidFill>
+              <a:srgbClr val="E8A33D"/>
+            </a:solidFill>
+            <a:prstDash val="solid"/>
+          </a:ln>
+        </p:spPr>
+      </p:sp>
+      <p:sp>
+        <p:nvSpPr>
+          <p:cNvPr id="6" name="Text 3"/>
+          <p:cNvSpPr txBox="1"/>
+          <p:nvPr/>
+        </p:nvSpPr>
+        <p:spPr>
+          <a:xfrm>
+            <a:off x="868680" y="4754880"/>
+            <a:ext cx="10424160" cy="1143000"/>
+          </a:xfrm>
+          <a:prstGeom prst="rect">
+            <a:avLst/>
+          </a:prstGeom>
+          <a:noFill/>
+          <a:ln/>
+        </p:spPr>
+        <p:txBody>
+          <a:bodyPr wrap="square" lIns="0" tIns="0" rIns="0" bIns="0" rtlCol="0" anchor="t"/>
+          <a:lstStyle/>
+          <a:p>
+            <a:pPr indent="0" marL="0">
+              <a:buNone/>
+            </a:pPr>
+            <a:r>
+              <a:rPr lang="en-US" sz="1800" b="1" dirty="0">
+                <a:solidFill>
+                  <a:srgbClr val="1F2429"/>
+                </a:solidFill>
+                <a:latin typeface="Calibri" pitchFamily="34" charset="0"/>
+                <a:ea typeface="Calibri" pitchFamily="34" charset="-122"/>
+                <a:cs typeface="Calibri" pitchFamily="34" charset="-120"/>
+              </a:rPr>
+              <a:t>Note what disappeared:  </a:t>
+            </a:r>
+            <a:pPr indent="0" marL="0">
+              <a:buNone/>
+            </a:pPr>
+            <a:r>
+              <a:rPr lang="en-US" sz="1800" dirty="0">
+                <a:solidFill>
+                  <a:srgbClr val="1F2429"/>
+                </a:solidFill>
+                <a:latin typeface="Calibri" pitchFamily="34" charset="0"/>
+                <a:ea typeface="Calibri" pitchFamily="34" charset="-122"/>
+                <a:cs typeface="Calibri" pitchFamily="34" charset="-120"/>
+              </a:rPr>
+              <a:t>no duplicate Name or Address columns anywhere outside the Student table — redundancy is gone by construction, not by discipline.</a:t>
+            </a:r>
+            <a:endParaRPr lang="en-US" sz="1800" dirty="0"/>
+          </a:p>
+        </p:txBody>
+      </p:sp>
+    </p:spTree>
+  </p:cSld>
+  <p:clrMapOvr>
+    <a:masterClrMapping/>
+  </p:clrMapOvr>
+</p:sld>
+</file>
+
+<file path=ppt/slides/slide2.xml><?xml version="1.0" encoding="utf-8"?>
+<p:sld xmlns:a="http://schemas.openxmlformats.org/drawingml/2006/main" xmlns:r="http://schemas.openxmlformats.org/officeDocument/2006/relationships" xmlns:p="http://schemas.openxmlformats.org/presentationml/2006/main">
+  <p:cSld name="Slide 2">
+    <p:bg>
+      <p:bgPr>
+        <a:solidFill>
+          <a:srgbClr val="F7F8F9"/>
+        </a:solidFill>
+      </p:bgPr>
+    </p:bg>
+    <p:spTree>
+      <p:nvGrpSpPr>
+        <p:cNvPr id="1" name=""/>
+        <p:cNvGrpSpPr/>
+        <p:nvPr/>
+      </p:nvGrpSpPr>
+      <p:grpSpPr>
+        <a:xfrm>
+          <a:off x="0" y="0"/>
+          <a:ext cx="0" cy="0"/>
+          <a:chOff x="0" y="0"/>
+          <a:chExt cx="0" cy="0"/>
+        </a:xfrm>
+      </p:grpSpPr>
+      <p:sp>
+        <p:nvSpPr>
+          <p:cNvPr id="2" name="Text 0"/>
+          <p:cNvSpPr txBox="1"/>
+          <p:nvPr/>
+        </p:nvSpPr>
+        <p:spPr>
+          <a:xfrm>
+            <a:off x="548640" y="365760"/>
+            <a:ext cx="11064240" cy="731520"/>
+          </a:xfrm>
+          <a:prstGeom prst="rect">
+            <a:avLst/>
+          </a:prstGeom>
+          <a:noFill/>
+          <a:ln/>
+        </p:spPr>
+        <p:txBody>
+          <a:bodyPr wrap="square" lIns="0" tIns="0" rIns="0" bIns="0" rtlCol="0" anchor="ctr"/>
+          <a:lstStyle/>
+          <a:p>
+            <a:pPr indent="0" marL="0">
+              <a:buNone/>
+            </a:pPr>
+            <a:r>
+              <a:rPr lang="en-US" sz="2800" b="1" dirty="0">
+                <a:solidFill>
+                  <a:srgbClr val="1F2429"/>
+                </a:solidFill>
+                <a:latin typeface="Calibri" pitchFamily="34" charset="0"/>
+                <a:ea typeface="Calibri" pitchFamily="34" charset="-122"/>
+                <a:cs typeface="Calibri" pitchFamily="34" charset="-120"/>
+              </a:rPr>
+              <a:t>In This Lecture</a:t>
+            </a:r>
+            <a:endParaRPr lang="en-US" sz="2800" dirty="0"/>
+          </a:p>
+        </p:txBody>
+      </p:sp>
+      <p:sp>
+        <p:nvSpPr>
+          <p:cNvPr id="3" name="Text 1"/>
+          <p:cNvSpPr txBox="1"/>
+          <p:nvPr/>
+        </p:nvSpPr>
+        <p:spPr>
+          <a:xfrm>
+            <a:off x="9951415" y="6455664"/>
+            <a:ext cx="2011680" cy="292608"/>
+          </a:xfrm>
+          <a:prstGeom prst="rect">
+            <a:avLst/>
+          </a:prstGeom>
+          <a:noFill/>
+          <a:ln/>
+        </p:spPr>
+        <p:txBody>
+          <a:bodyPr wrap="square" lIns="0" tIns="0" rIns="0" bIns="0" rtlCol="0" anchor="ctr"/>
+          <a:lstStyle/>
+          <a:p>
+            <a:pPr algn="r" indent="0" marL="0">
+              <a:buNone/>
+            </a:pPr>
+            <a:r>
+              <a:rPr lang="en-US" sz="1200" u="sng" dirty="0">
+                <a:solidFill>
+                  <a:srgbClr val="8A939B"/>
+                </a:solidFill>
+                <a:latin typeface="Calibri" pitchFamily="34" charset="0"/>
+                <a:ea typeface="Calibri" pitchFamily="34" charset="-122"/>
+                <a:cs typeface="Calibri" pitchFamily="34" charset="-120"/>
+                <a:hlinkClick r:id="rId1" invalidUrl="" action="" tgtFrame="" tooltip="" history="1" highlightClick="0" endSnd="0">
+                  <a:extLst>
+                    <a:ext uri="{A12FA001-AC4F-418D-AE19-62706E023703}">
+                      <ahyp:hlinkClr xmlns:ahyp="http://schemas.microsoft.com/office/drawing/2018/hyperlinkcolor" val="tx"/>
+                    </a:ext>
+                  </a:extLst>
+                </a:hlinkClick>
+              </a:rPr>
+              <a:t>cuinotes.com</a:t>
+            </a:r>
+            <a:pPr algn="r" indent="0" marL="0">
+              <a:buNone/>
+            </a:pPr>
+            <a:r>
+              <a:rPr lang="en-US" sz="1200" dirty="0">
+                <a:solidFill>
+                  <a:srgbClr val="8A939B"/>
+                </a:solidFill>
+                <a:latin typeface="Calibri" pitchFamily="34" charset="0"/>
+                <a:ea typeface="Calibri" pitchFamily="34" charset="-122"/>
+                <a:cs typeface="Calibri" pitchFamily="34" charset="-120"/>
+              </a:rPr>
+              <a:t>  ·  2</a:t>
+            </a:r>
+            <a:endParaRPr lang="en-US" sz="1200" dirty="0"/>
+          </a:p>
+        </p:txBody>
+      </p:sp>
+      <p:sp>
+        <p:nvSpPr>
+          <p:cNvPr id="4" name="Text 2"/>
+          <p:cNvSpPr txBox="1"/>
+          <p:nvPr/>
+        </p:nvSpPr>
+        <p:spPr>
+          <a:xfrm>
+            <a:off x="640080" y="1371600"/>
+            <a:ext cx="10332720" cy="4846320"/>
+          </a:xfrm>
+          <a:prstGeom prst="rect">
+            <a:avLst/>
+          </a:prstGeom>
+          <a:noFill/>
+          <a:ln/>
+        </p:spPr>
+        <p:txBody>
+          <a:bodyPr wrap="square" lIns="0" tIns="0" rIns="0" bIns="0" rtlCol="0" anchor="t"/>
+          <a:lstStyle/>
+          <a:p>
+            <a:pPr marL="342900" indent="-342900">
+              <a:spcAft>
+                <a:spcPts val="1800"/>
+              </a:spcAft>
+              <a:buSzPct val="100000"/>
+              <a:buChar char="•"/>
+            </a:pPr>
+            <a:r>
+              <a:rPr lang="en-US" sz="1800" dirty="0">
+                <a:solidFill>
+                  <a:srgbClr val="1F2429"/>
+                </a:solidFill>
+                <a:latin typeface="Calibri" pitchFamily="34" charset="0"/>
+                <a:ea typeface="Calibri" pitchFamily="34" charset="-122"/>
+                <a:cs typeface="Calibri" pitchFamily="34" charset="-120"/>
+              </a:rPr>
+              <a:t>What a database is, and how it differs from an information system built around one</a:t>
+            </a:r>
+            <a:endParaRPr lang="en-US" sz="1800" dirty="0"/>
+          </a:p>
+          <a:p>
+            <a:pPr marL="342900" indent="-342900">
+              <a:spcAft>
+                <a:spcPts val="1800"/>
+              </a:spcAft>
+              <a:buSzPct val="100000"/>
+              <a:buChar char="•"/>
+            </a:pPr>
+            <a:r>
+              <a:rPr lang="en-US" sz="1800" dirty="0">
+                <a:solidFill>
+                  <a:srgbClr val="1F2429"/>
+                </a:solidFill>
+                <a:latin typeface="Calibri" pitchFamily="34" charset="0"/>
+                <a:ea typeface="Calibri" pitchFamily="34" charset="-122"/>
+                <a:cs typeface="Calibri" pitchFamily="34" charset="-120"/>
+              </a:rPr>
+              <a:t>Common categories of database applications you already use</a:t>
+            </a:r>
+            <a:endParaRPr lang="en-US" sz="1800" dirty="0"/>
+          </a:p>
+          <a:p>
+            <a:pPr marL="342900" indent="-342900">
+              <a:spcAft>
+                <a:spcPts val="1800"/>
+              </a:spcAft>
+              <a:buSzPct val="100000"/>
+              <a:buChar char="•"/>
+            </a:pPr>
+            <a:r>
+              <a:rPr lang="en-US" sz="1800" dirty="0">
+                <a:solidFill>
+                  <a:srgbClr val="1F2429"/>
+                </a:solidFill>
+                <a:latin typeface="Calibri" pitchFamily="34" charset="0"/>
+                <a:ea typeface="Calibri" pitchFamily="34" charset="-122"/>
+                <a:cs typeface="Calibri" pitchFamily="34" charset="-120"/>
+              </a:rPr>
+              <a:t>How data management evolved from manual filing to file-based systems to databases</a:t>
+            </a:r>
+            <a:endParaRPr lang="en-US" sz="1800" dirty="0"/>
+          </a:p>
+          <a:p>
+            <a:pPr marL="342900" indent="-342900">
+              <a:spcAft>
+                <a:spcPts val="1800"/>
+              </a:spcAft>
+              <a:buSzPct val="100000"/>
+              <a:buChar char="•"/>
+            </a:pPr>
+            <a:r>
+              <a:rPr lang="en-US" sz="1800" dirty="0">
+                <a:solidFill>
+                  <a:srgbClr val="1F2429"/>
+                </a:solidFill>
+                <a:latin typeface="Calibri" pitchFamily="34" charset="0"/>
+                <a:ea typeface="Calibri" pitchFamily="34" charset="-122"/>
+                <a:cs typeface="Calibri" pitchFamily="34" charset="-120"/>
+              </a:rPr>
+              <a:t>File-based systems: how they worked, and the problems that forced a rethink</a:t>
+            </a:r>
+            <a:endParaRPr lang="en-US" sz="1800" dirty="0"/>
+          </a:p>
+          <a:p>
+            <a:pPr marL="342900" indent="-342900">
+              <a:spcAft>
+                <a:spcPts val="1800"/>
+              </a:spcAft>
+              <a:buSzPct val="100000"/>
+              <a:buChar char="•"/>
+            </a:pPr>
+            <a:r>
+              <a:rPr lang="en-US" sz="1800" dirty="0">
+                <a:solidFill>
+                  <a:srgbClr val="1F2429"/>
+                </a:solidFill>
+                <a:latin typeface="Calibri" pitchFamily="34" charset="0"/>
+                <a:ea typeface="Calibri" pitchFamily="34" charset="-122"/>
+                <a:cs typeface="Calibri" pitchFamily="34" charset="-120"/>
+              </a:rPr>
+              <a:t>The database approach: what changes, concretely, when data is centralized</a:t>
+            </a:r>
+            <a:endParaRPr lang="en-US" sz="1800" dirty="0"/>
+          </a:p>
+          <a:p>
+            <a:pPr marL="342900" indent="-342900">
+              <a:spcAft>
+                <a:spcPts val="1800"/>
+              </a:spcAft>
+              <a:buSzPct val="100000"/>
+              <a:buChar char="•"/>
+            </a:pPr>
+            <a:r>
+              <a:rPr lang="en-US" sz="1800" dirty="0">
+                <a:solidFill>
+                  <a:srgbClr val="1F2429"/>
+                </a:solidFill>
+                <a:latin typeface="Calibri" pitchFamily="34" charset="0"/>
+                <a:ea typeface="Calibri" pitchFamily="34" charset="-122"/>
+                <a:cs typeface="Calibri" pitchFamily="34" charset="-120"/>
+              </a:rPr>
+              <a:t>The advantages a DBMS gives you — and the real costs it imposes in return</a:t>
+            </a:r>
+            <a:endParaRPr lang="en-US" sz="1800" dirty="0"/>
+          </a:p>
+        </p:txBody>
+      </p:sp>
+    </p:spTree>
+  </p:cSld>
+  <p:clrMapOvr>
+    <a:masterClrMapping/>
+  </p:clrMapOvr>
+</p:sld>
+</file>
+
+<file path=ppt/slides/slide20.xml><?xml version="1.0" encoding="utf-8"?>
+<p:sld xmlns:a="http://schemas.openxmlformats.org/drawingml/2006/main" xmlns:r="http://schemas.openxmlformats.org/officeDocument/2006/relationships" xmlns:p="http://schemas.openxmlformats.org/presentationml/2006/main">
+  <p:cSld name="Slide 2">
+    <p:bg>
+      <p:bgPr>
+        <a:solidFill>
+          <a:srgbClr val="F7F8F9"/>
+        </a:solidFill>
+      </p:bgPr>
+    </p:bg>
+    <p:spTree>
+      <p:nvGrpSpPr>
+        <p:cNvPr id="1" name=""/>
+        <p:cNvGrpSpPr/>
+        <p:nvPr/>
+      </p:nvGrpSpPr>
+      <p:grpSpPr>
+        <a:xfrm>
+          <a:off x="0" y="0"/>
+          <a:ext cx="0" cy="0"/>
+          <a:chOff x="0" y="0"/>
+          <a:chExt cx="0" cy="0"/>
+        </a:xfrm>
+      </p:grpSpPr>
+      <p:sp>
+        <p:nvSpPr>
+          <p:cNvPr id="2" name="Text 0"/>
+          <p:cNvSpPr txBox="1"/>
+          <p:nvPr/>
+        </p:nvSpPr>
+        <p:spPr>
+          <a:xfrm>
+            <a:off x="548640" y="365760"/>
+            <a:ext cx="11064240" cy="731520"/>
+          </a:xfrm>
+          <a:prstGeom prst="rect">
+            <a:avLst/>
+          </a:prstGeom>
+          <a:noFill/>
+          <a:ln/>
+        </p:spPr>
+        <p:txBody>
+          <a:bodyPr wrap="square" lIns="0" tIns="0" rIns="0" bIns="0" rtlCol="0" anchor="ctr"/>
+          <a:lstStyle/>
+          <a:p>
+            <a:pPr indent="0" marL="0">
+              <a:buNone/>
+            </a:pPr>
+            <a:r>
+              <a:rPr lang="en-US" sz="2800" b="1" dirty="0">
+                <a:solidFill>
+                  <a:srgbClr val="1F2429"/>
+                </a:solidFill>
+                <a:latin typeface="Calibri" pitchFamily="34" charset="0"/>
+                <a:ea typeface="Calibri" pitchFamily="34" charset="-122"/>
+                <a:cs typeface="Calibri" pitchFamily="34" charset="-120"/>
+              </a:rPr>
+              <a:t>Advantages in Action: Applying Them to COMSATS</a:t>
+            </a:r>
+            <a:endParaRPr lang="en-US" sz="2800" dirty="0"/>
+          </a:p>
+        </p:txBody>
+      </p:sp>
+      <p:sp>
+        <p:nvSpPr>
+          <p:cNvPr id="3" name="Text 1"/>
+          <p:cNvSpPr txBox="1"/>
+          <p:nvPr/>
+        </p:nvSpPr>
+        <p:spPr>
+          <a:xfrm>
+            <a:off x="9951415" y="6455664"/>
+            <a:ext cx="2011680" cy="292608"/>
+          </a:xfrm>
+          <a:prstGeom prst="rect">
+            <a:avLst/>
+          </a:prstGeom>
+          <a:noFill/>
+          <a:ln/>
+        </p:spPr>
+        <p:txBody>
+          <a:bodyPr wrap="square" lIns="0" tIns="0" rIns="0" bIns="0" rtlCol="0" anchor="ctr"/>
+          <a:lstStyle/>
+          <a:p>
+            <a:pPr algn="r" indent="0" marL="0">
+              <a:buNone/>
+            </a:pPr>
+            <a:r>
+              <a:rPr lang="en-US" sz="1200" u="sng" dirty="0">
+                <a:solidFill>
+                  <a:srgbClr val="8A939B"/>
+                </a:solidFill>
+                <a:latin typeface="Calibri" pitchFamily="34" charset="0"/>
+                <a:ea typeface="Calibri" pitchFamily="34" charset="-122"/>
+                <a:cs typeface="Calibri" pitchFamily="34" charset="-120"/>
+                <a:hlinkClick r:id="rId1" invalidUrl="" action="" tgtFrame="" tooltip="" history="1" highlightClick="0" endSnd="0">
+                  <a:extLst>
+                    <a:ext uri="{A12FA001-AC4F-418D-AE19-62706E023703}">
+                      <ahyp:hlinkClr xmlns:ahyp="http://schemas.microsoft.com/office/drawing/2018/hyperlinkcolor" val="tx"/>
+                    </a:ext>
+                  </a:extLst>
+                </a:hlinkClick>
+              </a:rPr>
+              <a:t>cuinotes.com</a:t>
+            </a:r>
+            <a:pPr algn="r" indent="0" marL="0">
+              <a:buNone/>
+            </a:pPr>
+            <a:r>
+              <a:rPr lang="en-US" sz="1200" dirty="0">
+                <a:solidFill>
+                  <a:srgbClr val="8A939B"/>
+                </a:solidFill>
+                <a:latin typeface="Calibri" pitchFamily="34" charset="0"/>
+                <a:ea typeface="Calibri" pitchFamily="34" charset="-122"/>
+                <a:cs typeface="Calibri" pitchFamily="34" charset="-120"/>
+              </a:rPr>
+              <a:t>  ·  18</a:t>
+            </a:r>
+            <a:endParaRPr lang="en-US" sz="1200" dirty="0"/>
+          </a:p>
+        </p:txBody>
+      </p:sp>
+      <p:sp>
+        <p:nvSpPr>
+          <p:cNvPr id="4" name="Text 2"/>
+          <p:cNvSpPr txBox="1"/>
+          <p:nvPr/>
+        </p:nvSpPr>
+        <p:spPr>
+          <a:xfrm>
+            <a:off x="640080" y="1371600"/>
+            <a:ext cx="10332720" cy="4846320"/>
+          </a:xfrm>
+          <a:prstGeom prst="rect">
+            <a:avLst/>
+          </a:prstGeom>
+          <a:noFill/>
+          <a:ln/>
+        </p:spPr>
+        <p:txBody>
+          <a:bodyPr wrap="square" lIns="0" tIns="0" rIns="0" bIns="0" rtlCol="0" anchor="t"/>
+          <a:lstStyle/>
+          <a:p>
+            <a:pPr marL="342900" indent="-342900">
+              <a:spcAft>
+                <a:spcPts val="1800"/>
+              </a:spcAft>
+              <a:buSzPct val="100000"/>
+              <a:buChar char="•"/>
+            </a:pPr>
+            <a:r>
+              <a:rPr lang="en-US" sz="1800" dirty="0">
+                <a:solidFill>
+                  <a:srgbClr val="1F2429"/>
+                </a:solidFill>
+                <a:latin typeface="Calibri" pitchFamily="34" charset="0"/>
+                <a:ea typeface="Calibri" pitchFamily="34" charset="-122"/>
+                <a:cs typeface="Calibri" pitchFamily="34" charset="-120"/>
+              </a:rPr>
+              <a:t>Improved security, concretely — a library clerk's login can be restricted to BooksIssued, with no access to another student's FeeBalance</a:t>
+            </a:r>
+            <a:endParaRPr lang="en-US" sz="1800" dirty="0"/>
+          </a:p>
+          <a:p>
+            <a:pPr marL="342900" indent="-342900">
+              <a:spcAft>
+                <a:spcPts val="1800"/>
+              </a:spcAft>
+              <a:buSzPct val="100000"/>
+              <a:buChar char="•"/>
+            </a:pPr>
+            <a:r>
+              <a:rPr lang="en-US" sz="1800" dirty="0">
+                <a:solidFill>
+                  <a:srgbClr val="1F2429"/>
+                </a:solidFill>
+                <a:latin typeface="Calibri" pitchFamily="34" charset="0"/>
+                <a:ea typeface="Calibri" pitchFamily="34" charset="-122"/>
+                <a:cs typeface="Calibri" pitchFamily="34" charset="-120"/>
+              </a:rPr>
+              <a:t>Improved integrity, concretely — one rule, “FeeBalance can never be negative,” is defined once and applies to every application automatically</a:t>
+            </a:r>
+            <a:endParaRPr lang="en-US" sz="1800" dirty="0"/>
+          </a:p>
+          <a:p>
+            <a:pPr marL="342900" indent="-342900">
+              <a:spcAft>
+                <a:spcPts val="1800"/>
+              </a:spcAft>
+              <a:buSzPct val="100000"/>
+              <a:buChar char="•"/>
+            </a:pPr>
+            <a:r>
+              <a:rPr lang="en-US" sz="1800" dirty="0">
+                <a:solidFill>
+                  <a:srgbClr val="1F2429"/>
+                </a:solidFill>
+                <a:latin typeface="Calibri" pitchFamily="34" charset="0"/>
+                <a:ea typeface="Calibri" pitchFamily="34" charset="-122"/>
+                <a:cs typeface="Calibri" pitchFamily="34" charset="-120"/>
+              </a:rPr>
+              <a:t>More information from the same data — one query across the shared Student table answers “who owes a library fine and a tuition balance?” directly</a:t>
+            </a:r>
+            <a:endParaRPr lang="en-US" sz="1800" dirty="0"/>
+          </a:p>
+          <a:p>
+            <a:pPr marL="342900" indent="-342900">
+              <a:spcAft>
+                <a:spcPts val="1800"/>
+              </a:spcAft>
+              <a:buSzPct val="100000"/>
+              <a:buChar char="•"/>
+            </a:pPr>
+            <a:r>
+              <a:rPr lang="en-US" sz="1800" dirty="0">
+                <a:solidFill>
+                  <a:srgbClr val="1F2429"/>
+                </a:solidFill>
+                <a:latin typeface="Calibri" pitchFamily="34" charset="0"/>
+                <a:ea typeface="Calibri" pitchFamily="34" charset="-122"/>
+                <a:cs typeface="Calibri" pitchFamily="34" charset="-120"/>
+              </a:rPr>
+              <a:t>Balance of conflicting requirements — a DBA tunes the shared database for the registrar, library, and finance office together, not for one office alone</a:t>
+            </a:r>
+            <a:endParaRPr lang="en-US" sz="1800" dirty="0"/>
+          </a:p>
+          <a:p>
+            <a:pPr marL="342900" indent="-342900">
+              <a:spcAft>
+                <a:spcPts val="1800"/>
+              </a:spcAft>
+              <a:buSzPct val="100000"/>
+              <a:buChar char="•"/>
+            </a:pPr>
+            <a:r>
+              <a:rPr lang="en-US" sz="1800" dirty="0">
+                <a:solidFill>
+                  <a:srgbClr val="1F2429"/>
+                </a:solidFill>
+                <a:latin typeface="Calibri" pitchFamily="34" charset="0"/>
+                <a:ea typeface="Calibri" pitchFamily="34" charset="-122"/>
+                <a:cs typeface="Calibri" pitchFamily="34" charset="-120"/>
+              </a:rPr>
+              <a:t>Every one of these was impossible, or required a brand-new custom program, back when the three offices kept separate files</a:t>
+            </a:r>
+            <a:endParaRPr lang="en-US" sz="1800" dirty="0"/>
+          </a:p>
+        </p:txBody>
+      </p:sp>
+    </p:spTree>
+  </p:cSld>
+  <p:clrMapOvr>
+    <a:masterClrMapping/>
+  </p:clrMapOvr>
+</p:sld>
+</file>
+
+<file path=ppt/slides/slide21.xml><?xml version="1.0" encoding="utf-8"?>
+<p:sld xmlns:a="http://schemas.openxmlformats.org/drawingml/2006/main" xmlns:r="http://schemas.openxmlformats.org/officeDocument/2006/relationships" xmlns:p="http://schemas.openxmlformats.org/presentationml/2006/main">
+  <p:cSld name="Slide 2">
+    <p:bg>
+      <p:bgPr>
+        <a:solidFill>
+          <a:srgbClr val="F7F8F9"/>
+        </a:solidFill>
+      </p:bgPr>
+    </p:bg>
+    <p:spTree>
+      <p:nvGrpSpPr>
+        <p:cNvPr id="1" name=""/>
+        <p:cNvGrpSpPr/>
+        <p:nvPr/>
+      </p:nvGrpSpPr>
+      <p:grpSpPr>
+        <a:xfrm>
+          <a:off x="0" y="0"/>
+          <a:ext cx="0" cy="0"/>
+          <a:chOff x="0" y="0"/>
+          <a:chExt cx="0" cy="0"/>
+        </a:xfrm>
+      </p:grpSpPr>
+      <p:sp>
+        <p:nvSpPr>
+          <p:cNvPr id="2" name="Text 0"/>
+          <p:cNvSpPr txBox="1"/>
+          <p:nvPr/>
+        </p:nvSpPr>
+        <p:spPr>
+          <a:xfrm>
+            <a:off x="548640" y="365760"/>
+            <a:ext cx="11064240" cy="731520"/>
+          </a:xfrm>
+          <a:prstGeom prst="rect">
+            <a:avLst/>
+          </a:prstGeom>
+          <a:noFill/>
+          <a:ln/>
+        </p:spPr>
+        <p:txBody>
+          <a:bodyPr wrap="square" lIns="0" tIns="0" rIns="0" bIns="0" rtlCol="0" anchor="ctr"/>
+          <a:lstStyle/>
+          <a:p>
+            <a:pPr indent="0" marL="0">
+              <a:buNone/>
+            </a:pPr>
+            <a:r>
+              <a:rPr lang="en-US" sz="2800" b="1" dirty="0">
+                <a:solidFill>
+                  <a:srgbClr val="1F2429"/>
+                </a:solidFill>
+                <a:latin typeface="Calibri" pitchFamily="34" charset="0"/>
+                <a:ea typeface="Calibri" pitchFamily="34" charset="-122"/>
+                <a:cs typeface="Calibri" pitchFamily="34" charset="-120"/>
+              </a:rPr>
+              <a:t>Why Organizations Adopt the Database Approach Anyway</a:t>
+            </a:r>
+            <a:endParaRPr lang="en-US" sz="2800" dirty="0"/>
+          </a:p>
+        </p:txBody>
+      </p:sp>
+      <p:sp>
+        <p:nvSpPr>
+          <p:cNvPr id="3" name="Text 1"/>
+          <p:cNvSpPr txBox="1"/>
+          <p:nvPr/>
+        </p:nvSpPr>
+        <p:spPr>
+          <a:xfrm>
+            <a:off x="9951415" y="6455664"/>
+            <a:ext cx="2011680" cy="292608"/>
+          </a:xfrm>
+          <a:prstGeom prst="rect">
+            <a:avLst/>
+          </a:prstGeom>
+          <a:noFill/>
+          <a:ln/>
+        </p:spPr>
+        <p:txBody>
+          <a:bodyPr wrap="square" lIns="0" tIns="0" rIns="0" bIns="0" rtlCol="0" anchor="ctr"/>
+          <a:lstStyle/>
+          <a:p>
+            <a:pPr algn="r" indent="0" marL="0">
+              <a:buNone/>
+            </a:pPr>
+            <a:r>
+              <a:rPr lang="en-US" sz="1200" u="sng" dirty="0">
+                <a:solidFill>
+                  <a:srgbClr val="8A939B"/>
+                </a:solidFill>
+                <a:latin typeface="Calibri" pitchFamily="34" charset="0"/>
+                <a:ea typeface="Calibri" pitchFamily="34" charset="-122"/>
+                <a:cs typeface="Calibri" pitchFamily="34" charset="-120"/>
+                <a:hlinkClick r:id="rId1" invalidUrl="" action="" tgtFrame="" tooltip="" history="1" highlightClick="0" endSnd="0">
+                  <a:extLst>
+                    <a:ext uri="{A12FA001-AC4F-418D-AE19-62706E023703}">
+                      <ahyp:hlinkClr xmlns:ahyp="http://schemas.microsoft.com/office/drawing/2018/hyperlinkcolor" val="tx"/>
+                    </a:ext>
+                  </a:extLst>
+                </a:hlinkClick>
+              </a:rPr>
+              <a:t>cuinotes.com</a:t>
+            </a:r>
+            <a:pPr algn="r" indent="0" marL="0">
+              <a:buNone/>
+            </a:pPr>
+            <a:r>
+              <a:rPr lang="en-US" sz="1200" dirty="0">
+                <a:solidFill>
+                  <a:srgbClr val="8A939B"/>
+                </a:solidFill>
+                <a:latin typeface="Calibri" pitchFamily="34" charset="0"/>
+                <a:ea typeface="Calibri" pitchFamily="34" charset="-122"/>
+                <a:cs typeface="Calibri" pitchFamily="34" charset="-120"/>
+              </a:rPr>
+              <a:t>  ·  20</a:t>
+            </a:r>
+            <a:endParaRPr lang="en-US" sz="1200" dirty="0"/>
+          </a:p>
+        </p:txBody>
+      </p:sp>
+      <p:sp>
+        <p:nvSpPr>
+          <p:cNvPr id="4" name="Text 2"/>
+          <p:cNvSpPr txBox="1"/>
+          <p:nvPr/>
+        </p:nvSpPr>
+        <p:spPr>
+          <a:xfrm>
+            <a:off x="640080" y="1371600"/>
+            <a:ext cx="10332720" cy="4846320"/>
+          </a:xfrm>
+          <a:prstGeom prst="rect">
+            <a:avLst/>
+          </a:prstGeom>
+          <a:noFill/>
+          <a:ln/>
+        </p:spPr>
+        <p:txBody>
+          <a:bodyPr wrap="square" lIns="0" tIns="0" rIns="0" bIns="0" rtlCol="0" anchor="t"/>
+          <a:lstStyle/>
+          <a:p>
+            <a:pPr marL="342900" indent="-342900">
+              <a:spcAft>
+                <a:spcPts val="1800"/>
+              </a:spcAft>
+              <a:buSzPct val="100000"/>
+              <a:buChar char="•"/>
+            </a:pPr>
+            <a:r>
+              <a:rPr lang="en-US" sz="1800" dirty="0">
+                <a:solidFill>
+                  <a:srgbClr val="1F2429"/>
+                </a:solidFill>
+                <a:latin typeface="Calibri" pitchFamily="34" charset="0"/>
+                <a:ea typeface="Calibri" pitchFamily="34" charset="-122"/>
+                <a:cs typeface="Calibri" pitchFamily="34" charset="-120"/>
+              </a:rPr>
+              <a:t>None of the four disadvantages — complexity, cost, narrower performance, bigger blast radius — are usually enough on their own to justify going back to file-based systems</a:t>
+            </a:r>
+            <a:endParaRPr lang="en-US" sz="1800" dirty="0"/>
+          </a:p>
+          <a:p>
+            <a:pPr marL="342900" indent="-342900">
+              <a:spcAft>
+                <a:spcPts val="1800"/>
+              </a:spcAft>
+              <a:buSzPct val="100000"/>
+              <a:buChar char="•"/>
+            </a:pPr>
+            <a:r>
+              <a:rPr lang="en-US" sz="1800" dirty="0">
+                <a:solidFill>
+                  <a:srgbClr val="1F2429"/>
+                </a:solidFill>
+                <a:latin typeface="Calibri" pitchFamily="34" charset="0"/>
+                <a:ea typeface="Calibri" pitchFamily="34" charset="-122"/>
+                <a:cs typeface="Calibri" pitchFamily="34" charset="-120"/>
+              </a:rPr>
+              <a:t>The redundancy and inconsistency problems of file-based systems only get worse as an organization grows; they never self-correct</a:t>
+            </a:r>
+            <a:endParaRPr lang="en-US" sz="1800" dirty="0"/>
+          </a:p>
+          <a:p>
+            <a:pPr marL="342900" indent="-342900">
+              <a:spcAft>
+                <a:spcPts val="1800"/>
+              </a:spcAft>
+              <a:buSzPct val="100000"/>
+              <a:buChar char="•"/>
+            </a:pPr>
+            <a:r>
+              <a:rPr lang="en-US" sz="1800" dirty="0">
+                <a:solidFill>
+                  <a:srgbClr val="1F2429"/>
+                </a:solidFill>
+                <a:latin typeface="Calibri" pitchFamily="34" charset="0"/>
+                <a:ea typeface="Calibri" pitchFamily="34" charset="-122"/>
+                <a:cs typeface="Calibri" pitchFamily="34" charset="-120"/>
+              </a:rPr>
+              <a:t>The database approach's costs are largely one-time: learning the technology, paying for the software and hardware up front</a:t>
+            </a:r>
+            <a:endParaRPr lang="en-US" sz="1800" dirty="0"/>
+          </a:p>
+          <a:p>
+            <a:pPr marL="342900" indent="-342900">
+              <a:spcAft>
+                <a:spcPts val="1800"/>
+              </a:spcAft>
+              <a:buSzPct val="100000"/>
+              <a:buChar char="•"/>
+            </a:pPr>
+            <a:r>
+              <a:rPr lang="en-US" sz="1800" dirty="0">
+                <a:solidFill>
+                  <a:srgbClr val="1F2429"/>
+                </a:solidFill>
+                <a:latin typeface="Calibri" pitchFamily="34" charset="0"/>
+                <a:ea typeface="Calibri" pitchFamily="34" charset="-122"/>
+                <a:cs typeface="Calibri" pitchFamily="34" charset="-120"/>
+              </a:rPr>
+              <a:t>Exception: a tiny, single-user, single-purpose tool with no sharing requirement may genuinely be better served by a plain file</a:t>
+            </a:r>
+            <a:endParaRPr lang="en-US" sz="1800" dirty="0"/>
+          </a:p>
+          <a:p>
+            <a:pPr marL="342900" indent="-342900">
+              <a:spcAft>
+                <a:spcPts val="1800"/>
+              </a:spcAft>
+              <a:buSzPct val="100000"/>
+              <a:buChar char="•"/>
+            </a:pPr>
+            <a:r>
+              <a:rPr lang="en-US" sz="1800" dirty="0">
+                <a:solidFill>
+                  <a:srgbClr val="1F2429"/>
+                </a:solidFill>
+                <a:latin typeface="Calibri" pitchFamily="34" charset="0"/>
+                <a:ea typeface="Calibri" pitchFamily="34" charset="-122"/>
+                <a:cs typeface="Calibri" pitchFamily="34" charset="-120"/>
+              </a:rPr>
+              <a:t>It is a trade-off, not a universal law — but for any shared, growing dataset, the trade-off almost always favors the database</a:t>
+            </a:r>
+            <a:endParaRPr lang="en-US" sz="1800" dirty="0"/>
+          </a:p>
+        </p:txBody>
+      </p:sp>
+    </p:spTree>
+  </p:cSld>
+  <p:clrMapOvr>
+    <a:masterClrMapping/>
+  </p:clrMapOvr>
+</p:sld>
+</file>
+
+<file path=ppt/slides/slide22.xml><?xml version="1.0" encoding="utf-8"?>
+<p:sld xmlns:a="http://schemas.openxmlformats.org/drawingml/2006/main" xmlns:r="http://schemas.openxmlformats.org/officeDocument/2006/relationships" xmlns:p="http://schemas.openxmlformats.org/presentationml/2006/main">
+  <p:cSld name="Slide 2">
+    <p:bg>
+      <p:bgPr>
+        <a:solidFill>
+          <a:srgbClr val="F7F8F9"/>
+        </a:solidFill>
+      </p:bgPr>
+    </p:bg>
+    <p:spTree>
+      <p:nvGrpSpPr>
+        <p:cNvPr id="1" name=""/>
+        <p:cNvGrpSpPr/>
+        <p:nvPr/>
+      </p:nvGrpSpPr>
+      <p:grpSpPr>
+        <a:xfrm>
+          <a:off x="0" y="0"/>
+          <a:ext cx="0" cy="0"/>
+          <a:chOff x="0" y="0"/>
+          <a:chExt cx="0" cy="0"/>
+        </a:xfrm>
+      </p:grpSpPr>
+      <p:sp>
+        <p:nvSpPr>
+          <p:cNvPr id="2" name="Text 0"/>
+          <p:cNvSpPr txBox="1"/>
+          <p:nvPr/>
+        </p:nvSpPr>
+        <p:spPr>
+          <a:xfrm>
+            <a:off x="548640" y="365760"/>
+            <a:ext cx="11064240" cy="731520"/>
+          </a:xfrm>
+          <a:prstGeom prst="rect">
+            <a:avLst/>
+          </a:prstGeom>
+          <a:noFill/>
+          <a:ln/>
+        </p:spPr>
+        <p:txBody>
+          <a:bodyPr wrap="square" lIns="0" tIns="0" rIns="0" bIns="0" rtlCol="0" anchor="ctr"/>
+          <a:lstStyle/>
+          <a:p>
+            <a:pPr indent="0" marL="0">
+              <a:buNone/>
+            </a:pPr>
+            <a:r>
+              <a:rPr lang="en-US" sz="2800" b="1" dirty="0">
+                <a:solidFill>
+                  <a:srgbClr val="1F2429"/>
+                </a:solidFill>
+                <a:latin typeface="Calibri" pitchFamily="34" charset="0"/>
+                <a:ea typeface="Calibri" pitchFamily="34" charset="-122"/>
+                <a:cs typeface="Calibri" pitchFamily="34" charset="-120"/>
+              </a:rPr>
+              <a:t>From File Chaos to a Managed Database</a:t>
+            </a:r>
+            <a:endParaRPr lang="en-US" sz="2800" dirty="0"/>
+          </a:p>
+        </p:txBody>
+      </p:sp>
+      <p:sp>
+        <p:nvSpPr>
+          <p:cNvPr id="3" name="Text 1"/>
+          <p:cNvSpPr txBox="1"/>
+          <p:nvPr/>
+        </p:nvSpPr>
+        <p:spPr>
+          <a:xfrm>
+            <a:off x="9951415" y="6455664"/>
+            <a:ext cx="2011680" cy="292608"/>
+          </a:xfrm>
+          <a:prstGeom prst="rect">
+            <a:avLst/>
+          </a:prstGeom>
+          <a:noFill/>
+          <a:ln/>
+        </p:spPr>
+        <p:txBody>
+          <a:bodyPr wrap="square" lIns="0" tIns="0" rIns="0" bIns="0" rtlCol="0" anchor="ctr"/>
+          <a:lstStyle/>
+          <a:p>
+            <a:pPr algn="r" indent="0" marL="0">
+              <a:buNone/>
+            </a:pPr>
+            <a:r>
+              <a:rPr lang="en-US" sz="1200" u="sng" dirty="0">
+                <a:solidFill>
+                  <a:srgbClr val="8A939B"/>
+                </a:solidFill>
+                <a:latin typeface="Calibri" pitchFamily="34" charset="0"/>
+                <a:ea typeface="Calibri" pitchFamily="34" charset="-122"/>
+                <a:cs typeface="Calibri" pitchFamily="34" charset="-120"/>
+                <a:hlinkClick r:id="rId1" invalidUrl="" action="" tgtFrame="" tooltip="" history="1" highlightClick="0" endSnd="0">
+                  <a:extLst>
+                    <a:ext uri="{A12FA001-AC4F-418D-AE19-62706E023703}">
+                      <ahyp:hlinkClr xmlns:ahyp="http://schemas.microsoft.com/office/drawing/2018/hyperlinkcolor" val="tx"/>
+                    </a:ext>
+                  </a:extLst>
+                </a:hlinkClick>
+              </a:rPr>
+              <a:t>cuinotes.com</a:t>
+            </a:r>
+            <a:pPr algn="r" indent="0" marL="0">
+              <a:buNone/>
+            </a:pPr>
+            <a:r>
+              <a:rPr lang="en-US" sz="1200" dirty="0">
+                <a:solidFill>
+                  <a:srgbClr val="8A939B"/>
+                </a:solidFill>
+                <a:latin typeface="Calibri" pitchFamily="34" charset="0"/>
+                <a:ea typeface="Calibri" pitchFamily="34" charset="-122"/>
+                <a:cs typeface="Calibri" pitchFamily="34" charset="-120"/>
+              </a:rPr>
+              <a:t>  ·  21</a:t>
+            </a:r>
+            <a:endParaRPr lang="en-US" sz="1200" dirty="0"/>
+          </a:p>
+        </p:txBody>
+      </p:sp>
+      <p:sp>
+        <p:nvSpPr>
+          <p:cNvPr id="4" name="Text 2"/>
+          <p:cNvSpPr txBox="1"/>
+          <p:nvPr/>
+        </p:nvSpPr>
+        <p:spPr>
+          <a:xfrm>
+            <a:off x="640080" y="1371600"/>
+            <a:ext cx="10332720" cy="4846320"/>
+          </a:xfrm>
+          <a:prstGeom prst="rect">
+            <a:avLst/>
+          </a:prstGeom>
+          <a:noFill/>
+          <a:ln/>
+        </p:spPr>
+        <p:txBody>
+          <a:bodyPr wrap="square" lIns="0" tIns="0" rIns="0" bIns="0" rtlCol="0" anchor="t"/>
+          <a:lstStyle/>
+          <a:p>
+            <a:pPr marL="342900" indent="-342900">
+              <a:spcAft>
+                <a:spcPts val="1800"/>
+              </a:spcAft>
+              <a:buSzPct val="100000"/>
+              <a:buChar char="•"/>
+            </a:pPr>
+            <a:r>
+              <a:rPr lang="en-US" sz="1800" dirty="0">
+                <a:solidFill>
+                  <a:srgbClr val="1F2429"/>
+                </a:solidFill>
+                <a:latin typeface="Calibri" pitchFamily="34" charset="0"/>
+                <a:ea typeface="Calibri" pitchFamily="34" charset="-122"/>
+                <a:cs typeface="Calibri" pitchFamily="34" charset="-120"/>
+              </a:rPr>
+              <a:t>We started with three COMSATS offices, each keeping its own private file, each with its own copy of Name and Address</a:t>
+            </a:r>
+            <a:endParaRPr lang="en-US" sz="1800" dirty="0"/>
+          </a:p>
+          <a:p>
+            <a:pPr marL="342900" indent="-342900">
+              <a:spcAft>
+                <a:spcPts val="1800"/>
+              </a:spcAft>
+              <a:buSzPct val="100000"/>
+              <a:buChar char="•"/>
+            </a:pPr>
+            <a:r>
+              <a:rPr lang="en-US" sz="1800" dirty="0">
+                <a:solidFill>
+                  <a:srgbClr val="1F2429"/>
+                </a:solidFill>
+                <a:latin typeface="Calibri" pitchFamily="34" charset="0"/>
+                <a:ea typeface="Calibri" pitchFamily="34" charset="-122"/>
+                <a:cs typeface="Calibri" pitchFamily="34" charset="-120"/>
+              </a:rPr>
+              <a:t>Those duplicated copies drifted apart — the exact mechanism behind data redundancy and data inconsistency</a:t>
+            </a:r>
+            <a:endParaRPr lang="en-US" sz="1800" dirty="0"/>
+          </a:p>
+          <a:p>
+            <a:pPr marL="342900" indent="-342900">
+              <a:spcAft>
+                <a:spcPts val="1800"/>
+              </a:spcAft>
+              <a:buSzPct val="100000"/>
+              <a:buChar char="•"/>
+            </a:pPr>
+            <a:r>
+              <a:rPr lang="en-US" sz="1800" dirty="0">
+                <a:solidFill>
+                  <a:srgbClr val="1F2429"/>
+                </a:solidFill>
+                <a:latin typeface="Calibri" pitchFamily="34" charset="0"/>
+                <a:ea typeface="Calibri" pitchFamily="34" charset="-122"/>
+                <a:cs typeface="Calibri" pitchFamily="34" charset="-120"/>
+              </a:rPr>
+              <a:t>The database approach's fix: store each fact once, centrally, and route every application through a DBMS to reach it</a:t>
+            </a:r>
+            <a:endParaRPr lang="en-US" sz="1800" dirty="0"/>
+          </a:p>
+          <a:p>
+            <a:pPr marL="342900" indent="-342900">
+              <a:spcAft>
+                <a:spcPts val="1800"/>
+              </a:spcAft>
+              <a:buSzPct val="100000"/>
+              <a:buChar char="•"/>
+            </a:pPr>
+            <a:r>
+              <a:rPr lang="en-US" sz="1800" dirty="0">
+                <a:solidFill>
+                  <a:srgbClr val="1F2429"/>
+                </a:solidFill>
+                <a:latin typeface="Calibri" pitchFamily="34" charset="0"/>
+                <a:ea typeface="Calibri" pitchFamily="34" charset="-122"/>
+                <a:cs typeface="Calibri" pitchFamily="34" charset="-120"/>
+              </a:rPr>
+              <a:t>That one change unlocked consistency, integrity, security, and shared access — at the cost of added complexity and a bigger blast radius on failure</a:t>
+            </a:r>
+            <a:endParaRPr lang="en-US" sz="1800" dirty="0"/>
+          </a:p>
+          <a:p>
+            <a:pPr marL="342900" indent="-342900">
+              <a:spcAft>
+                <a:spcPts val="1800"/>
+              </a:spcAft>
+              <a:buSzPct val="100000"/>
+              <a:buChar char="•"/>
+            </a:pPr>
+            <a:r>
+              <a:rPr lang="en-US" sz="1800" dirty="0">
+                <a:solidFill>
+                  <a:srgbClr val="1F2429"/>
+                </a:solidFill>
+                <a:latin typeface="Calibri" pitchFamily="34" charset="0"/>
+                <a:ea typeface="Calibri" pitchFamily="34" charset="-122"/>
+                <a:cs typeface="Calibri" pitchFamily="34" charset="-120"/>
+              </a:rPr>
+              <a:t>Next: Lecture 2 opens up what a DBMS is actually made of, and who is responsible for a database once an organization adopts this approach</a:t>
+            </a:r>
+            <a:endParaRPr lang="en-US" sz="1800" dirty="0"/>
+          </a:p>
+        </p:txBody>
+      </p:sp>
+    </p:spTree>
+  </p:cSld>
+  <p:clrMapOvr>
+    <a:masterClrMapping/>
+  </p:clrMapOvr>
+</p:sld>
+</file>
+
+<file path=ppt/slides/slide23.xml><?xml version="1.0" encoding="utf-8"?>
+<p:sld xmlns:a="http://schemas.openxmlformats.org/drawingml/2006/main" xmlns:r="http://schemas.openxmlformats.org/officeDocument/2006/relationships" xmlns:p="http://schemas.openxmlformats.org/presentationml/2006/main">
+  <p:cSld name="Slide 2">
+    <p:bg>
+      <p:bgPr>
+        <a:solidFill>
+          <a:srgbClr val="F7F8F9"/>
+        </a:solidFill>
+      </p:bgPr>
+    </p:bg>
+    <p:spTree>
+      <p:nvGrpSpPr>
+        <p:cNvPr id="1" name=""/>
+        <p:cNvGrpSpPr/>
+        <p:nvPr/>
+      </p:nvGrpSpPr>
+      <p:grpSpPr>
+        <a:xfrm>
+          <a:off x="0" y="0"/>
+          <a:ext cx="0" cy="0"/>
+          <a:chOff x="0" y="0"/>
+          <a:chExt cx="0" cy="0"/>
+        </a:xfrm>
+      </p:grpSpPr>
+      <p:sp>
+        <p:nvSpPr>
+          <p:cNvPr id="2" name="Text 0"/>
+          <p:cNvSpPr txBox="1"/>
+          <p:nvPr/>
+        </p:nvSpPr>
+        <p:spPr>
+          <a:xfrm>
+            <a:off x="548640" y="365760"/>
+            <a:ext cx="11064240" cy="731520"/>
+          </a:xfrm>
+          <a:prstGeom prst="rect">
+            <a:avLst/>
+          </a:prstGeom>
+          <a:noFill/>
+          <a:ln/>
+        </p:spPr>
+        <p:txBody>
+          <a:bodyPr wrap="square" lIns="0" tIns="0" rIns="0" bIns="0" rtlCol="0" anchor="ctr"/>
+          <a:lstStyle/>
+          <a:p>
+            <a:pPr indent="0" marL="0">
+              <a:buNone/>
+            </a:pPr>
+            <a:r>
+              <a:rPr lang="en-US" sz="2800" b="1" dirty="0">
+                <a:solidFill>
+                  <a:srgbClr val="1F2429"/>
+                </a:solidFill>
+                <a:latin typeface="Calibri" pitchFamily="34" charset="0"/>
+                <a:ea typeface="Calibri" pitchFamily="34" charset="-122"/>
+                <a:cs typeface="Calibri" pitchFamily="34" charset="-120"/>
+              </a:rPr>
+              <a:t>Looking Ahead: Lecture 2</a:t>
+            </a:r>
+            <a:endParaRPr lang="en-US" sz="2800" dirty="0"/>
+          </a:p>
+        </p:txBody>
+      </p:sp>
+      <p:sp>
+        <p:nvSpPr>
+          <p:cNvPr id="3" name="Text 1"/>
+          <p:cNvSpPr txBox="1"/>
+          <p:nvPr/>
+        </p:nvSpPr>
+        <p:spPr>
+          <a:xfrm>
+            <a:off x="9951415" y="6455664"/>
+            <a:ext cx="2011680" cy="292608"/>
+          </a:xfrm>
+          <a:prstGeom prst="rect">
+            <a:avLst/>
+          </a:prstGeom>
+          <a:noFill/>
+          <a:ln/>
+        </p:spPr>
+        <p:txBody>
+          <a:bodyPr wrap="square" lIns="0" tIns="0" rIns="0" bIns="0" rtlCol="0" anchor="ctr"/>
+          <a:lstStyle/>
+          <a:p>
+            <a:pPr algn="r" indent="0" marL="0">
+              <a:buNone/>
+            </a:pPr>
+            <a:r>
+              <a:rPr lang="en-US" sz="1200" u="sng" dirty="0">
+                <a:solidFill>
+                  <a:srgbClr val="8A939B"/>
+                </a:solidFill>
+                <a:latin typeface="Calibri" pitchFamily="34" charset="0"/>
+                <a:ea typeface="Calibri" pitchFamily="34" charset="-122"/>
+                <a:cs typeface="Calibri" pitchFamily="34" charset="-120"/>
+                <a:hlinkClick r:id="rId1" invalidUrl="" action="" tgtFrame="" tooltip="" history="1" highlightClick="0" endSnd="0">
+                  <a:extLst>
+                    <a:ext uri="{A12FA001-AC4F-418D-AE19-62706E023703}">
+                      <ahyp:hlinkClr xmlns:ahyp="http://schemas.microsoft.com/office/drawing/2018/hyperlinkcolor" val="tx"/>
+                    </a:ext>
+                  </a:extLst>
+                </a:hlinkClick>
+              </a:rPr>
+              <a:t>cuinotes.com</a:t>
+            </a:r>
+            <a:pPr algn="r" indent="0" marL="0">
+              <a:buNone/>
+            </a:pPr>
+            <a:r>
+              <a:rPr lang="en-US" sz="1200" dirty="0">
+                <a:solidFill>
+                  <a:srgbClr val="8A939B"/>
+                </a:solidFill>
+                <a:latin typeface="Calibri" pitchFamily="34" charset="0"/>
+                <a:ea typeface="Calibri" pitchFamily="34" charset="-122"/>
+                <a:cs typeface="Calibri" pitchFamily="34" charset="-120"/>
+              </a:rPr>
+              <a:t>  ·  23</a:t>
+            </a:r>
+            <a:endParaRPr lang="en-US" sz="1200" dirty="0"/>
+          </a:p>
+        </p:txBody>
+      </p:sp>
+      <p:sp>
+        <p:nvSpPr>
+          <p:cNvPr id="4" name="Text 2"/>
+          <p:cNvSpPr txBox="1"/>
+          <p:nvPr/>
+        </p:nvSpPr>
+        <p:spPr>
+          <a:xfrm>
+            <a:off x="640080" y="1371600"/>
+            <a:ext cx="10332720" cy="4846320"/>
+          </a:xfrm>
+          <a:prstGeom prst="rect">
+            <a:avLst/>
+          </a:prstGeom>
+          <a:noFill/>
+          <a:ln/>
+        </p:spPr>
+        <p:txBody>
+          <a:bodyPr wrap="square" lIns="0" tIns="0" rIns="0" bIns="0" rtlCol="0" anchor="t"/>
+          <a:lstStyle/>
+          <a:p>
+            <a:pPr marL="342900" indent="-342900">
+              <a:spcAft>
+                <a:spcPts val="1800"/>
+              </a:spcAft>
+              <a:buSzPct val="100000"/>
+              <a:buChar char="•"/>
+            </a:pPr>
+            <a:r>
+              <a:rPr lang="en-US" sz="1800" dirty="0">
+                <a:solidFill>
+                  <a:srgbClr val="1F2429"/>
+                </a:solidFill>
+                <a:latin typeface="Calibri" pitchFamily="34" charset="0"/>
+                <a:ea typeface="Calibri" pitchFamily="34" charset="-122"/>
+                <a:cs typeface="Calibri" pitchFamily="34" charset="-120"/>
+              </a:rPr>
+              <a:t>Lecture 2 picks up exactly where this one stops: the database approach's environment, roles, and components</a:t>
+            </a:r>
+            <a:endParaRPr lang="en-US" sz="1800" dirty="0"/>
+          </a:p>
+          <a:p>
+            <a:pPr marL="342900" indent="-342900">
+              <a:spcAft>
+                <a:spcPts val="1800"/>
+              </a:spcAft>
+              <a:buSzPct val="100000"/>
+              <a:buChar char="•"/>
+            </a:pPr>
+            <a:r>
+              <a:rPr lang="en-US" sz="1800" dirty="0">
+                <a:solidFill>
+                  <a:srgbClr val="1F2429"/>
+                </a:solidFill>
+                <a:latin typeface="Calibri" pitchFamily="34" charset="0"/>
+                <a:ea typeface="Calibri" pitchFamily="34" charset="-122"/>
+                <a:cs typeface="Calibri" pitchFamily="34" charset="-120"/>
+              </a:rPr>
+              <a:t>You'll meet the people responsible for a real database — the DBA, application programmers, and end users — and what each one does</a:t>
+            </a:r>
+            <a:endParaRPr lang="en-US" sz="1800" dirty="0"/>
+          </a:p>
+          <a:p>
+            <a:pPr marL="342900" indent="-342900">
+              <a:spcAft>
+                <a:spcPts val="1800"/>
+              </a:spcAft>
+              <a:buSzPct val="100000"/>
+              <a:buChar char="•"/>
+            </a:pPr>
+            <a:r>
+              <a:rPr lang="en-US" sz="1800" dirty="0">
+                <a:solidFill>
+                  <a:srgbClr val="1F2429"/>
+                </a:solidFill>
+                <a:latin typeface="Calibri" pitchFamily="34" charset="0"/>
+                <a:ea typeface="Calibri" pitchFamily="34" charset="-122"/>
+                <a:cs typeface="Calibri" pitchFamily="34" charset="-120"/>
+              </a:rPr>
+              <a:t>You'll see the DBMS's own internal components: the query processor, the storage manager, and the catalog that describes the data itself</a:t>
+            </a:r>
+            <a:endParaRPr lang="en-US" sz="1800" dirty="0"/>
+          </a:p>
+          <a:p>
+            <a:pPr marL="342900" indent="-342900">
+              <a:spcAft>
+                <a:spcPts val="1800"/>
+              </a:spcAft>
+              <a:buSzPct val="100000"/>
+              <a:buChar char="•"/>
+            </a:pPr>
+            <a:r>
+              <a:rPr lang="en-US" sz="1800" dirty="0">
+                <a:solidFill>
+                  <a:srgbClr val="1F2429"/>
+                </a:solidFill>
+                <a:latin typeface="Calibri" pitchFamily="34" charset="0"/>
+                <a:ea typeface="Calibri" pitchFamily="34" charset="-122"/>
+                <a:cs typeface="Calibri" pitchFamily="34" charset="-120"/>
+              </a:rPr>
+              <a:t>Everything in today's lecture — why centralize data, what it buys you — becomes the motivation for everything Lecture 2 names and defines</a:t>
+            </a:r>
+            <a:endParaRPr lang="en-US" sz="1800" dirty="0"/>
+          </a:p>
+        </p:txBody>
+      </p:sp>
+    </p:spTree>
+  </p:cSld>
+  <p:clrMapOvr>
+    <a:masterClrMapping/>
+  </p:clrMapOvr>
+</p:sld>
+</file>
+
+<file path=ppt/slides/slide3.xml><?xml version="1.0" encoding="utf-8"?>
+<p:sld xmlns:a="http://schemas.openxmlformats.org/drawingml/2006/main" xmlns:r="http://schemas.openxmlformats.org/officeDocument/2006/relationships" xmlns:p="http://schemas.openxmlformats.org/presentationml/2006/main">
+  <p:cSld name="Slide 3">
+    <p:bg>
+      <p:bgPr>
+        <a:solidFill>
+          <a:srgbClr val="F7F8F9"/>
+        </a:solidFill>
+      </p:bgPr>
+    </p:bg>
+    <p:spTree>
+      <p:nvGrpSpPr>
+        <p:cNvPr id="1" name=""/>
+        <p:cNvGrpSpPr/>
+        <p:nvPr/>
+      </p:nvGrpSpPr>
+      <p:grpSpPr>
+        <a:xfrm>
+          <a:off x="0" y="0"/>
+          <a:ext cx="0" cy="0"/>
+          <a:chOff x="0" y="0"/>
+          <a:chExt cx="0" cy="0"/>
+        </a:xfrm>
+      </p:grpSpPr>
+      <p:sp>
+        <p:nvSpPr>
+          <p:cNvPr id="2" name="Text 0"/>
+          <p:cNvSpPr txBox="1"/>
+          <p:nvPr/>
+        </p:nvSpPr>
+        <p:spPr>
+          <a:xfrm>
+            <a:off x="548640" y="365760"/>
+            <a:ext cx="11064240" cy="731520"/>
+          </a:xfrm>
+          <a:prstGeom prst="rect">
+            <a:avLst/>
+          </a:prstGeom>
+          <a:noFill/>
+          <a:ln/>
+        </p:spPr>
+        <p:txBody>
+          <a:bodyPr wrap="square" lIns="0" tIns="0" rIns="0" bIns="0" rtlCol="0" anchor="ctr"/>
+          <a:lstStyle/>
+          <a:p>
+            <a:pPr indent="0" marL="0">
+              <a:buNone/>
+            </a:pPr>
+            <a:r>
+              <a:rPr lang="en-US" sz="2800" b="1" dirty="0">
+                <a:solidFill>
+                  <a:srgbClr val="1F2429"/>
+                </a:solidFill>
+                <a:latin typeface="Calibri" pitchFamily="34" charset="0"/>
+                <a:ea typeface="Calibri" pitchFamily="34" charset="-122"/>
+                <a:cs typeface="Calibri" pitchFamily="34" charset="-120"/>
+              </a:rPr>
+              <a:t>Databases and Information Systems</a:t>
+            </a:r>
+            <a:endParaRPr lang="en-US" sz="2800" dirty="0"/>
+          </a:p>
+        </p:txBody>
+      </p:sp>
+      <p:sp>
+        <p:nvSpPr>
+          <p:cNvPr id="3" name="Text 1"/>
+          <p:cNvSpPr txBox="1"/>
+          <p:nvPr/>
+        </p:nvSpPr>
+        <p:spPr>
+          <a:xfrm>
+            <a:off x="9951415" y="6455664"/>
+            <a:ext cx="2011680" cy="292608"/>
+          </a:xfrm>
+          <a:prstGeom prst="rect">
+            <a:avLst/>
+          </a:prstGeom>
+          <a:noFill/>
+          <a:ln/>
+        </p:spPr>
+        <p:txBody>
+          <a:bodyPr wrap="square" lIns="0" tIns="0" rIns="0" bIns="0" rtlCol="0" anchor="ctr"/>
+          <a:lstStyle/>
+          <a:p>
+            <a:pPr algn="r" indent="0" marL="0">
+              <a:buNone/>
+            </a:pPr>
+            <a:r>
+              <a:rPr lang="en-US" sz="1200" u="sng" dirty="0">
+                <a:solidFill>
+                  <a:srgbClr val="8A939B"/>
+                </a:solidFill>
+                <a:latin typeface="Calibri" pitchFamily="34" charset="0"/>
+                <a:ea typeface="Calibri" pitchFamily="34" charset="-122"/>
+                <a:cs typeface="Calibri" pitchFamily="34" charset="-120"/>
+                <a:hlinkClick r:id="rId1" invalidUrl="" action="" tgtFrame="" tooltip="" history="1" highlightClick="0" endSnd="0">
+                  <a:extLst>
+                    <a:ext uri="{A12FA001-AC4F-418D-AE19-62706E023703}">
+                      <ahyp:hlinkClr xmlns:ahyp="http://schemas.microsoft.com/office/drawing/2018/hyperlinkcolor" val="tx"/>
+                    </a:ext>
+                  </a:extLst>
+                </a:hlinkClick>
+              </a:rPr>
+              <a:t>cuinotes.com</a:t>
+            </a:r>
+            <a:pPr algn="r" indent="0" marL="0">
+              <a:buNone/>
+            </a:pPr>
+            <a:r>
+              <a:rPr lang="en-US" sz="1200" dirty="0">
+                <a:solidFill>
+                  <a:srgbClr val="8A939B"/>
+                </a:solidFill>
+                <a:latin typeface="Calibri" pitchFamily="34" charset="0"/>
+                <a:ea typeface="Calibri" pitchFamily="34" charset="-122"/>
+                <a:cs typeface="Calibri" pitchFamily="34" charset="-120"/>
+              </a:rPr>
+              <a:t>  ·  3</a:t>
+            </a:r>
+            <a:endParaRPr lang="en-US" sz="1200" dirty="0"/>
+          </a:p>
+        </p:txBody>
+      </p:sp>
+      <p:sp>
+        <p:nvSpPr>
+          <p:cNvPr id="4" name="Text 2"/>
+          <p:cNvSpPr txBox="1"/>
+          <p:nvPr/>
+        </p:nvSpPr>
+        <p:spPr>
+          <a:xfrm>
+            <a:off x="640080" y="1234440"/>
+            <a:ext cx="10332720" cy="685800"/>
+          </a:xfrm>
+          <a:prstGeom prst="rect">
+            <a:avLst/>
+          </a:prstGeom>
+          <a:noFill/>
+          <a:ln/>
+        </p:spPr>
+        <p:txBody>
+          <a:bodyPr wrap="square" lIns="0" tIns="0" rIns="0" bIns="0" rtlCol="0" anchor="t"/>
+          <a:lstStyle/>
+          <a:p>
+            <a:pPr indent="0" marL="0">
+              <a:buNone/>
+            </a:pPr>
+            <a:r>
+              <a:rPr lang="en-US" sz="1800" dirty="0">
+                <a:solidFill>
+                  <a:srgbClr val="1F2429"/>
+                </a:solidFill>
+                <a:latin typeface="Calibri" pitchFamily="34" charset="0"/>
+                <a:ea typeface="Calibri" pitchFamily="34" charset="-122"/>
+                <a:cs typeface="Calibri" pitchFamily="34" charset="-120"/>
+              </a:rPr>
+              <a:t>A </a:t>
+            </a:r>
+            <a:pPr indent="0" marL="0">
+              <a:buNone/>
+            </a:pPr>
+            <a:r>
+              <a:rPr lang="en-US" sz="1800" b="1" dirty="0">
+                <a:solidFill>
+                  <a:srgbClr val="8B7FD9"/>
+                </a:solidFill>
+                <a:latin typeface="Calibri" pitchFamily="34" charset="0"/>
+                <a:ea typeface="Calibri" pitchFamily="34" charset="-122"/>
+                <a:cs typeface="Calibri" pitchFamily="34" charset="-120"/>
+              </a:rPr>
+              <a:t>database</a:t>
+            </a:r>
+            <a:pPr indent="0" marL="0">
+              <a:buNone/>
+            </a:pPr>
+            <a:r>
+              <a:rPr lang="en-US" sz="1800" dirty="0">
+                <a:solidFill>
+                  <a:srgbClr val="1F2429"/>
+                </a:solidFill>
+                <a:latin typeface="Calibri" pitchFamily="34" charset="0"/>
+                <a:ea typeface="Calibri" pitchFamily="34" charset="-122"/>
+                <a:cs typeface="Calibri" pitchFamily="34" charset="-120"/>
+              </a:rPr>
+              <a:t> is a shared, organized collection of logically related data, designed to meet an organization's information needs.</a:t>
+            </a:r>
+            <a:endParaRPr lang="en-US" sz="1800" dirty="0"/>
+          </a:p>
+        </p:txBody>
+      </p:sp>
+      <p:sp>
+        <p:nvSpPr>
+          <p:cNvPr id="5" name="Text 3"/>
+          <p:cNvSpPr txBox="1"/>
+          <p:nvPr/>
+        </p:nvSpPr>
+        <p:spPr>
+          <a:xfrm>
+            <a:off x="640080" y="1965960"/>
+            <a:ext cx="10332720" cy="1554480"/>
+          </a:xfrm>
+          <a:prstGeom prst="rect">
+            <a:avLst/>
+          </a:prstGeom>
+          <a:noFill/>
+          <a:ln/>
+        </p:spPr>
+        <p:txBody>
+          <a:bodyPr wrap="square" lIns="0" tIns="0" rIns="0" bIns="0" rtlCol="0" anchor="t"/>
+          <a:lstStyle/>
+          <a:p>
+            <a:pPr marL="342900" indent="-342900">
+              <a:spcAft>
+                <a:spcPts val="800"/>
+              </a:spcAft>
+              <a:buSzPct val="100000"/>
+              <a:buChar char="•"/>
+            </a:pPr>
+            <a:r>
+              <a:rPr lang="en-US" sz="1800" dirty="0">
+                <a:solidFill>
+                  <a:srgbClr val="1F2429"/>
+                </a:solidFill>
+                <a:latin typeface="Calibri" pitchFamily="34" charset="0"/>
+                <a:ea typeface="Calibri" pitchFamily="34" charset="-122"/>
+                <a:cs typeface="Calibri" pitchFamily="34" charset="-120"/>
+              </a:rPr>
+              <a:t>Shared — many users and programs draw on the same data, not private copies</a:t>
+            </a:r>
+            <a:endParaRPr lang="en-US" sz="1800" dirty="0"/>
+          </a:p>
+          <a:p>
+            <a:pPr marL="342900" indent="-342900">
+              <a:spcAft>
+                <a:spcPts val="800"/>
+              </a:spcAft>
+              <a:buSzPct val="100000"/>
+              <a:buChar char="•"/>
+            </a:pPr>
+            <a:r>
+              <a:rPr lang="en-US" sz="1800" dirty="0">
+                <a:solidFill>
+                  <a:srgbClr val="1F2429"/>
+                </a:solidFill>
+                <a:latin typeface="Calibri" pitchFamily="34" charset="0"/>
+                <a:ea typeface="Calibri" pitchFamily="34" charset="-122"/>
+                <a:cs typeface="Calibri" pitchFamily="34" charset="-120"/>
+              </a:rPr>
+              <a:t>Organized — structured so it can be found, related, and reasoned about</a:t>
+            </a:r>
+            <a:endParaRPr lang="en-US" sz="1800" dirty="0"/>
+          </a:p>
+          <a:p>
+            <a:pPr marL="342900" indent="-342900">
+              <a:spcAft>
+                <a:spcPts val="800"/>
+              </a:spcAft>
+              <a:buSzPct val="100000"/>
+              <a:buChar char="•"/>
+            </a:pPr>
+            <a:r>
+              <a:rPr lang="en-US" sz="1800" dirty="0">
+                <a:solidFill>
+                  <a:srgbClr val="1F2429"/>
+                </a:solidFill>
+                <a:latin typeface="Calibri" pitchFamily="34" charset="0"/>
+                <a:ea typeface="Calibri" pitchFamily="34" charset="-122"/>
+                <a:cs typeface="Calibri" pitchFamily="34" charset="-120"/>
+              </a:rPr>
+              <a:t>Logically related — records about the same real-world entity are known to be connected</a:t>
+            </a:r>
+            <a:endParaRPr lang="en-US" sz="1800" dirty="0"/>
+          </a:p>
+        </p:txBody>
+      </p:sp>
+      <p:sp>
+        <p:nvSpPr>
+          <p:cNvPr id="6" name="Text 4"/>
+          <p:cNvSpPr txBox="1"/>
+          <p:nvPr/>
+        </p:nvSpPr>
+        <p:spPr>
+          <a:xfrm>
+            <a:off x="640080" y="3703320"/>
+            <a:ext cx="10881360" cy="274320"/>
+          </a:xfrm>
+          <a:prstGeom prst="rect">
+            <a:avLst/>
+          </a:prstGeom>
+          <a:noFill/>
+          <a:ln/>
+        </p:spPr>
+        <p:txBody>
+          <a:bodyPr wrap="square" lIns="0" tIns="0" rIns="0" bIns="0" rtlCol="0" anchor="ctr"/>
+          <a:lstStyle/>
+          <a:p>
+            <a:pPr indent="0" marL="0">
+              <a:buNone/>
+            </a:pPr>
+            <a:r>
+              <a:rPr lang="en-US" sz="1800" b="1" dirty="0">
+                <a:solidFill>
+                  <a:srgbClr val="8A939B"/>
+                </a:solidFill>
+                <a:latin typeface="Calibri" pitchFamily="34" charset="0"/>
+                <a:ea typeface="Calibri" pitchFamily="34" charset="-122"/>
+                <a:cs typeface="Calibri" pitchFamily="34" charset="-120"/>
+              </a:rPr>
+              <a:t>From data to an information system</a:t>
+            </a:r>
+            <a:endParaRPr lang="en-US" sz="1800" dirty="0"/>
+          </a:p>
+        </p:txBody>
+      </p:sp>
+      <p:sp>
+        <p:nvSpPr>
+          <p:cNvPr id="7" name="Shape 5"/>
+          <p:cNvSpPr/>
+          <p:nvPr/>
+        </p:nvSpPr>
+        <p:spPr>
+          <a:xfrm>
+            <a:off x="640080" y="4023360"/>
+            <a:ext cx="3352800" cy="1097280"/>
+          </a:xfrm>
+          <a:prstGeom prst="roundRect">
+            <a:avLst>
+              <a:gd name="adj" fmla="val 6667"/>
+            </a:avLst>
+          </a:prstGeom>
+          <a:solidFill>
+            <a:srgbClr val="2FE6C4"/>
+          </a:solidFill>
+          <a:ln/>
+        </p:spPr>
+      </p:sp>
+      <p:sp>
+        <p:nvSpPr>
+          <p:cNvPr id="8" name="Text 6"/>
+          <p:cNvSpPr txBox="1"/>
+          <p:nvPr/>
+        </p:nvSpPr>
+        <p:spPr>
+          <a:xfrm>
+            <a:off x="777240" y="4133088"/>
+            <a:ext cx="3078480" cy="320040"/>
+          </a:xfrm>
+          <a:prstGeom prst="rect">
+            <a:avLst/>
+          </a:prstGeom>
+          <a:noFill/>
+          <a:ln/>
+        </p:spPr>
+        <p:txBody>
+          <a:bodyPr wrap="square" lIns="0" tIns="0" rIns="0" bIns="0" rtlCol="0" anchor="ctr"/>
+          <a:lstStyle/>
+          <a:p>
+            <a:pPr indent="0" marL="0">
+              <a:buNone/>
+            </a:pPr>
+            <a:r>
+              <a:rPr lang="en-US" sz="1600" b="1" dirty="0">
+                <a:solidFill>
+                  <a:srgbClr val="FFFFFF"/>
+                </a:solidFill>
+                <a:latin typeface="Calibri" pitchFamily="34" charset="0"/>
+                <a:ea typeface="Calibri" pitchFamily="34" charset="-122"/>
+                <a:cs typeface="Calibri" pitchFamily="34" charset="-120"/>
+              </a:rPr>
+              <a:t>Database</a:t>
+            </a:r>
+            <a:endParaRPr lang="en-US" sz="1400" dirty="0"/>
+          </a:p>
+        </p:txBody>
+      </p:sp>
+      <p:sp>
+        <p:nvSpPr>
+          <p:cNvPr id="9" name="Text 7"/>
+          <p:cNvSpPr txBox="1"/>
+          <p:nvPr/>
+        </p:nvSpPr>
+        <p:spPr>
+          <a:xfrm>
+            <a:off x="777240" y="4480560"/>
+            <a:ext cx="3078480" cy="548640"/>
+          </a:xfrm>
+          <a:prstGeom prst="rect">
+            <a:avLst/>
+          </a:prstGeom>
+          <a:noFill/>
+          <a:ln/>
+        </p:spPr>
+        <p:txBody>
+          <a:bodyPr wrap="square" lIns="0" tIns="0" rIns="0" bIns="0" rtlCol="0" anchor="t"/>
+          <a:lstStyle/>
+          <a:p>
+            <a:pPr indent="0" marL="0">
+              <a:buNone/>
+            </a:pPr>
+            <a:r>
+              <a:rPr lang="en-US" sz="1400" dirty="0">
+                <a:solidFill>
+                  <a:srgbClr val="FFFFFF"/>
+                </a:solidFill>
+                <a:latin typeface="Calibri" pitchFamily="34" charset="0"/>
+                <a:ea typeface="Calibri" pitchFamily="34" charset="-122"/>
+                <a:cs typeface="Calibri" pitchFamily="34" charset="-120"/>
+              </a:rPr>
+              <a:t>Organized, shared, logically related data</a:t>
+            </a:r>
+            <a:endParaRPr lang="en-US" sz="1400" dirty="0"/>
+          </a:p>
+        </p:txBody>
+      </p:sp>
+      <p:sp>
+        <p:nvSpPr>
+          <p:cNvPr id="10" name="Shape 8"/>
+          <p:cNvSpPr/>
+          <p:nvPr/>
+        </p:nvSpPr>
+        <p:spPr>
+          <a:xfrm>
+            <a:off x="4038600" y="4489704"/>
+            <a:ext cx="320040" cy="164592"/>
+          </a:xfrm>
+          <a:prstGeom prst="rightArrow">
+            <a:avLst/>
+          </a:prstGeom>
+          <a:solidFill>
+            <a:srgbClr val="8A939B"/>
+          </a:solidFill>
+          <a:ln/>
+        </p:spPr>
+      </p:sp>
+      <p:sp>
+        <p:nvSpPr>
+          <p:cNvPr id="11" name="Shape 9"/>
+          <p:cNvSpPr/>
+          <p:nvPr/>
+        </p:nvSpPr>
+        <p:spPr>
+          <a:xfrm>
+            <a:off x="4404360" y="4023360"/>
+            <a:ext cx="3352800" cy="1097280"/>
+          </a:xfrm>
+          <a:prstGeom prst="roundRect">
+            <a:avLst>
+              <a:gd name="adj" fmla="val 6667"/>
+            </a:avLst>
+          </a:prstGeom>
+          <a:solidFill>
+            <a:srgbClr val="8B7FD9"/>
+          </a:solidFill>
+          <a:ln/>
+        </p:spPr>
+      </p:sp>
+      <p:sp>
+        <p:nvSpPr>
+          <p:cNvPr id="12" name="Text 10"/>
+          <p:cNvSpPr txBox="1"/>
+          <p:nvPr/>
+        </p:nvSpPr>
+        <p:spPr>
+          <a:xfrm>
+            <a:off x="4541520" y="4133088"/>
+            <a:ext cx="3078480" cy="320040"/>
+          </a:xfrm>
+          <a:prstGeom prst="rect">
+            <a:avLst/>
+          </a:prstGeom>
+          <a:noFill/>
+          <a:ln/>
+        </p:spPr>
+        <p:txBody>
+          <a:bodyPr wrap="square" lIns="0" tIns="0" rIns="0" bIns="0" rtlCol="0" anchor="ctr"/>
+          <a:lstStyle/>
+          <a:p>
+            <a:pPr indent="0" marL="0">
+              <a:buNone/>
+            </a:pPr>
+            <a:r>
+              <a:rPr lang="en-US" sz="1600" b="1" dirty="0">
+                <a:solidFill>
+                  <a:srgbClr val="FFFFFF"/>
+                </a:solidFill>
+                <a:latin typeface="Calibri" pitchFamily="34" charset="0"/>
+                <a:ea typeface="Calibri" pitchFamily="34" charset="-122"/>
+                <a:cs typeface="Calibri" pitchFamily="34" charset="-120"/>
+              </a:rPr>
+              <a:t>DBMS</a:t>
+            </a:r>
+            <a:endParaRPr lang="en-US" sz="1400" dirty="0"/>
+          </a:p>
+        </p:txBody>
+      </p:sp>
+      <p:sp>
+        <p:nvSpPr>
+          <p:cNvPr id="13" name="Text 11"/>
+          <p:cNvSpPr txBox="1"/>
+          <p:nvPr/>
+        </p:nvSpPr>
+        <p:spPr>
+          <a:xfrm>
+            <a:off x="4541520" y="4480560"/>
+            <a:ext cx="3078480" cy="548640"/>
+          </a:xfrm>
+          <a:prstGeom prst="rect">
+            <a:avLst/>
+          </a:prstGeom>
+          <a:noFill/>
+          <a:ln/>
+        </p:spPr>
+        <p:txBody>
+          <a:bodyPr wrap="square" lIns="0" tIns="0" rIns="0" bIns="0" rtlCol="0" anchor="t"/>
+          <a:lstStyle/>
+          <a:p>
+            <a:pPr indent="0" marL="0">
+              <a:buNone/>
+            </a:pPr>
+            <a:r>
+              <a:rPr lang="en-US" sz="1400" dirty="0">
+                <a:solidFill>
+                  <a:srgbClr val="FFFFFF"/>
+                </a:solidFill>
+                <a:latin typeface="Calibri" pitchFamily="34" charset="0"/>
+                <a:ea typeface="Calibri" pitchFamily="34" charset="-122"/>
+                <a:cs typeface="Calibri" pitchFamily="34" charset="-120"/>
+              </a:rPr>
+              <a:t>Software that stores, retrieves, and protects that data</a:t>
+            </a:r>
+            <a:endParaRPr lang="en-US" sz="1400" dirty="0"/>
+          </a:p>
+        </p:txBody>
+      </p:sp>
+      <p:sp>
+        <p:nvSpPr>
+          <p:cNvPr id="14" name="Shape 12"/>
+          <p:cNvSpPr/>
+          <p:nvPr/>
+        </p:nvSpPr>
+        <p:spPr>
+          <a:xfrm>
+            <a:off x="7802880" y="4489704"/>
+            <a:ext cx="320040" cy="164592"/>
+          </a:xfrm>
+          <a:prstGeom prst="rightArrow">
+            <a:avLst/>
+          </a:prstGeom>
+          <a:solidFill>
+            <a:srgbClr val="8A939B"/>
+          </a:solidFill>
+          <a:ln/>
+        </p:spPr>
+      </p:sp>
+      <p:sp>
+        <p:nvSpPr>
+          <p:cNvPr id="15" name="Shape 13"/>
+          <p:cNvSpPr/>
+          <p:nvPr/>
+        </p:nvSpPr>
+        <p:spPr>
+          <a:xfrm>
+            <a:off x="8168640" y="4023360"/>
+            <a:ext cx="3352800" cy="1097280"/>
+          </a:xfrm>
+          <a:prstGeom prst="roundRect">
+            <a:avLst>
+              <a:gd name="adj" fmla="val 6667"/>
+            </a:avLst>
+          </a:prstGeom>
+          <a:solidFill>
+            <a:srgbClr val="E8A33D"/>
+          </a:solidFill>
+          <a:ln/>
+        </p:spPr>
+      </p:sp>
+      <p:sp>
+        <p:nvSpPr>
+          <p:cNvPr id="16" name="Text 14"/>
+          <p:cNvSpPr txBox="1"/>
+          <p:nvPr/>
+        </p:nvSpPr>
+        <p:spPr>
+          <a:xfrm>
+            <a:off x="8305800" y="4133088"/>
+            <a:ext cx="3078480" cy="320040"/>
+          </a:xfrm>
+          <a:prstGeom prst="rect">
+            <a:avLst/>
+          </a:prstGeom>
+          <a:noFill/>
+          <a:ln/>
+        </p:spPr>
+        <p:txBody>
+          <a:bodyPr wrap="square" lIns="0" tIns="0" rIns="0" bIns="0" rtlCol="0" anchor="ctr"/>
+          <a:lstStyle/>
+          <a:p>
+            <a:pPr indent="0" marL="0">
+              <a:buNone/>
+            </a:pPr>
+            <a:r>
+              <a:rPr lang="en-US" sz="1600" b="1" dirty="0">
+                <a:solidFill>
+                  <a:srgbClr val="FFFFFF"/>
+                </a:solidFill>
+                <a:latin typeface="Calibri" pitchFamily="34" charset="0"/>
+                <a:ea typeface="Calibri" pitchFamily="34" charset="-122"/>
+                <a:cs typeface="Calibri" pitchFamily="34" charset="-120"/>
+              </a:rPr>
+              <a:t>Information System</a:t>
+            </a:r>
+            <a:endParaRPr lang="en-US" sz="1400" dirty="0"/>
+          </a:p>
+        </p:txBody>
+      </p:sp>
+      <p:sp>
+        <p:nvSpPr>
+          <p:cNvPr id="17" name="Text 15"/>
+          <p:cNvSpPr txBox="1"/>
+          <p:nvPr/>
+        </p:nvSpPr>
+        <p:spPr>
+          <a:xfrm>
+            <a:off x="8305800" y="4480560"/>
+            <a:ext cx="3078480" cy="548640"/>
+          </a:xfrm>
+          <a:prstGeom prst="rect">
+            <a:avLst/>
+          </a:prstGeom>
+          <a:noFill/>
+          <a:ln/>
+        </p:spPr>
+        <p:txBody>
+          <a:bodyPr wrap="square" lIns="0" tIns="0" rIns="0" bIns="0" rtlCol="0" anchor="t"/>
+          <a:lstStyle/>
+          <a:p>
+            <a:pPr indent="0" marL="0">
+              <a:buNone/>
+            </a:pPr>
+            <a:r>
+              <a:rPr lang="en-US" sz="1400" dirty="0">
+                <a:solidFill>
+                  <a:srgbClr val="FFFFFF"/>
+                </a:solidFill>
+                <a:latin typeface="Calibri" pitchFamily="34" charset="0"/>
+                <a:ea typeface="Calibri" pitchFamily="34" charset="-122"/>
+                <a:cs typeface="Calibri" pitchFamily="34" charset="-120"/>
+              </a:rPr>
+              <a:t>Database + DBMS + applications + people + procedures</a:t>
+            </a:r>
+            <a:endParaRPr lang="en-US" sz="1400" dirty="0"/>
+          </a:p>
+        </p:txBody>
+      </p:sp>
+    </p:spTree>
+  </p:cSld>
+  <p:clrMapOvr>
+    <a:masterClrMapping/>
+  </p:clrMapOvr>
+</p:sld>
+</file>
+
+<file path=ppt/slides/slide4.xml><?xml version="1.0" encoding="utf-8"?>
+<p:sld xmlns:a="http://schemas.openxmlformats.org/drawingml/2006/main" xmlns:r="http://schemas.openxmlformats.org/officeDocument/2006/relationships" xmlns:p="http://schemas.openxmlformats.org/presentationml/2006/main">
+  <p:cSld name="Slide 4">
+    <p:bg>
+      <p:bgPr>
+        <a:solidFill>
+          <a:srgbClr val="F7F8F9"/>
+        </a:solidFill>
+      </p:bgPr>
+    </p:bg>
+    <p:spTree>
+      <p:nvGrpSpPr>
+        <p:cNvPr id="1" name=""/>
+        <p:cNvGrpSpPr/>
+        <p:nvPr/>
+      </p:nvGrpSpPr>
+      <p:grpSpPr>
+        <a:xfrm>
+          <a:off x="0" y="0"/>
+          <a:ext cx="0" cy="0"/>
+          <a:chOff x="0" y="0"/>
+          <a:chExt cx="0" cy="0"/>
+        </a:xfrm>
+      </p:grpSpPr>
+      <p:sp>
+        <p:nvSpPr>
+          <p:cNvPr id="2" name="Text 0"/>
+          <p:cNvSpPr txBox="1"/>
+          <p:nvPr/>
+        </p:nvSpPr>
+        <p:spPr>
+          <a:xfrm>
+            <a:off x="548640" y="365760"/>
+            <a:ext cx="11064240" cy="731520"/>
+          </a:xfrm>
+          <a:prstGeom prst="rect">
+            <a:avLst/>
+          </a:prstGeom>
+          <a:noFill/>
+          <a:ln/>
+        </p:spPr>
+        <p:txBody>
+          <a:bodyPr wrap="square" lIns="0" tIns="0" rIns="0" bIns="0" rtlCol="0" anchor="ctr"/>
+          <a:lstStyle/>
+          <a:p>
+            <a:pPr indent="0" marL="0">
+              <a:buNone/>
+            </a:pPr>
+            <a:r>
+              <a:rPr lang="en-US" sz="2800" b="1" dirty="0">
+                <a:solidFill>
+                  <a:srgbClr val="1F2429"/>
+                </a:solidFill>
+                <a:latin typeface="Calibri" pitchFamily="34" charset="0"/>
+                <a:ea typeface="Calibri" pitchFamily="34" charset="-122"/>
+                <a:cs typeface="Calibri" pitchFamily="34" charset="-120"/>
+              </a:rPr>
+              <a:t>Database Applications</a:t>
+            </a:r>
+            <a:endParaRPr lang="en-US" sz="2800" dirty="0"/>
+          </a:p>
+        </p:txBody>
+      </p:sp>
+      <p:sp>
+        <p:nvSpPr>
+          <p:cNvPr id="3" name="Text 1"/>
+          <p:cNvSpPr txBox="1"/>
+          <p:nvPr/>
+        </p:nvSpPr>
+        <p:spPr>
+          <a:xfrm>
+            <a:off x="9951415" y="6455664"/>
+            <a:ext cx="2011680" cy="292608"/>
+          </a:xfrm>
+          <a:prstGeom prst="rect">
+            <a:avLst/>
+          </a:prstGeom>
+          <a:noFill/>
+          <a:ln/>
+        </p:spPr>
+        <p:txBody>
+          <a:bodyPr wrap="square" lIns="0" tIns="0" rIns="0" bIns="0" rtlCol="0" anchor="ctr"/>
+          <a:lstStyle/>
+          <a:p>
+            <a:pPr algn="r" indent="0" marL="0">
+              <a:buNone/>
+            </a:pPr>
+            <a:r>
+              <a:rPr lang="en-US" sz="1200" u="sng" dirty="0">
+                <a:solidFill>
+                  <a:srgbClr val="8A939B"/>
+                </a:solidFill>
+                <a:latin typeface="Calibri" pitchFamily="34" charset="0"/>
+                <a:ea typeface="Calibri" pitchFamily="34" charset="-122"/>
+                <a:cs typeface="Calibri" pitchFamily="34" charset="-120"/>
+                <a:hlinkClick r:id="rId1" invalidUrl="" action="" tgtFrame="" tooltip="" history="1" highlightClick="0" endSnd="0">
+                  <a:extLst>
+                    <a:ext uri="{A12FA001-AC4F-418D-AE19-62706E023703}">
+                      <ahyp:hlinkClr xmlns:ahyp="http://schemas.microsoft.com/office/drawing/2018/hyperlinkcolor" val="tx"/>
+                    </a:ext>
+                  </a:extLst>
+                </a:hlinkClick>
+              </a:rPr>
+              <a:t>cuinotes.com</a:t>
+            </a:r>
+            <a:pPr algn="r" indent="0" marL="0">
+              <a:buNone/>
+            </a:pPr>
+            <a:r>
+              <a:rPr lang="en-US" sz="1200" dirty="0">
+                <a:solidFill>
+                  <a:srgbClr val="8A939B"/>
+                </a:solidFill>
+                <a:latin typeface="Calibri" pitchFamily="34" charset="0"/>
+                <a:ea typeface="Calibri" pitchFamily="34" charset="-122"/>
+                <a:cs typeface="Calibri" pitchFamily="34" charset="-120"/>
+              </a:rPr>
+              <a:t>  ·  5</a:t>
+            </a:r>
+            <a:endParaRPr lang="en-US" sz="1200" dirty="0"/>
+          </a:p>
+        </p:txBody>
+      </p:sp>
+      <p:graphicFrame>
+        <p:nvGraphicFramePr>
+          <p:cNvPr id="5" name="Table 0"/>
+          <p:cNvGraphicFramePr>
+            <a:graphicFrameLocks noGrp="1"/>
+          </p:cNvGraphicFramePr>
+          <p:nvPr>
+            <p:extLst>
+              <p:ext uri="{D42A27DB-BD31-4B8C-83A1-F6EECF244321}">
+                <p14:modId xmlns:p14="http://schemas.microsoft.com/office/powerpoint/2010/main" val="1579011935"/>
+              </p:ext>
+            </p:extLst>
+          </p:nvPr>
+        </p:nvGraphicFramePr>
+        <p:xfrm>
+          <a:off x="640080" y="1234440"/>
+          <a:ext cx="10881360" cy="3108960"/>
+        </p:xfrm>
+        <a:graphic>
+          <a:graphicData uri="http://schemas.openxmlformats.org/drawingml/2006/table">
+            <a:tbl>
+              <a:tblPr/>
+              <a:tblGrid>
+                <a:gridCol w="2377440"/>
+                <a:gridCol w="4663440"/>
+                <a:gridCol w="3840480"/>
+              </a:tblGrid>
+              <a:tr h="444137">
+                <a:tc>
+                  <a:txBody>
+                    <a:bodyPr/>
+                    <a:lstStyle/>
+                    <a:p>
+                      <a:pPr indent="0" marL="0">
+                        <a:buNone/>
+                      </a:pPr>
+                      <a:r>
+                        <a:rPr lang="en-US" sz="1400" b="1" dirty="0">
+                          <a:solidFill>
+                            <a:srgbClr val="FFFFFF"/>
+                          </a:solidFill>
+                          <a:latin typeface="Calibri" pitchFamily="34" charset="0"/>
+                          <a:ea typeface="Calibri" pitchFamily="34" charset="-122"/>
+                          <a:cs typeface="Calibri" pitchFamily="34" charset="-120"/>
+                        </a:rPr>
+                        <a:t>Domain</a:t>
+                      </a:r>
+                      <a:endParaRPr lang="en-US" sz="1400" dirty="0">
+                        <a:latin typeface="Calibri" charset="0"/>
+                        <a:ea typeface="Calibri" charset="0"/>
+                        <a:cs typeface="Calibri" charset="0"/>
+                      </a:endParaRPr>
+                    </a:p>
+                  </a:txBody>
+                  <a:tcPr marL="91440" marR="91440" marT="45720" marB="45720" anchor="ctr">
+                    <a:lnL w="9525" cap="flat" cmpd="sng" algn="ctr">
+                      <a:solidFill>
+                        <a:srgbClr val="E1E4E8"/>
+                      </a:solidFill>
+                      <a:prstDash val="solid"/>
+                      <a:round/>
+                      <a:headEnd type="none" w="med" len="med"/>
+                      <a:tailEnd type="none" w="med" len="med"/>
+                    </a:lnL>
+                    <a:lnR w="9525" cap="flat" cmpd="sng" algn="ctr">
+                      <a:solidFill>
+                        <a:srgbClr val="E1E4E8"/>
+                      </a:solidFill>
+                      <a:prstDash val="solid"/>
+                      <a:round/>
+                      <a:headEnd type="none" w="med" len="med"/>
+                      <a:tailEnd type="none" w="med" len="med"/>
+                    </a:lnR>
+                    <a:lnT w="9525" cap="flat" cmpd="sng" algn="ctr">
+                      <a:solidFill>
+                        <a:srgbClr val="E1E4E8"/>
+                      </a:solidFill>
+                      <a:prstDash val="solid"/>
+                      <a:round/>
+                      <a:headEnd type="none" w="med" len="med"/>
+                      <a:tailEnd type="none" w="med" len="med"/>
+                    </a:lnT>
+                    <a:lnB w="9525" cap="flat" cmpd="sng" algn="ctr">
+                      <a:solidFill>
+                        <a:srgbClr val="E1E4E8"/>
+                      </a:solidFill>
+                      <a:prstDash val="solid"/>
+                      <a:round/>
+                      <a:headEnd type="none" w="med" len="med"/>
+                      <a:tailEnd type="none" w="med" len="med"/>
+                    </a:lnB>
+                    <a:solidFill>
+                      <a:srgbClr val="1F2429"/>
+                    </a:solidFill>
+                  </a:tcPr>
+                </a:tc>
+                <a:tc>
+                  <a:txBody>
+                    <a:bodyPr/>
+                    <a:lstStyle/>
+                    <a:p>
+                      <a:pPr indent="0" marL="0">
+                        <a:buNone/>
+                      </a:pPr>
+                      <a:r>
+                        <a:rPr lang="en-US" sz="1400" b="1" dirty="0">
+                          <a:solidFill>
+                            <a:srgbClr val="FFFFFF"/>
+                          </a:solidFill>
+                          <a:latin typeface="Calibri" pitchFamily="34" charset="0"/>
+                          <a:ea typeface="Calibri" pitchFamily="34" charset="-122"/>
+                          <a:cs typeface="Calibri" pitchFamily="34" charset="-120"/>
+                        </a:rPr>
+                        <a:t>What's stored</a:t>
+                      </a:r>
+                      <a:endParaRPr lang="en-US" sz="1400" dirty="0">
+                        <a:latin typeface="Calibri" charset="0"/>
+                        <a:ea typeface="Calibri" charset="0"/>
+                        <a:cs typeface="Calibri" charset="0"/>
+                      </a:endParaRPr>
+                    </a:p>
+                  </a:txBody>
+                  <a:tcPr marL="91440" marR="91440" marT="45720" marB="45720" anchor="ctr">
+                    <a:lnL w="9525" cap="flat" cmpd="sng" algn="ctr">
+                      <a:solidFill>
+                        <a:srgbClr val="E1E4E8"/>
+                      </a:solidFill>
+                      <a:prstDash val="solid"/>
+                      <a:round/>
+                      <a:headEnd type="none" w="med" len="med"/>
+                      <a:tailEnd type="none" w="med" len="med"/>
+                    </a:lnL>
+                    <a:lnR w="9525" cap="flat" cmpd="sng" algn="ctr">
+                      <a:solidFill>
+                        <a:srgbClr val="E1E4E8"/>
+                      </a:solidFill>
+                      <a:prstDash val="solid"/>
+                      <a:round/>
+                      <a:headEnd type="none" w="med" len="med"/>
+                      <a:tailEnd type="none" w="med" len="med"/>
+                    </a:lnR>
+                    <a:lnT w="9525" cap="flat" cmpd="sng" algn="ctr">
+                      <a:solidFill>
+                        <a:srgbClr val="E1E4E8"/>
+                      </a:solidFill>
+                      <a:prstDash val="solid"/>
+                      <a:round/>
+                      <a:headEnd type="none" w="med" len="med"/>
+                      <a:tailEnd type="none" w="med" len="med"/>
+                    </a:lnT>
+                    <a:lnB w="9525" cap="flat" cmpd="sng" algn="ctr">
+                      <a:solidFill>
+                        <a:srgbClr val="E1E4E8"/>
+                      </a:solidFill>
+                      <a:prstDash val="solid"/>
+                      <a:round/>
+                      <a:headEnd type="none" w="med" len="med"/>
+                      <a:tailEnd type="none" w="med" len="med"/>
+                    </a:lnB>
+                    <a:solidFill>
+                      <a:srgbClr val="1F2429"/>
+                    </a:solidFill>
+                  </a:tcPr>
+                </a:tc>
+                <a:tc>
+                  <a:txBody>
+                    <a:bodyPr/>
+                    <a:lstStyle/>
+                    <a:p>
+                      <a:pPr indent="0" marL="0">
+                        <a:buNone/>
+                      </a:pPr>
+                      <a:r>
+                        <a:rPr lang="en-US" sz="1400" b="1" dirty="0">
+                          <a:solidFill>
+                            <a:srgbClr val="FFFFFF"/>
+                          </a:solidFill>
+                          <a:latin typeface="Calibri" pitchFamily="34" charset="0"/>
+                          <a:ea typeface="Calibri" pitchFamily="34" charset="-122"/>
+                          <a:cs typeface="Calibri" pitchFamily="34" charset="-120"/>
+                        </a:rPr>
+                        <a:t>Example</a:t>
+                      </a:r>
+                      <a:endParaRPr lang="en-US" sz="1400" dirty="0">
+                        <a:latin typeface="Calibri" charset="0"/>
+                        <a:ea typeface="Calibri" charset="0"/>
+                        <a:cs typeface="Calibri" charset="0"/>
+                      </a:endParaRPr>
+                    </a:p>
+                  </a:txBody>
+                  <a:tcPr marL="91440" marR="91440" marT="45720" marB="45720" anchor="ctr">
+                    <a:lnL w="9525" cap="flat" cmpd="sng" algn="ctr">
+                      <a:solidFill>
+                        <a:srgbClr val="E1E4E8"/>
+                      </a:solidFill>
+                      <a:prstDash val="solid"/>
+                      <a:round/>
+                      <a:headEnd type="none" w="med" len="med"/>
+                      <a:tailEnd type="none" w="med" len="med"/>
+                    </a:lnL>
+                    <a:lnR w="9525" cap="flat" cmpd="sng" algn="ctr">
+                      <a:solidFill>
+                        <a:srgbClr val="E1E4E8"/>
+                      </a:solidFill>
+                      <a:prstDash val="solid"/>
+                      <a:round/>
+                      <a:headEnd type="none" w="med" len="med"/>
+                      <a:tailEnd type="none" w="med" len="med"/>
+                    </a:lnR>
+                    <a:lnT w="9525" cap="flat" cmpd="sng" algn="ctr">
+                      <a:solidFill>
+                        <a:srgbClr val="E1E4E8"/>
+                      </a:solidFill>
+                      <a:prstDash val="solid"/>
+                      <a:round/>
+                      <a:headEnd type="none" w="med" len="med"/>
+                      <a:tailEnd type="none" w="med" len="med"/>
+                    </a:lnT>
+                    <a:lnB w="9525" cap="flat" cmpd="sng" algn="ctr">
+                      <a:solidFill>
+                        <a:srgbClr val="E1E4E8"/>
+                      </a:solidFill>
+                      <a:prstDash val="solid"/>
+                      <a:round/>
+                      <a:headEnd type="none" w="med" len="med"/>
+                      <a:tailEnd type="none" w="med" len="med"/>
+                    </a:lnB>
+                    <a:solidFill>
+                      <a:srgbClr val="1F2429"/>
+                    </a:solidFill>
+                  </a:tcPr>
+                </a:tc>
+              </a:tr>
+              <a:tr h="444137">
+                <a:tc>
+                  <a:txBody>
+                    <a:bodyPr/>
+                    <a:lstStyle/>
+                    <a:p>
+                      <a:pPr indent="0" marL="0">
+                        <a:buNone/>
+                      </a:pPr>
+                      <a:r>
+                        <a:rPr lang="en-US" sz="1400" dirty="0">
+                          <a:solidFill>
+                            <a:srgbClr val="1F2429"/>
+                          </a:solidFill>
+                          <a:latin typeface="Calibri" pitchFamily="34" charset="0"/>
+                          <a:ea typeface="Calibri" pitchFamily="34" charset="-122"/>
+                          <a:cs typeface="Calibri" pitchFamily="34" charset="-120"/>
+                        </a:rPr>
+                        <a:t>Banking</a:t>
+                      </a:r>
+                      <a:endParaRPr lang="en-US" sz="1400" dirty="0">
+                        <a:latin typeface="Calibri" charset="0"/>
+                        <a:ea typeface="Calibri" charset="0"/>
+                        <a:cs typeface="Calibri" charset="0"/>
+                      </a:endParaRPr>
+                    </a:p>
+                  </a:txBody>
+                  <a:tcPr marL="91440" marR="91440" marT="45720" marB="45720" anchor="ctr">
+                    <a:lnL w="9525" cap="flat" cmpd="sng" algn="ctr">
+                      <a:solidFill>
+                        <a:srgbClr val="E1E4E8"/>
+                      </a:solidFill>
+                      <a:prstDash val="solid"/>
+                      <a:round/>
+                      <a:headEnd type="none" w="med" len="med"/>
+                      <a:tailEnd type="none" w="med" len="med"/>
+                    </a:lnL>
+                    <a:lnR w="9525" cap="flat" cmpd="sng" algn="ctr">
+                      <a:solidFill>
+                        <a:srgbClr val="E1E4E8"/>
+                      </a:solidFill>
+                      <a:prstDash val="solid"/>
+                      <a:round/>
+                      <a:headEnd type="none" w="med" len="med"/>
+                      <a:tailEnd type="none" w="med" len="med"/>
+                    </a:lnR>
+                    <a:lnT w="9525" cap="flat" cmpd="sng" algn="ctr">
+                      <a:solidFill>
+                        <a:srgbClr val="E1E4E8"/>
+                      </a:solidFill>
+                      <a:prstDash val="solid"/>
+                      <a:round/>
+                      <a:headEnd type="none" w="med" len="med"/>
+                      <a:tailEnd type="none" w="med" len="med"/>
+                    </a:lnT>
+                    <a:lnB w="9525" cap="flat" cmpd="sng" algn="ctr">
+                      <a:solidFill>
+                        <a:srgbClr val="E1E4E8"/>
+                      </a:solidFill>
+                      <a:prstDash val="solid"/>
+                      <a:round/>
+                      <a:headEnd type="none" w="med" len="med"/>
+                      <a:tailEnd type="none" w="med" len="med"/>
+                    </a:lnB>
+                  </a:tcPr>
+                </a:tc>
+                <a:tc>
+                  <a:txBody>
+                    <a:bodyPr/>
+                    <a:lstStyle/>
+                    <a:p>
+                      <a:pPr indent="0" marL="0">
+                        <a:buNone/>
+                      </a:pPr>
+                      <a:r>
+                        <a:rPr lang="en-US" sz="1400" dirty="0">
+                          <a:solidFill>
+                            <a:srgbClr val="1F2429"/>
+                          </a:solidFill>
+                          <a:latin typeface="Calibri" pitchFamily="34" charset="0"/>
+                          <a:ea typeface="Calibri" pitchFamily="34" charset="-122"/>
+                          <a:cs typeface="Calibri" pitchFamily="34" charset="-120"/>
+                        </a:rPr>
+                        <a:t>Accounts, balances, transactions</a:t>
+                      </a:r>
+                      <a:endParaRPr lang="en-US" sz="1400" dirty="0">
+                        <a:latin typeface="Calibri" charset="0"/>
+                        <a:ea typeface="Calibri" charset="0"/>
+                        <a:cs typeface="Calibri" charset="0"/>
+                      </a:endParaRPr>
+                    </a:p>
+                  </a:txBody>
+                  <a:tcPr marL="91440" marR="91440" marT="45720" marB="45720" anchor="ctr">
+                    <a:lnL w="9525" cap="flat" cmpd="sng" algn="ctr">
+                      <a:solidFill>
+                        <a:srgbClr val="E1E4E8"/>
+                      </a:solidFill>
+                      <a:prstDash val="solid"/>
+                      <a:round/>
+                      <a:headEnd type="none" w="med" len="med"/>
+                      <a:tailEnd type="none" w="med" len="med"/>
+                    </a:lnL>
+                    <a:lnR w="9525" cap="flat" cmpd="sng" algn="ctr">
+                      <a:solidFill>
+                        <a:srgbClr val="E1E4E8"/>
+                      </a:solidFill>
+                      <a:prstDash val="solid"/>
+                      <a:round/>
+                      <a:headEnd type="none" w="med" len="med"/>
+                      <a:tailEnd type="none" w="med" len="med"/>
+                    </a:lnR>
+                    <a:lnT w="9525" cap="flat" cmpd="sng" algn="ctr">
+                      <a:solidFill>
+                        <a:srgbClr val="E1E4E8"/>
+                      </a:solidFill>
+                      <a:prstDash val="solid"/>
+                      <a:round/>
+                      <a:headEnd type="none" w="med" len="med"/>
+                      <a:tailEnd type="none" w="med" len="med"/>
+                    </a:lnT>
+                    <a:lnB w="9525" cap="flat" cmpd="sng" algn="ctr">
+                      <a:solidFill>
+                        <a:srgbClr val="E1E4E8"/>
+                      </a:solidFill>
+                      <a:prstDash val="solid"/>
+                      <a:round/>
+                      <a:headEnd type="none" w="med" len="med"/>
+                      <a:tailEnd type="none" w="med" len="med"/>
+                    </a:lnB>
+                  </a:tcPr>
+                </a:tc>
+                <a:tc>
+                  <a:txBody>
+                    <a:bodyPr/>
+                    <a:lstStyle/>
+                    <a:p>
+                      <a:pPr indent="0" marL="0">
+                        <a:buNone/>
+                      </a:pPr>
+                      <a:r>
+                        <a:rPr lang="en-US" sz="1400" dirty="0">
+                          <a:solidFill>
+                            <a:srgbClr val="1F2429"/>
+                          </a:solidFill>
+                          <a:latin typeface="Calibri" pitchFamily="34" charset="0"/>
+                          <a:ea typeface="Calibri" pitchFamily="34" charset="-122"/>
+                          <a:cs typeface="Calibri" pitchFamily="34" charset="-120"/>
+                        </a:rPr>
+                        <a:t>Approving a debit card transaction</a:t>
+                      </a:r>
+                      <a:endParaRPr lang="en-US" sz="1400" dirty="0">
+                        <a:latin typeface="Calibri" charset="0"/>
+                        <a:ea typeface="Calibri" charset="0"/>
+                        <a:cs typeface="Calibri" charset="0"/>
+                      </a:endParaRPr>
+                    </a:p>
+                  </a:txBody>
+                  <a:tcPr marL="91440" marR="91440" marT="45720" marB="45720" anchor="ctr">
+                    <a:lnL w="9525" cap="flat" cmpd="sng" algn="ctr">
+                      <a:solidFill>
+                        <a:srgbClr val="E1E4E8"/>
+                      </a:solidFill>
+                      <a:prstDash val="solid"/>
+                      <a:round/>
+                      <a:headEnd type="none" w="med" len="med"/>
+                      <a:tailEnd type="none" w="med" len="med"/>
+                    </a:lnL>
+                    <a:lnR w="9525" cap="flat" cmpd="sng" algn="ctr">
+                      <a:solidFill>
+                        <a:srgbClr val="E1E4E8"/>
+                      </a:solidFill>
+                      <a:prstDash val="solid"/>
+                      <a:round/>
+                      <a:headEnd type="none" w="med" len="med"/>
+                      <a:tailEnd type="none" w="med" len="med"/>
+                    </a:lnR>
+                    <a:lnT w="9525" cap="flat" cmpd="sng" algn="ctr">
+                      <a:solidFill>
+                        <a:srgbClr val="E1E4E8"/>
+                      </a:solidFill>
+                      <a:prstDash val="solid"/>
+                      <a:round/>
+                      <a:headEnd type="none" w="med" len="med"/>
+                      <a:tailEnd type="none" w="med" len="med"/>
+                    </a:lnT>
+                    <a:lnB w="9525" cap="flat" cmpd="sng" algn="ctr">
+                      <a:solidFill>
+                        <a:srgbClr val="E1E4E8"/>
+                      </a:solidFill>
+                      <a:prstDash val="solid"/>
+                      <a:round/>
+                      <a:headEnd type="none" w="med" len="med"/>
+                      <a:tailEnd type="none" w="med" len="med"/>
+                    </a:lnB>
+                  </a:tcPr>
+                </a:tc>
+              </a:tr>
+              <a:tr h="444137">
+                <a:tc>
+                  <a:txBody>
+                    <a:bodyPr/>
+                    <a:lstStyle/>
+                    <a:p>
+                      <a:pPr indent="0" marL="0">
+                        <a:buNone/>
+                      </a:pPr>
+                      <a:r>
+                        <a:rPr lang="en-US" sz="1400" dirty="0">
+                          <a:solidFill>
+                            <a:srgbClr val="1F2429"/>
+                          </a:solidFill>
+                          <a:latin typeface="Calibri" pitchFamily="34" charset="0"/>
+                          <a:ea typeface="Calibri" pitchFamily="34" charset="-122"/>
+                          <a:cs typeface="Calibri" pitchFamily="34" charset="-120"/>
+                        </a:rPr>
+                        <a:t>Airlines</a:t>
+                      </a:r>
+                      <a:endParaRPr lang="en-US" sz="1400" dirty="0">
+                        <a:latin typeface="Calibri" charset="0"/>
+                        <a:ea typeface="Calibri" charset="0"/>
+                        <a:cs typeface="Calibri" charset="0"/>
+                      </a:endParaRPr>
+                    </a:p>
+                  </a:txBody>
+                  <a:tcPr marL="91440" marR="91440" marT="45720" marB="45720" anchor="ctr">
+                    <a:lnL w="9525" cap="flat" cmpd="sng" algn="ctr">
+                      <a:solidFill>
+                        <a:srgbClr val="E1E4E8"/>
+                      </a:solidFill>
+                      <a:prstDash val="solid"/>
+                      <a:round/>
+                      <a:headEnd type="none" w="med" len="med"/>
+                      <a:tailEnd type="none" w="med" len="med"/>
+                    </a:lnL>
+                    <a:lnR w="9525" cap="flat" cmpd="sng" algn="ctr">
+                      <a:solidFill>
+                        <a:srgbClr val="E1E4E8"/>
+                      </a:solidFill>
+                      <a:prstDash val="solid"/>
+                      <a:round/>
+                      <a:headEnd type="none" w="med" len="med"/>
+                      <a:tailEnd type="none" w="med" len="med"/>
+                    </a:lnR>
+                    <a:lnT w="9525" cap="flat" cmpd="sng" algn="ctr">
+                      <a:solidFill>
+                        <a:srgbClr val="E1E4E8"/>
+                      </a:solidFill>
+                      <a:prstDash val="solid"/>
+                      <a:round/>
+                      <a:headEnd type="none" w="med" len="med"/>
+                      <a:tailEnd type="none" w="med" len="med"/>
+                    </a:lnT>
+                    <a:lnB w="9525" cap="flat" cmpd="sng" algn="ctr">
+                      <a:solidFill>
+                        <a:srgbClr val="E1E4E8"/>
+                      </a:solidFill>
+                      <a:prstDash val="solid"/>
+                      <a:round/>
+                      <a:headEnd type="none" w="med" len="med"/>
+                      <a:tailEnd type="none" w="med" len="med"/>
+                    </a:lnB>
+                  </a:tcPr>
+                </a:tc>
+                <a:tc>
+                  <a:txBody>
+                    <a:bodyPr/>
+                    <a:lstStyle/>
+                    <a:p>
+                      <a:pPr indent="0" marL="0">
+                        <a:buNone/>
+                      </a:pPr>
+                      <a:r>
+                        <a:rPr lang="en-US" sz="1400" dirty="0">
+                          <a:solidFill>
+                            <a:srgbClr val="1F2429"/>
+                          </a:solidFill>
+                          <a:latin typeface="Calibri" pitchFamily="34" charset="0"/>
+                          <a:ea typeface="Calibri" pitchFamily="34" charset="-122"/>
+                          <a:cs typeface="Calibri" pitchFamily="34" charset="-120"/>
+                        </a:rPr>
+                        <a:t>Reservations, schedules, seat maps</a:t>
+                      </a:r>
+                      <a:endParaRPr lang="en-US" sz="1400" dirty="0">
+                        <a:latin typeface="Calibri" charset="0"/>
+                        <a:ea typeface="Calibri" charset="0"/>
+                        <a:cs typeface="Calibri" charset="0"/>
+                      </a:endParaRPr>
+                    </a:p>
+                  </a:txBody>
+                  <a:tcPr marL="91440" marR="91440" marT="45720" marB="45720" anchor="ctr">
+                    <a:lnL w="9525" cap="flat" cmpd="sng" algn="ctr">
+                      <a:solidFill>
+                        <a:srgbClr val="E1E4E8"/>
+                      </a:solidFill>
+                      <a:prstDash val="solid"/>
+                      <a:round/>
+                      <a:headEnd type="none" w="med" len="med"/>
+                      <a:tailEnd type="none" w="med" len="med"/>
+                    </a:lnL>
+                    <a:lnR w="9525" cap="flat" cmpd="sng" algn="ctr">
+                      <a:solidFill>
+                        <a:srgbClr val="E1E4E8"/>
+                      </a:solidFill>
+                      <a:prstDash val="solid"/>
+                      <a:round/>
+                      <a:headEnd type="none" w="med" len="med"/>
+                      <a:tailEnd type="none" w="med" len="med"/>
+                    </a:lnR>
+                    <a:lnT w="9525" cap="flat" cmpd="sng" algn="ctr">
+                      <a:solidFill>
+                        <a:srgbClr val="E1E4E8"/>
+                      </a:solidFill>
+                      <a:prstDash val="solid"/>
+                      <a:round/>
+                      <a:headEnd type="none" w="med" len="med"/>
+                      <a:tailEnd type="none" w="med" len="med"/>
+                    </a:lnT>
+                    <a:lnB w="9525" cap="flat" cmpd="sng" algn="ctr">
+                      <a:solidFill>
+                        <a:srgbClr val="E1E4E8"/>
+                      </a:solidFill>
+                      <a:prstDash val="solid"/>
+                      <a:round/>
+                      <a:headEnd type="none" w="med" len="med"/>
+                      <a:tailEnd type="none" w="med" len="med"/>
+                    </a:lnB>
+                  </a:tcPr>
+                </a:tc>
+                <a:tc>
+                  <a:txBody>
+                    <a:bodyPr/>
+                    <a:lstStyle/>
+                    <a:p>
+                      <a:pPr indent="0" marL="0">
+                        <a:buNone/>
+                      </a:pPr>
+                      <a:r>
+                        <a:rPr lang="en-US" sz="1400" dirty="0">
+                          <a:solidFill>
+                            <a:srgbClr val="1F2429"/>
+                          </a:solidFill>
+                          <a:latin typeface="Calibri" pitchFamily="34" charset="0"/>
+                          <a:ea typeface="Calibri" pitchFamily="34" charset="-122"/>
+                          <a:cs typeface="Calibri" pitchFamily="34" charset="-120"/>
+                        </a:rPr>
+                        <a:t>Confirming a seat on flight PK-301</a:t>
+                      </a:r>
+                      <a:endParaRPr lang="en-US" sz="1400" dirty="0">
+                        <a:latin typeface="Calibri" charset="0"/>
+                        <a:ea typeface="Calibri" charset="0"/>
+                        <a:cs typeface="Calibri" charset="0"/>
+                      </a:endParaRPr>
+                    </a:p>
+                  </a:txBody>
+                  <a:tcPr marL="91440" marR="91440" marT="45720" marB="45720" anchor="ctr">
+                    <a:lnL w="9525" cap="flat" cmpd="sng" algn="ctr">
+                      <a:solidFill>
+                        <a:srgbClr val="E1E4E8"/>
+                      </a:solidFill>
+                      <a:prstDash val="solid"/>
+                      <a:round/>
+                      <a:headEnd type="none" w="med" len="med"/>
+                      <a:tailEnd type="none" w="med" len="med"/>
+                    </a:lnL>
+                    <a:lnR w="9525" cap="flat" cmpd="sng" algn="ctr">
+                      <a:solidFill>
+                        <a:srgbClr val="E1E4E8"/>
+                      </a:solidFill>
+                      <a:prstDash val="solid"/>
+                      <a:round/>
+                      <a:headEnd type="none" w="med" len="med"/>
+                      <a:tailEnd type="none" w="med" len="med"/>
+                    </a:lnR>
+                    <a:lnT w="9525" cap="flat" cmpd="sng" algn="ctr">
+                      <a:solidFill>
+                        <a:srgbClr val="E1E4E8"/>
+                      </a:solidFill>
+                      <a:prstDash val="solid"/>
+                      <a:round/>
+                      <a:headEnd type="none" w="med" len="med"/>
+                      <a:tailEnd type="none" w="med" len="med"/>
+                    </a:lnT>
+                    <a:lnB w="9525" cap="flat" cmpd="sng" algn="ctr">
+                      <a:solidFill>
+                        <a:srgbClr val="E1E4E8"/>
+                      </a:solidFill>
+                      <a:prstDash val="solid"/>
+                      <a:round/>
+                      <a:headEnd type="none" w="med" len="med"/>
+                      <a:tailEnd type="none" w="med" len="med"/>
+                    </a:lnB>
+                  </a:tcPr>
+                </a:tc>
+              </a:tr>
+              <a:tr h="444137">
+                <a:tc>
+                  <a:txBody>
+                    <a:bodyPr/>
+                    <a:lstStyle/>
+                    <a:p>
+                      <a:pPr indent="0" marL="0">
+                        <a:buNone/>
+                      </a:pPr>
+                      <a:r>
+                        <a:rPr lang="en-US" sz="1400" dirty="0">
+                          <a:solidFill>
+                            <a:srgbClr val="1F2429"/>
+                          </a:solidFill>
+                          <a:latin typeface="Calibri" pitchFamily="34" charset="0"/>
+                          <a:ea typeface="Calibri" pitchFamily="34" charset="-122"/>
+                          <a:cs typeface="Calibri" pitchFamily="34" charset="-120"/>
+                        </a:rPr>
+                        <a:t>University records</a:t>
+                      </a:r>
+                      <a:endParaRPr lang="en-US" sz="1400" dirty="0">
+                        <a:latin typeface="Calibri" charset="0"/>
+                        <a:ea typeface="Calibri" charset="0"/>
+                        <a:cs typeface="Calibri" charset="0"/>
+                      </a:endParaRPr>
+                    </a:p>
+                  </a:txBody>
+                  <a:tcPr marL="91440" marR="91440" marT="45720" marB="45720" anchor="ctr">
+                    <a:lnL w="9525" cap="flat" cmpd="sng" algn="ctr">
+                      <a:solidFill>
+                        <a:srgbClr val="E1E4E8"/>
+                      </a:solidFill>
+                      <a:prstDash val="solid"/>
+                      <a:round/>
+                      <a:headEnd type="none" w="med" len="med"/>
+                      <a:tailEnd type="none" w="med" len="med"/>
+                    </a:lnL>
+                    <a:lnR w="9525" cap="flat" cmpd="sng" algn="ctr">
+                      <a:solidFill>
+                        <a:srgbClr val="E1E4E8"/>
+                      </a:solidFill>
+                      <a:prstDash val="solid"/>
+                      <a:round/>
+                      <a:headEnd type="none" w="med" len="med"/>
+                      <a:tailEnd type="none" w="med" len="med"/>
+                    </a:lnR>
+                    <a:lnT w="9525" cap="flat" cmpd="sng" algn="ctr">
+                      <a:solidFill>
+                        <a:srgbClr val="E1E4E8"/>
+                      </a:solidFill>
+                      <a:prstDash val="solid"/>
+                      <a:round/>
+                      <a:headEnd type="none" w="med" len="med"/>
+                      <a:tailEnd type="none" w="med" len="med"/>
+                    </a:lnT>
+                    <a:lnB w="9525" cap="flat" cmpd="sng" algn="ctr">
+                      <a:solidFill>
+                        <a:srgbClr val="E1E4E8"/>
+                      </a:solidFill>
+                      <a:prstDash val="solid"/>
+                      <a:round/>
+                      <a:headEnd type="none" w="med" len="med"/>
+                      <a:tailEnd type="none" w="med" len="med"/>
+                    </a:lnB>
+                  </a:tcPr>
+                </a:tc>
+                <a:tc>
+                  <a:txBody>
+                    <a:bodyPr/>
+                    <a:lstStyle/>
+                    <a:p>
+                      <a:pPr indent="0" marL="0">
+                        <a:buNone/>
+                      </a:pPr>
+                      <a:r>
+                        <a:rPr lang="en-US" sz="1400" dirty="0">
+                          <a:solidFill>
+                            <a:srgbClr val="1F2429"/>
+                          </a:solidFill>
+                          <a:latin typeface="Calibri" pitchFamily="34" charset="0"/>
+                          <a:ea typeface="Calibri" pitchFamily="34" charset="-122"/>
+                          <a:cs typeface="Calibri" pitchFamily="34" charset="-120"/>
+                        </a:rPr>
+                        <a:t>Students, courses, enrollments, grades</a:t>
+                      </a:r>
+                      <a:endParaRPr lang="en-US" sz="1400" dirty="0">
+                        <a:latin typeface="Calibri" charset="0"/>
+                        <a:ea typeface="Calibri" charset="0"/>
+                        <a:cs typeface="Calibri" charset="0"/>
+                      </a:endParaRPr>
+                    </a:p>
+                  </a:txBody>
+                  <a:tcPr marL="91440" marR="91440" marT="45720" marB="45720" anchor="ctr">
+                    <a:lnL w="9525" cap="flat" cmpd="sng" algn="ctr">
+                      <a:solidFill>
+                        <a:srgbClr val="E1E4E8"/>
+                      </a:solidFill>
+                      <a:prstDash val="solid"/>
+                      <a:round/>
+                      <a:headEnd type="none" w="med" len="med"/>
+                      <a:tailEnd type="none" w="med" len="med"/>
+                    </a:lnL>
+                    <a:lnR w="9525" cap="flat" cmpd="sng" algn="ctr">
+                      <a:solidFill>
+                        <a:srgbClr val="E1E4E8"/>
+                      </a:solidFill>
+                      <a:prstDash val="solid"/>
+                      <a:round/>
+                      <a:headEnd type="none" w="med" len="med"/>
+                      <a:tailEnd type="none" w="med" len="med"/>
+                    </a:lnR>
+                    <a:lnT w="9525" cap="flat" cmpd="sng" algn="ctr">
+                      <a:solidFill>
+                        <a:srgbClr val="E1E4E8"/>
+                      </a:solidFill>
+                      <a:prstDash val="solid"/>
+                      <a:round/>
+                      <a:headEnd type="none" w="med" len="med"/>
+                      <a:tailEnd type="none" w="med" len="med"/>
+                    </a:lnT>
+                    <a:lnB w="9525" cap="flat" cmpd="sng" algn="ctr">
+                      <a:solidFill>
+                        <a:srgbClr val="E1E4E8"/>
+                      </a:solidFill>
+                      <a:prstDash val="solid"/>
+                      <a:round/>
+                      <a:headEnd type="none" w="med" len="med"/>
+                      <a:tailEnd type="none" w="med" len="med"/>
+                    </a:lnB>
+                  </a:tcPr>
+                </a:tc>
+                <a:tc>
+                  <a:txBody>
+                    <a:bodyPr/>
+                    <a:lstStyle/>
+                    <a:p>
+                      <a:pPr indent="0" marL="0">
+                        <a:buNone/>
+                      </a:pPr>
+                      <a:r>
+                        <a:rPr lang="en-US" sz="1400" dirty="0">
+                          <a:solidFill>
+                            <a:srgbClr val="1F2429"/>
+                          </a:solidFill>
+                          <a:latin typeface="Calibri" pitchFamily="34" charset="0"/>
+                          <a:ea typeface="Calibri" pitchFamily="34" charset="-122"/>
+                          <a:cs typeface="Calibri" pitchFamily="34" charset="-120"/>
+                        </a:rPr>
+                        <a:t>Producing a graduate's transcript</a:t>
+                      </a:r>
+                      <a:endParaRPr lang="en-US" sz="1400" dirty="0">
+                        <a:latin typeface="Calibri" charset="0"/>
+                        <a:ea typeface="Calibri" charset="0"/>
+                        <a:cs typeface="Calibri" charset="0"/>
+                      </a:endParaRPr>
+                    </a:p>
+                  </a:txBody>
+                  <a:tcPr marL="91440" marR="91440" marT="45720" marB="45720" anchor="ctr">
+                    <a:lnL w="9525" cap="flat" cmpd="sng" algn="ctr">
+                      <a:solidFill>
+                        <a:srgbClr val="E1E4E8"/>
+                      </a:solidFill>
+                      <a:prstDash val="solid"/>
+                      <a:round/>
+                      <a:headEnd type="none" w="med" len="med"/>
+                      <a:tailEnd type="none" w="med" len="med"/>
+                    </a:lnL>
+                    <a:lnR w="9525" cap="flat" cmpd="sng" algn="ctr">
+                      <a:solidFill>
+                        <a:srgbClr val="E1E4E8"/>
+                      </a:solidFill>
+                      <a:prstDash val="solid"/>
+                      <a:round/>
+                      <a:headEnd type="none" w="med" len="med"/>
+                      <a:tailEnd type="none" w="med" len="med"/>
+                    </a:lnR>
+                    <a:lnT w="9525" cap="flat" cmpd="sng" algn="ctr">
+                      <a:solidFill>
+                        <a:srgbClr val="E1E4E8"/>
+                      </a:solidFill>
+                      <a:prstDash val="solid"/>
+                      <a:round/>
+                      <a:headEnd type="none" w="med" len="med"/>
+                      <a:tailEnd type="none" w="med" len="med"/>
+                    </a:lnT>
+                    <a:lnB w="9525" cap="flat" cmpd="sng" algn="ctr">
+                      <a:solidFill>
+                        <a:srgbClr val="E1E4E8"/>
+                      </a:solidFill>
+                      <a:prstDash val="solid"/>
+                      <a:round/>
+                      <a:headEnd type="none" w="med" len="med"/>
+                      <a:tailEnd type="none" w="med" len="med"/>
+                    </a:lnB>
+                  </a:tcPr>
+                </a:tc>
+              </a:tr>
+              <a:tr h="444137">
+                <a:tc>
+                  <a:txBody>
+                    <a:bodyPr/>
+                    <a:lstStyle/>
+                    <a:p>
+                      <a:pPr indent="0" marL="0">
+                        <a:buNone/>
+                      </a:pPr>
+                      <a:r>
+                        <a:rPr lang="en-US" sz="1400" dirty="0">
+                          <a:solidFill>
+                            <a:srgbClr val="1F2429"/>
+                          </a:solidFill>
+                          <a:latin typeface="Calibri" pitchFamily="34" charset="0"/>
+                          <a:ea typeface="Calibri" pitchFamily="34" charset="-122"/>
+                          <a:cs typeface="Calibri" pitchFamily="34" charset="-120"/>
+                        </a:rPr>
+                        <a:t>Telecom</a:t>
+                      </a:r>
+                      <a:endParaRPr lang="en-US" sz="1400" dirty="0">
+                        <a:latin typeface="Calibri" charset="0"/>
+                        <a:ea typeface="Calibri" charset="0"/>
+                        <a:cs typeface="Calibri" charset="0"/>
+                      </a:endParaRPr>
+                    </a:p>
+                  </a:txBody>
+                  <a:tcPr marL="91440" marR="91440" marT="45720" marB="45720" anchor="ctr">
+                    <a:lnL w="9525" cap="flat" cmpd="sng" algn="ctr">
+                      <a:solidFill>
+                        <a:srgbClr val="E1E4E8"/>
+                      </a:solidFill>
+                      <a:prstDash val="solid"/>
+                      <a:round/>
+                      <a:headEnd type="none" w="med" len="med"/>
+                      <a:tailEnd type="none" w="med" len="med"/>
+                    </a:lnL>
+                    <a:lnR w="9525" cap="flat" cmpd="sng" algn="ctr">
+                      <a:solidFill>
+                        <a:srgbClr val="E1E4E8"/>
+                      </a:solidFill>
+                      <a:prstDash val="solid"/>
+                      <a:round/>
+                      <a:headEnd type="none" w="med" len="med"/>
+                      <a:tailEnd type="none" w="med" len="med"/>
+                    </a:lnR>
+                    <a:lnT w="9525" cap="flat" cmpd="sng" algn="ctr">
+                      <a:solidFill>
+                        <a:srgbClr val="E1E4E8"/>
+                      </a:solidFill>
+                      <a:prstDash val="solid"/>
+                      <a:round/>
+                      <a:headEnd type="none" w="med" len="med"/>
+                      <a:tailEnd type="none" w="med" len="med"/>
+                    </a:lnT>
+                    <a:lnB w="9525" cap="flat" cmpd="sng" algn="ctr">
+                      <a:solidFill>
+                        <a:srgbClr val="E1E4E8"/>
+                      </a:solidFill>
+                      <a:prstDash val="solid"/>
+                      <a:round/>
+                      <a:headEnd type="none" w="med" len="med"/>
+                      <a:tailEnd type="none" w="med" len="med"/>
+                    </a:lnB>
+                  </a:tcPr>
+                </a:tc>
+                <a:tc>
+                  <a:txBody>
+                    <a:bodyPr/>
+                    <a:lstStyle/>
+                    <a:p>
+                      <a:pPr indent="0" marL="0">
+                        <a:buNone/>
+                      </a:pPr>
+                      <a:r>
+                        <a:rPr lang="en-US" sz="1400" dirty="0">
+                          <a:solidFill>
+                            <a:srgbClr val="1F2429"/>
+                          </a:solidFill>
+                          <a:latin typeface="Calibri" pitchFamily="34" charset="0"/>
+                          <a:ea typeface="Calibri" pitchFamily="34" charset="-122"/>
+                          <a:cs typeface="Calibri" pitchFamily="34" charset="-120"/>
+                        </a:rPr>
+                        <a:t>Call records, subscriber accounts</a:t>
+                      </a:r>
+                      <a:endParaRPr lang="en-US" sz="1400" dirty="0">
+                        <a:latin typeface="Calibri" charset="0"/>
+                        <a:ea typeface="Calibri" charset="0"/>
+                        <a:cs typeface="Calibri" charset="0"/>
+                      </a:endParaRPr>
+                    </a:p>
+                  </a:txBody>
+                  <a:tcPr marL="91440" marR="91440" marT="45720" marB="45720" anchor="ctr">
+                    <a:lnL w="9525" cap="flat" cmpd="sng" algn="ctr">
+                      <a:solidFill>
+                        <a:srgbClr val="E1E4E8"/>
+                      </a:solidFill>
+                      <a:prstDash val="solid"/>
+                      <a:round/>
+                      <a:headEnd type="none" w="med" len="med"/>
+                      <a:tailEnd type="none" w="med" len="med"/>
+                    </a:lnL>
+                    <a:lnR w="9525" cap="flat" cmpd="sng" algn="ctr">
+                      <a:solidFill>
+                        <a:srgbClr val="E1E4E8"/>
+                      </a:solidFill>
+                      <a:prstDash val="solid"/>
+                      <a:round/>
+                      <a:headEnd type="none" w="med" len="med"/>
+                      <a:tailEnd type="none" w="med" len="med"/>
+                    </a:lnR>
+                    <a:lnT w="9525" cap="flat" cmpd="sng" algn="ctr">
+                      <a:solidFill>
+                        <a:srgbClr val="E1E4E8"/>
+                      </a:solidFill>
+                      <a:prstDash val="solid"/>
+                      <a:round/>
+                      <a:headEnd type="none" w="med" len="med"/>
+                      <a:tailEnd type="none" w="med" len="med"/>
+                    </a:lnT>
+                    <a:lnB w="9525" cap="flat" cmpd="sng" algn="ctr">
+                      <a:solidFill>
+                        <a:srgbClr val="E1E4E8"/>
+                      </a:solidFill>
+                      <a:prstDash val="solid"/>
+                      <a:round/>
+                      <a:headEnd type="none" w="med" len="med"/>
+                      <a:tailEnd type="none" w="med" len="med"/>
+                    </a:lnB>
+                  </a:tcPr>
+                </a:tc>
+                <a:tc>
+                  <a:txBody>
+                    <a:bodyPr/>
+                    <a:lstStyle/>
+                    <a:p>
+                      <a:pPr indent="0" marL="0">
+                        <a:buNone/>
+                      </a:pPr>
+                      <a:r>
+                        <a:rPr lang="en-US" sz="1400" dirty="0">
+                          <a:solidFill>
+                            <a:srgbClr val="1F2429"/>
+                          </a:solidFill>
+                          <a:latin typeface="Calibri" pitchFamily="34" charset="0"/>
+                          <a:ea typeface="Calibri" pitchFamily="34" charset="-122"/>
+                          <a:cs typeface="Calibri" pitchFamily="34" charset="-120"/>
+                        </a:rPr>
+                        <a:t>Generating a monthly phone bill</a:t>
+                      </a:r>
+                      <a:endParaRPr lang="en-US" sz="1400" dirty="0">
+                        <a:latin typeface="Calibri" charset="0"/>
+                        <a:ea typeface="Calibri" charset="0"/>
+                        <a:cs typeface="Calibri" charset="0"/>
+                      </a:endParaRPr>
+                    </a:p>
+                  </a:txBody>
+                  <a:tcPr marL="91440" marR="91440" marT="45720" marB="45720" anchor="ctr">
+                    <a:lnL w="9525" cap="flat" cmpd="sng" algn="ctr">
+                      <a:solidFill>
+                        <a:srgbClr val="E1E4E8"/>
+                      </a:solidFill>
+                      <a:prstDash val="solid"/>
+                      <a:round/>
+                      <a:headEnd type="none" w="med" len="med"/>
+                      <a:tailEnd type="none" w="med" len="med"/>
+                    </a:lnL>
+                    <a:lnR w="9525" cap="flat" cmpd="sng" algn="ctr">
+                      <a:solidFill>
+                        <a:srgbClr val="E1E4E8"/>
+                      </a:solidFill>
+                      <a:prstDash val="solid"/>
+                      <a:round/>
+                      <a:headEnd type="none" w="med" len="med"/>
+                      <a:tailEnd type="none" w="med" len="med"/>
+                    </a:lnR>
+                    <a:lnT w="9525" cap="flat" cmpd="sng" algn="ctr">
+                      <a:solidFill>
+                        <a:srgbClr val="E1E4E8"/>
+                      </a:solidFill>
+                      <a:prstDash val="solid"/>
+                      <a:round/>
+                      <a:headEnd type="none" w="med" len="med"/>
+                      <a:tailEnd type="none" w="med" len="med"/>
+                    </a:lnT>
+                    <a:lnB w="9525" cap="flat" cmpd="sng" algn="ctr">
+                      <a:solidFill>
+                        <a:srgbClr val="E1E4E8"/>
+                      </a:solidFill>
+                      <a:prstDash val="solid"/>
+                      <a:round/>
+                      <a:headEnd type="none" w="med" len="med"/>
+                      <a:tailEnd type="none" w="med" len="med"/>
+                    </a:lnB>
+                  </a:tcPr>
+                </a:tc>
+              </a:tr>
+              <a:tr h="444137">
+                <a:tc>
+                  <a:txBody>
+                    <a:bodyPr/>
+                    <a:lstStyle/>
+                    <a:p>
+                      <a:pPr indent="0" marL="0">
+                        <a:buNone/>
+                      </a:pPr>
+                      <a:r>
+                        <a:rPr lang="en-US" sz="1400" dirty="0">
+                          <a:solidFill>
+                            <a:srgbClr val="1F2429"/>
+                          </a:solidFill>
+                          <a:latin typeface="Calibri" pitchFamily="34" charset="0"/>
+                          <a:ea typeface="Calibri" pitchFamily="34" charset="-122"/>
+                          <a:cs typeface="Calibri" pitchFamily="34" charset="-120"/>
+                        </a:rPr>
+                        <a:t>Sales / e-commerce</a:t>
+                      </a:r>
+                      <a:endParaRPr lang="en-US" sz="1400" dirty="0">
+                        <a:latin typeface="Calibri" charset="0"/>
+                        <a:ea typeface="Calibri" charset="0"/>
+                        <a:cs typeface="Calibri" charset="0"/>
+                      </a:endParaRPr>
+                    </a:p>
+                  </a:txBody>
+                  <a:tcPr marL="91440" marR="91440" marT="45720" marB="45720" anchor="ctr">
+                    <a:lnL w="9525" cap="flat" cmpd="sng" algn="ctr">
+                      <a:solidFill>
+                        <a:srgbClr val="E1E4E8"/>
+                      </a:solidFill>
+                      <a:prstDash val="solid"/>
+                      <a:round/>
+                      <a:headEnd type="none" w="med" len="med"/>
+                      <a:tailEnd type="none" w="med" len="med"/>
+                    </a:lnL>
+                    <a:lnR w="9525" cap="flat" cmpd="sng" algn="ctr">
+                      <a:solidFill>
+                        <a:srgbClr val="E1E4E8"/>
+                      </a:solidFill>
+                      <a:prstDash val="solid"/>
+                      <a:round/>
+                      <a:headEnd type="none" w="med" len="med"/>
+                      <a:tailEnd type="none" w="med" len="med"/>
+                    </a:lnR>
+                    <a:lnT w="9525" cap="flat" cmpd="sng" algn="ctr">
+                      <a:solidFill>
+                        <a:srgbClr val="E1E4E8"/>
+                      </a:solidFill>
+                      <a:prstDash val="solid"/>
+                      <a:round/>
+                      <a:headEnd type="none" w="med" len="med"/>
+                      <a:tailEnd type="none" w="med" len="med"/>
+                    </a:lnT>
+                    <a:lnB w="9525" cap="flat" cmpd="sng" algn="ctr">
+                      <a:solidFill>
+                        <a:srgbClr val="E1E4E8"/>
+                      </a:solidFill>
+                      <a:prstDash val="solid"/>
+                      <a:round/>
+                      <a:headEnd type="none" w="med" len="med"/>
+                      <a:tailEnd type="none" w="med" len="med"/>
+                    </a:lnB>
+                  </a:tcPr>
+                </a:tc>
+                <a:tc>
+                  <a:txBody>
+                    <a:bodyPr/>
+                    <a:lstStyle/>
+                    <a:p>
+                      <a:pPr indent="0" marL="0">
+                        <a:buNone/>
+                      </a:pPr>
+                      <a:r>
+                        <a:rPr lang="en-US" sz="1400" dirty="0">
+                          <a:solidFill>
+                            <a:srgbClr val="1F2429"/>
+                          </a:solidFill>
+                          <a:latin typeface="Calibri" pitchFamily="34" charset="0"/>
+                          <a:ea typeface="Calibri" pitchFamily="34" charset="-122"/>
+                          <a:cs typeface="Calibri" pitchFamily="34" charset="-120"/>
+                        </a:rPr>
+                        <a:t>Products, orders, customers, inventory</a:t>
+                      </a:r>
+                      <a:endParaRPr lang="en-US" sz="1400" dirty="0">
+                        <a:latin typeface="Calibri" charset="0"/>
+                        <a:ea typeface="Calibri" charset="0"/>
+                        <a:cs typeface="Calibri" charset="0"/>
+                      </a:endParaRPr>
+                    </a:p>
+                  </a:txBody>
+                  <a:tcPr marL="91440" marR="91440" marT="45720" marB="45720" anchor="ctr">
+                    <a:lnL w="9525" cap="flat" cmpd="sng" algn="ctr">
+                      <a:solidFill>
+                        <a:srgbClr val="E1E4E8"/>
+                      </a:solidFill>
+                      <a:prstDash val="solid"/>
+                      <a:round/>
+                      <a:headEnd type="none" w="med" len="med"/>
+                      <a:tailEnd type="none" w="med" len="med"/>
+                    </a:lnL>
+                    <a:lnR w="9525" cap="flat" cmpd="sng" algn="ctr">
+                      <a:solidFill>
+                        <a:srgbClr val="E1E4E8"/>
+                      </a:solidFill>
+                      <a:prstDash val="solid"/>
+                      <a:round/>
+                      <a:headEnd type="none" w="med" len="med"/>
+                      <a:tailEnd type="none" w="med" len="med"/>
+                    </a:lnR>
+                    <a:lnT w="9525" cap="flat" cmpd="sng" algn="ctr">
+                      <a:solidFill>
+                        <a:srgbClr val="E1E4E8"/>
+                      </a:solidFill>
+                      <a:prstDash val="solid"/>
+                      <a:round/>
+                      <a:headEnd type="none" w="med" len="med"/>
+                      <a:tailEnd type="none" w="med" len="med"/>
+                    </a:lnT>
+                    <a:lnB w="9525" cap="flat" cmpd="sng" algn="ctr">
+                      <a:solidFill>
+                        <a:srgbClr val="E1E4E8"/>
+                      </a:solidFill>
+                      <a:prstDash val="solid"/>
+                      <a:round/>
+                      <a:headEnd type="none" w="med" len="med"/>
+                      <a:tailEnd type="none" w="med" len="med"/>
+                    </a:lnB>
+                  </a:tcPr>
+                </a:tc>
+                <a:tc>
+                  <a:txBody>
+                    <a:bodyPr/>
+                    <a:lstStyle/>
+                    <a:p>
+                      <a:pPr indent="0" marL="0">
+                        <a:buNone/>
+                      </a:pPr>
+                      <a:r>
+                        <a:rPr lang="en-US" sz="1400" dirty="0">
+                          <a:solidFill>
+                            <a:srgbClr val="1F2429"/>
+                          </a:solidFill>
+                          <a:latin typeface="Calibri" pitchFamily="34" charset="0"/>
+                          <a:ea typeface="Calibri" pitchFamily="34" charset="-122"/>
+                          <a:cs typeface="Calibri" pitchFamily="34" charset="-120"/>
+                        </a:rPr>
+                        <a:t>“Only 3 left in stock”</a:t>
+                      </a:r>
+                      <a:endParaRPr lang="en-US" sz="1400" dirty="0">
+                        <a:latin typeface="Calibri" charset="0"/>
+                        <a:ea typeface="Calibri" charset="0"/>
+                        <a:cs typeface="Calibri" charset="0"/>
+                      </a:endParaRPr>
+                    </a:p>
+                  </a:txBody>
+                  <a:tcPr marL="91440" marR="91440" marT="45720" marB="45720" anchor="ctr">
+                    <a:lnL w="9525" cap="flat" cmpd="sng" algn="ctr">
+                      <a:solidFill>
+                        <a:srgbClr val="E1E4E8"/>
+                      </a:solidFill>
+                      <a:prstDash val="solid"/>
+                      <a:round/>
+                      <a:headEnd type="none" w="med" len="med"/>
+                      <a:tailEnd type="none" w="med" len="med"/>
+                    </a:lnL>
+                    <a:lnR w="9525" cap="flat" cmpd="sng" algn="ctr">
+                      <a:solidFill>
+                        <a:srgbClr val="E1E4E8"/>
+                      </a:solidFill>
+                      <a:prstDash val="solid"/>
+                      <a:round/>
+                      <a:headEnd type="none" w="med" len="med"/>
+                      <a:tailEnd type="none" w="med" len="med"/>
+                    </a:lnR>
+                    <a:lnT w="9525" cap="flat" cmpd="sng" algn="ctr">
+                      <a:solidFill>
+                        <a:srgbClr val="E1E4E8"/>
+                      </a:solidFill>
+                      <a:prstDash val="solid"/>
+                      <a:round/>
+                      <a:headEnd type="none" w="med" len="med"/>
+                      <a:tailEnd type="none" w="med" len="med"/>
+                    </a:lnT>
+                    <a:lnB w="9525" cap="flat" cmpd="sng" algn="ctr">
+                      <a:solidFill>
+                        <a:srgbClr val="E1E4E8"/>
+                      </a:solidFill>
+                      <a:prstDash val="solid"/>
+                      <a:round/>
+                      <a:headEnd type="none" w="med" len="med"/>
+                      <a:tailEnd type="none" w="med" len="med"/>
+                    </a:lnB>
+                  </a:tcPr>
+                </a:tc>
+              </a:tr>
+              <a:tr h="444137">
+                <a:tc>
+                  <a:txBody>
+                    <a:bodyPr/>
+                    <a:lstStyle/>
+                    <a:p>
+                      <a:pPr indent="0" marL="0">
+                        <a:buNone/>
+                      </a:pPr>
+                      <a:r>
+                        <a:rPr lang="en-US" sz="1400" dirty="0">
+                          <a:solidFill>
+                            <a:srgbClr val="1F2429"/>
+                          </a:solidFill>
+                          <a:latin typeface="Calibri" pitchFamily="34" charset="0"/>
+                          <a:ea typeface="Calibri" pitchFamily="34" charset="-122"/>
+                          <a:cs typeface="Calibri" pitchFamily="34" charset="-120"/>
+                        </a:rPr>
+                        <a:t>Human resources</a:t>
+                      </a:r>
+                      <a:endParaRPr lang="en-US" sz="1400" dirty="0">
+                        <a:latin typeface="Calibri" charset="0"/>
+                        <a:ea typeface="Calibri" charset="0"/>
+                        <a:cs typeface="Calibri" charset="0"/>
+                      </a:endParaRPr>
+                    </a:p>
+                  </a:txBody>
+                  <a:tcPr marL="91440" marR="91440" marT="45720" marB="45720" anchor="ctr">
+                    <a:lnL w="9525" cap="flat" cmpd="sng" algn="ctr">
+                      <a:solidFill>
+                        <a:srgbClr val="E1E4E8"/>
+                      </a:solidFill>
+                      <a:prstDash val="solid"/>
+                      <a:round/>
+                      <a:headEnd type="none" w="med" len="med"/>
+                      <a:tailEnd type="none" w="med" len="med"/>
+                    </a:lnL>
+                    <a:lnR w="9525" cap="flat" cmpd="sng" algn="ctr">
+                      <a:solidFill>
+                        <a:srgbClr val="E1E4E8"/>
+                      </a:solidFill>
+                      <a:prstDash val="solid"/>
+                      <a:round/>
+                      <a:headEnd type="none" w="med" len="med"/>
+                      <a:tailEnd type="none" w="med" len="med"/>
+                    </a:lnR>
+                    <a:lnT w="9525" cap="flat" cmpd="sng" algn="ctr">
+                      <a:solidFill>
+                        <a:srgbClr val="E1E4E8"/>
+                      </a:solidFill>
+                      <a:prstDash val="solid"/>
+                      <a:round/>
+                      <a:headEnd type="none" w="med" len="med"/>
+                      <a:tailEnd type="none" w="med" len="med"/>
+                    </a:lnT>
+                    <a:lnB w="9525" cap="flat" cmpd="sng" algn="ctr">
+                      <a:solidFill>
+                        <a:srgbClr val="E1E4E8"/>
+                      </a:solidFill>
+                      <a:prstDash val="solid"/>
+                      <a:round/>
+                      <a:headEnd type="none" w="med" len="med"/>
+                      <a:tailEnd type="none" w="med" len="med"/>
+                    </a:lnB>
+                  </a:tcPr>
+                </a:tc>
+                <a:tc>
+                  <a:txBody>
+                    <a:bodyPr/>
+                    <a:lstStyle/>
+                    <a:p>
+                      <a:pPr indent="0" marL="0">
+                        <a:buNone/>
+                      </a:pPr>
+                      <a:r>
+                        <a:rPr lang="en-US" sz="1400" dirty="0">
+                          <a:solidFill>
+                            <a:srgbClr val="1F2429"/>
+                          </a:solidFill>
+                          <a:latin typeface="Calibri" pitchFamily="34" charset="0"/>
+                          <a:ea typeface="Calibri" pitchFamily="34" charset="-122"/>
+                          <a:cs typeface="Calibri" pitchFamily="34" charset="-120"/>
+                        </a:rPr>
+                        <a:t>Employees, salaries, positions</a:t>
+                      </a:r>
+                      <a:endParaRPr lang="en-US" sz="1400" dirty="0">
+                        <a:latin typeface="Calibri" charset="0"/>
+                        <a:ea typeface="Calibri" charset="0"/>
+                        <a:cs typeface="Calibri" charset="0"/>
+                      </a:endParaRPr>
+                    </a:p>
+                  </a:txBody>
+                  <a:tcPr marL="91440" marR="91440" marT="45720" marB="45720" anchor="ctr">
+                    <a:lnL w="9525" cap="flat" cmpd="sng" algn="ctr">
+                      <a:solidFill>
+                        <a:srgbClr val="E1E4E8"/>
+                      </a:solidFill>
+                      <a:prstDash val="solid"/>
+                      <a:round/>
+                      <a:headEnd type="none" w="med" len="med"/>
+                      <a:tailEnd type="none" w="med" len="med"/>
+                    </a:lnL>
+                    <a:lnR w="9525" cap="flat" cmpd="sng" algn="ctr">
+                      <a:solidFill>
+                        <a:srgbClr val="E1E4E8"/>
+                      </a:solidFill>
+                      <a:prstDash val="solid"/>
+                      <a:round/>
+                      <a:headEnd type="none" w="med" len="med"/>
+                      <a:tailEnd type="none" w="med" len="med"/>
+                    </a:lnR>
+                    <a:lnT w="9525" cap="flat" cmpd="sng" algn="ctr">
+                      <a:solidFill>
+                        <a:srgbClr val="E1E4E8"/>
+                      </a:solidFill>
+                      <a:prstDash val="solid"/>
+                      <a:round/>
+                      <a:headEnd type="none" w="med" len="med"/>
+                      <a:tailEnd type="none" w="med" len="med"/>
+                    </a:lnT>
+                    <a:lnB w="9525" cap="flat" cmpd="sng" algn="ctr">
+                      <a:solidFill>
+                        <a:srgbClr val="E1E4E8"/>
+                      </a:solidFill>
+                      <a:prstDash val="solid"/>
+                      <a:round/>
+                      <a:headEnd type="none" w="med" len="med"/>
+                      <a:tailEnd type="none" w="med" len="med"/>
+                    </a:lnB>
+                  </a:tcPr>
+                </a:tc>
+                <a:tc>
+                  <a:txBody>
+                    <a:bodyPr/>
+                    <a:lstStyle/>
+                    <a:p>
+                      <a:pPr indent="0" marL="0">
+                        <a:buNone/>
+                      </a:pPr>
+                      <a:r>
+                        <a:rPr lang="en-US" sz="1400" dirty="0">
+                          <a:solidFill>
+                            <a:srgbClr val="1F2429"/>
+                          </a:solidFill>
+                          <a:latin typeface="Calibri" pitchFamily="34" charset="0"/>
+                          <a:ea typeface="Calibri" pitchFamily="34" charset="-122"/>
+                          <a:cs typeface="Calibri" pitchFamily="34" charset="-120"/>
+                        </a:rPr>
+                        <a:t>Running monthly payroll</a:t>
+                      </a:r>
+                      <a:endParaRPr lang="en-US" sz="1400" dirty="0">
+                        <a:latin typeface="Calibri" charset="0"/>
+                        <a:ea typeface="Calibri" charset="0"/>
+                        <a:cs typeface="Calibri" charset="0"/>
+                      </a:endParaRPr>
+                    </a:p>
+                  </a:txBody>
+                  <a:tcPr marL="91440" marR="91440" marT="45720" marB="45720" anchor="ctr">
+                    <a:lnL w="9525" cap="flat" cmpd="sng" algn="ctr">
+                      <a:solidFill>
+                        <a:srgbClr val="E1E4E8"/>
+                      </a:solidFill>
+                      <a:prstDash val="solid"/>
+                      <a:round/>
+                      <a:headEnd type="none" w="med" len="med"/>
+                      <a:tailEnd type="none" w="med" len="med"/>
+                    </a:lnL>
+                    <a:lnR w="9525" cap="flat" cmpd="sng" algn="ctr">
+                      <a:solidFill>
+                        <a:srgbClr val="E1E4E8"/>
+                      </a:solidFill>
+                      <a:prstDash val="solid"/>
+                      <a:round/>
+                      <a:headEnd type="none" w="med" len="med"/>
+                      <a:tailEnd type="none" w="med" len="med"/>
+                    </a:lnR>
+                    <a:lnT w="9525" cap="flat" cmpd="sng" algn="ctr">
+                      <a:solidFill>
+                        <a:srgbClr val="E1E4E8"/>
+                      </a:solidFill>
+                      <a:prstDash val="solid"/>
+                      <a:round/>
+                      <a:headEnd type="none" w="med" len="med"/>
+                      <a:tailEnd type="none" w="med" len="med"/>
+                    </a:lnT>
+                    <a:lnB w="9525" cap="flat" cmpd="sng" algn="ctr">
+                      <a:solidFill>
+                        <a:srgbClr val="E1E4E8"/>
+                      </a:solidFill>
+                      <a:prstDash val="solid"/>
+                      <a:round/>
+                      <a:headEnd type="none" w="med" len="med"/>
+                      <a:tailEnd type="none" w="med" len="med"/>
+                    </a:lnB>
+                  </a:tcPr>
+                </a:tc>
+              </a:tr>
+            </a:tbl>
+          </a:graphicData>
+        </a:graphic>
+      </p:graphicFrame>
+      <p:sp>
+        <p:nvSpPr>
+          <p:cNvPr id="5" name="Shape 2"/>
+          <p:cNvSpPr/>
+          <p:nvPr/>
+        </p:nvSpPr>
+        <p:spPr>
+          <a:xfrm>
+            <a:off x="640080" y="4617720"/>
+            <a:ext cx="10881360" cy="1417320"/>
+          </a:xfrm>
+          <a:prstGeom prst="roundRect">
+            <a:avLst>
+              <a:gd name="adj" fmla="val 5161"/>
+            </a:avLst>
+          </a:prstGeom>
+          <a:solidFill>
+            <a:srgbClr val="F7F8F9"/>
+          </a:solidFill>
+          <a:ln w="12700">
+            <a:solidFill>
+              <a:srgbClr val="E8A33D"/>
+            </a:solidFill>
+            <a:prstDash val="solid"/>
+          </a:ln>
+        </p:spPr>
+      </p:sp>
+      <p:sp>
+        <p:nvSpPr>
+          <p:cNvPr id="6" name="Text 3"/>
+          <p:cNvSpPr txBox="1"/>
+          <p:nvPr/>
+        </p:nvSpPr>
+        <p:spPr>
+          <a:xfrm>
+            <a:off x="868680" y="4754880"/>
+            <a:ext cx="10424160" cy="1143000"/>
+          </a:xfrm>
+          <a:prstGeom prst="rect">
+            <a:avLst/>
+          </a:prstGeom>
+          <a:noFill/>
+          <a:ln/>
+        </p:spPr>
+        <p:txBody>
+          <a:bodyPr wrap="square" lIns="0" tIns="0" rIns="0" bIns="0" rtlCol="0" anchor="t"/>
+          <a:lstStyle/>
+          <a:p>
+            <a:pPr indent="0" marL="0">
+              <a:buNone/>
+            </a:pPr>
+            <a:r>
+              <a:rPr lang="en-US" sz="1800" b="1" dirty="0">
+                <a:solidFill>
+                  <a:srgbClr val="1F2429"/>
+                </a:solidFill>
+                <a:latin typeface="Calibri" pitchFamily="34" charset="0"/>
+                <a:ea typeface="Calibri" pitchFamily="34" charset="-122"/>
+                <a:cs typeface="Calibri" pitchFamily="34" charset="-120"/>
+              </a:rPr>
+              <a:t>A quick test: is this really a database problem?  </a:t>
+            </a:r>
+            <a:pPr indent="0" marL="0">
+              <a:buNone/>
+            </a:pPr>
+            <a:r>
+              <a:rPr lang="en-US" sz="1800" dirty="0">
+                <a:solidFill>
+                  <a:srgbClr val="1F2429"/>
+                </a:solidFill>
+                <a:latin typeface="Calibri" pitchFamily="34" charset="0"/>
+                <a:ea typeface="Calibri" pitchFamily="34" charset="-122"/>
+                <a:cs typeface="Calibri" pitchFamily="34" charset="-120"/>
+              </a:rPr>
               <a:t>If the data must be shared by more than one person or program, stay accurate under concurrent access, and survive a crash without loss — it belongs in a database, not a private file.</a:t>
             </a:r>
-            <a:endParaRPr lang="en-US" sz="1250" dirty="0"/>
+            <a:endParaRPr lang="en-US" sz="1800" dirty="0"/>
           </a:p>
         </p:txBody>
       </p:sp>
@@ -6054,7 +11518,7 @@
               <a:buNone/>
             </a:pPr>
             <a:r>
-              <a:rPr lang="en-US" sz="1000" u="sng" dirty="0">
+              <a:rPr lang="en-US" sz="1200" u="sng" dirty="0">
                 <a:solidFill>
                   <a:srgbClr val="8A939B"/>
                 </a:solidFill>
@@ -6075,7 +11539,7 @@
               <a:buNone/>
             </a:pPr>
             <a:r>
-              <a:rPr lang="en-US" sz="1000" dirty="0">
+              <a:rPr lang="en-US" sz="1200" dirty="0">
                 <a:solidFill>
                   <a:srgbClr val="8A939B"/>
                 </a:solidFill>
@@ -6083,9 +11547,9 @@
                 <a:ea typeface="Calibri" pitchFamily="34" charset="-122"/>
                 <a:cs typeface="Calibri" pitchFamily="34" charset="-120"/>
               </a:rPr>
-              <a:t>  ·  5</a:t>
-            </a:r>
-            <a:endParaRPr lang="en-US" sz="1000" dirty="0"/>
+              <a:t>  ·  7</a:t>
+            </a:r>
+            <a:endParaRPr lang="en-US" sz="1200" dirty="0"/>
           </a:p>
         </p:txBody>
       </p:sp>
@@ -6114,7 +11578,7 @@
               <a:buNone/>
             </a:pPr>
             <a:r>
-              <a:rPr lang="en-US" sz="1400" dirty="0">
+              <a:rPr lang="en-US" sz="1800" dirty="0">
                 <a:solidFill>
                   <a:srgbClr val="1F2429"/>
                 </a:solidFill>
@@ -6124,7 +11588,7 @@
               </a:rPr>
               <a:t>Data management evolved in stages, each responding to the weaknesses of the one before it.</a:t>
             </a:r>
-            <a:endParaRPr lang="en-US" sz="1400" dirty="0"/>
+            <a:endParaRPr lang="en-US" sz="1800" dirty="0"/>
           </a:p>
         </p:txBody>
       </p:sp>
@@ -6175,7 +11639,7 @@
               <a:buNone/>
             </a:pPr>
             <a:r>
-              <a:rPr lang="en-US" sz="1400" b="1" dirty="0">
+              <a:rPr lang="en-US" sz="1800" b="1" dirty="0">
                 <a:solidFill>
                   <a:srgbClr val="FFFFFF"/>
                 </a:solidFill>
@@ -6185,7 +11649,7 @@
               </a:rPr>
               <a:t>Manual / paper filing</a:t>
             </a:r>
-            <a:endParaRPr lang="en-US" sz="1400" dirty="0"/>
+            <a:endParaRPr lang="en-US" sz="1800" dirty="0"/>
           </a:p>
         </p:txBody>
       </p:sp>
@@ -6214,7 +11678,7 @@
               <a:buNone/>
             </a:pPr>
             <a:r>
-              <a:rPr lang="en-US" sz="1050" dirty="0">
+              <a:rPr lang="en-US" sz="1800" dirty="0">
                 <a:solidFill>
                   <a:srgbClr val="FFFFFF"/>
                 </a:solidFill>
@@ -6224,7 +11688,7 @@
               </a:rPr>
               <a:t>Ledgers, index cards, filing cabinets — slow, error-prone, one copy</a:t>
             </a:r>
-            <a:endParaRPr lang="en-US" sz="1050" dirty="0"/>
+            <a:endParaRPr lang="en-US" sz="1800" dirty="0"/>
           </a:p>
         </p:txBody>
       </p:sp>
@@ -6295,7 +11759,7 @@
               <a:buNone/>
             </a:pPr>
             <a:r>
-              <a:rPr lang="en-US" sz="1400" b="1" dirty="0">
+              <a:rPr lang="en-US" sz="1800" b="1" dirty="0">
                 <a:solidFill>
                   <a:srgbClr val="FFFFFF"/>
                 </a:solidFill>
@@ -6305,7 +11769,7 @@
               </a:rPr>
               <a:t>File-based systems</a:t>
             </a:r>
-            <a:endParaRPr lang="en-US" sz="1400" dirty="0"/>
+            <a:endParaRPr lang="en-US" sz="1800" dirty="0"/>
           </a:p>
         </p:txBody>
       </p:sp>
@@ -6334,7 +11798,7 @@
               <a:buNone/>
             </a:pPr>
             <a:r>
-              <a:rPr lang="en-US" sz="1050" dirty="0">
+              <a:rPr lang="en-US" sz="1800" dirty="0">
                 <a:solidFill>
                   <a:srgbClr val="FFFFFF"/>
                 </a:solidFill>
@@ -6344,7 +11808,7 @@
               </a:rPr>
               <a:t>Each application owns its own files; no coordination between them</a:t>
             </a:r>
-            <a:endParaRPr lang="en-US" sz="1050" dirty="0"/>
+            <a:endParaRPr lang="en-US" sz="1800" dirty="0"/>
           </a:p>
         </p:txBody>
       </p:sp>
@@ -6415,7 +11879,7 @@
               <a:buNone/>
             </a:pPr>
             <a:r>
-              <a:rPr lang="en-US" sz="1400" b="1" dirty="0">
+              <a:rPr lang="en-US" sz="1800" b="1" dirty="0">
                 <a:solidFill>
                   <a:srgbClr val="FFFFFF"/>
                 </a:solidFill>
@@ -6425,7 +11889,7 @@
               </a:rPr>
               <a:t>Database approach (DBMS)</a:t>
             </a:r>
-            <a:endParaRPr lang="en-US" sz="1400" dirty="0"/>
+            <a:endParaRPr lang="en-US" sz="1800" dirty="0"/>
           </a:p>
         </p:txBody>
       </p:sp>
@@ -6454,7 +11918,7 @@
               <a:buNone/>
             </a:pPr>
             <a:r>
-              <a:rPr lang="en-US" sz="1050" dirty="0">
+              <a:rPr lang="en-US" sz="1800" dirty="0">
                 <a:solidFill>
                   <a:srgbClr val="FFFFFF"/>
                 </a:solidFill>
@@ -6464,7 +11928,7 @@
               </a:rPr>
               <a:t>One managed, shared collection of data serving every application</a:t>
             </a:r>
-            <a:endParaRPr lang="en-US" sz="1050" dirty="0"/>
+            <a:endParaRPr lang="en-US" sz="1800" dirty="0"/>
           </a:p>
         </p:txBody>
       </p:sp>
@@ -6564,7 +12028,7 @@
               <a:buNone/>
             </a:pPr>
             <a:r>
-              <a:rPr lang="en-US" sz="1000" u="sng" dirty="0">
+              <a:rPr lang="en-US" sz="1200" u="sng" dirty="0">
                 <a:solidFill>
                   <a:srgbClr val="8A939B"/>
                 </a:solidFill>
@@ -6585,7 +12049,7 @@
               <a:buNone/>
             </a:pPr>
             <a:r>
-              <a:rPr lang="en-US" sz="1000" dirty="0">
+              <a:rPr lang="en-US" sz="1200" dirty="0">
                 <a:solidFill>
                   <a:srgbClr val="8A939B"/>
                 </a:solidFill>
@@ -6593,9 +12057,9 @@
                 <a:ea typeface="Calibri" pitchFamily="34" charset="-122"/>
                 <a:cs typeface="Calibri" pitchFamily="34" charset="-120"/>
               </a:rPr>
-              <a:t>  ·  6</a:t>
-            </a:r>
-            <a:endParaRPr lang="en-US" sz="1000" dirty="0"/>
+              <a:t>  ·  9</a:t>
+            </a:r>
+            <a:endParaRPr lang="en-US" sz="1200" dirty="0"/>
           </a:p>
         </p:txBody>
       </p:sp>
@@ -6624,7 +12088,7 @@
               <a:buNone/>
             </a:pPr>
             <a:r>
-              <a:rPr lang="en-US" sz="1400" dirty="0">
+              <a:rPr lang="en-US" sz="1800" dirty="0">
                 <a:solidFill>
                   <a:srgbClr val="1F2429"/>
                 </a:solidFill>
@@ -6634,7 +12098,7 @@
               </a:rPr>
               <a:t>Suppose COMSATS ran three separate offices, each with its own file-based system, all needing student data:</a:t>
             </a:r>
-            <a:endParaRPr lang="en-US" sz="1400" dirty="0"/>
+            <a:endParaRPr lang="en-US" sz="1800" dirty="0"/>
           </a:p>
         </p:txBody>
       </p:sp>
@@ -6685,7 +12149,7 @@
               <a:buNone/>
             </a:pPr>
             <a:r>
-              <a:rPr lang="en-US" sz="1350" b="1" dirty="0">
+              <a:rPr lang="en-US" sz="1600" b="1" dirty="0">
                 <a:solidFill>
                   <a:srgbClr val="FFFFFF"/>
                 </a:solidFill>
@@ -6695,7 +12159,7 @@
               </a:rPr>
               <a:t>Registrar's file</a:t>
             </a:r>
-            <a:endParaRPr lang="en-US" sz="1350" dirty="0"/>
+            <a:endParaRPr lang="en-US" sz="1400" dirty="0"/>
           </a:p>
         </p:txBody>
       </p:sp>
@@ -6724,7 +12188,7 @@
               <a:buNone/>
             </a:pPr>
             <a:r>
-              <a:rPr lang="en-US" sz="1050" dirty="0">
+              <a:rPr lang="en-US" sz="1400" dirty="0">
                 <a:solidFill>
                   <a:srgbClr val="FFFFFF"/>
                 </a:solidFill>
@@ -6734,7 +12198,7 @@
               </a:rPr>
               <a:t>RegNo, Name, CNIC, Address, Program</a:t>
             </a:r>
-            <a:endParaRPr lang="en-US" sz="1050" dirty="0"/>
+            <a:endParaRPr lang="en-US" sz="1400" dirty="0"/>
           </a:p>
         </p:txBody>
       </p:sp>
@@ -6785,7 +12249,7 @@
               <a:buNone/>
             </a:pPr>
             <a:r>
-              <a:rPr lang="en-US" sz="1350" b="1" dirty="0">
+              <a:rPr lang="en-US" sz="1600" b="1" dirty="0">
                 <a:solidFill>
                   <a:srgbClr val="FFFFFF"/>
                 </a:solidFill>
@@ -6795,7 +12259,7 @@
               </a:rPr>
               <a:t>Library's file</a:t>
             </a:r>
-            <a:endParaRPr lang="en-US" sz="1350" dirty="0"/>
+            <a:endParaRPr lang="en-US" sz="1400" dirty="0"/>
           </a:p>
         </p:txBody>
       </p:sp>
@@ -6824,7 +12288,7 @@
               <a:buNone/>
             </a:pPr>
             <a:r>
-              <a:rPr lang="en-US" sz="1050" dirty="0">
+              <a:rPr lang="en-US" sz="1400" dirty="0">
                 <a:solidFill>
                   <a:srgbClr val="FFFFFF"/>
                 </a:solidFill>
@@ -6834,7 +12298,7 @@
               </a:rPr>
               <a:t>RegNo, Name, Address, BooksIssued</a:t>
             </a:r>
-            <a:endParaRPr lang="en-US" sz="1050" dirty="0"/>
+            <a:endParaRPr lang="en-US" sz="1400" dirty="0"/>
           </a:p>
         </p:txBody>
       </p:sp>
@@ -6885,7 +12349,7 @@
               <a:buNone/>
             </a:pPr>
             <a:r>
-              <a:rPr lang="en-US" sz="1350" b="1" dirty="0">
+              <a:rPr lang="en-US" sz="1600" b="1" dirty="0">
                 <a:solidFill>
                   <a:srgbClr val="FFFFFF"/>
                 </a:solidFill>
@@ -6895,7 +12359,7 @@
               </a:rPr>
               <a:t>Finance office's file</a:t>
             </a:r>
-            <a:endParaRPr lang="en-US" sz="1350" dirty="0"/>
+            <a:endParaRPr lang="en-US" sz="1400" dirty="0"/>
           </a:p>
         </p:txBody>
       </p:sp>
@@ -6924,7 +12388,7 @@
               <a:buNone/>
             </a:pPr>
             <a:r>
-              <a:rPr lang="en-US" sz="1050" dirty="0">
+              <a:rPr lang="en-US" sz="1400" dirty="0">
                 <a:solidFill>
                   <a:srgbClr val="FFFFFF"/>
                 </a:solidFill>
@@ -6934,7 +12398,7 @@
               </a:rPr>
               <a:t>RegNo, Name, Address, FeeBalance</a:t>
             </a:r>
-            <a:endParaRPr lang="en-US" sz="1050" dirty="0"/>
+            <a:endParaRPr lang="en-US" sz="1400" dirty="0"/>
           </a:p>
         </p:txBody>
       </p:sp>
@@ -6990,7 +12454,7 @@
               <a:buNone/>
             </a:pPr>
             <a:r>
-              <a:rPr lang="en-US" sz="1300" b="1" dirty="0">
+              <a:rPr lang="en-US" sz="1800" b="1" dirty="0">
                 <a:solidFill>
                   <a:srgbClr val="1F2429"/>
                 </a:solidFill>
@@ -7004,7 +12468,7 @@
               <a:buNone/>
             </a:pPr>
             <a:r>
-              <a:rPr lang="en-US" sz="1300" dirty="0">
+              <a:rPr lang="en-US" sz="1800" dirty="0">
                 <a:solidFill>
                   <a:srgbClr val="1F2429"/>
                 </a:solidFill>
@@ -7014,7 +12478,7 @@
               </a:rPr>
               <a:t> — once per office, each written by its own program. That single decision is the root of almost every problem file-based systems became known for.</a:t>
             </a:r>
-            <a:endParaRPr lang="en-US" sz="1300" dirty="0"/>
+            <a:endParaRPr lang="en-US" sz="1800" dirty="0"/>
           </a:p>
         </p:txBody>
       </p:sp>
@@ -7047,7 +12511,7 @@
               <a:buChar char="•"/>
             </a:pPr>
             <a:r>
-              <a:rPr lang="en-US" sz="1250" dirty="0">
+              <a:rPr lang="en-US" sz="1800" dirty="0">
                 <a:solidFill>
                   <a:srgbClr val="1F2429"/>
                 </a:solidFill>
@@ -7057,7 +12521,7 @@
               </a:rPr>
               <a:t>Data redundancy — the same facts duplicated across every file that needs them</a:t>
             </a:r>
-            <a:endParaRPr lang="en-US" sz="1250" dirty="0"/>
+            <a:endParaRPr lang="en-US" sz="1800" dirty="0"/>
           </a:p>
           <a:p>
             <a:pPr marL="342900" indent="-342900">
@@ -7068,7 +12532,7 @@
               <a:buChar char="•"/>
             </a:pPr>
             <a:r>
-              <a:rPr lang="en-US" sz="1250" dirty="0">
+              <a:rPr lang="en-US" sz="1800" dirty="0">
                 <a:solidFill>
                   <a:srgbClr val="1F2429"/>
                 </a:solidFill>
@@ -7078,7 +12542,7 @@
               </a:rPr>
               <a:t>Data inconsistency — independent copies drift apart with no way to tell which is current</a:t>
             </a:r>
-            <a:endParaRPr lang="en-US" sz="1250" dirty="0"/>
+            <a:endParaRPr lang="en-US" sz="1800" dirty="0"/>
           </a:p>
           <a:p>
             <a:pPr marL="342900" indent="-342900">
@@ -7089,7 +12553,7 @@
               <a:buChar char="•"/>
             </a:pPr>
             <a:r>
-              <a:rPr lang="en-US" sz="1250" dirty="0">
+              <a:rPr lang="en-US" sz="1800" dirty="0">
                 <a:solidFill>
                   <a:srgbClr val="1F2429"/>
                 </a:solidFill>
@@ -7099,7 +12563,7 @@
               </a:rPr>
               <a:t>Poor data sharing — files were never designed to talk to each other</a:t>
             </a:r>
-            <a:endParaRPr lang="en-US" sz="1250" dirty="0"/>
+            <a:endParaRPr lang="en-US" sz="1800" dirty="0"/>
           </a:p>
           <a:p>
             <a:pPr marL="342900" indent="-342900">
@@ -7110,7 +12574,7 @@
               <a:buChar char="•"/>
             </a:pPr>
             <a:r>
-              <a:rPr lang="en-US" sz="1250" dirty="0">
+              <a:rPr lang="en-US" sz="1800" dirty="0">
                 <a:solidFill>
                   <a:srgbClr val="1F2429"/>
                 </a:solidFill>
@@ -7120,7 +12584,7 @@
               </a:rPr>
               <a:t>Program-data dependence — physical file layout is hard-coded into each program</a:t>
             </a:r>
-            <a:endParaRPr lang="en-US" sz="1250" dirty="0"/>
+            <a:endParaRPr lang="en-US" sz="1800" dirty="0"/>
           </a:p>
         </p:txBody>
       </p:sp>
@@ -7220,7 +12684,7 @@
               <a:buNone/>
             </a:pPr>
             <a:r>
-              <a:rPr lang="en-US" sz="1000" u="sng" dirty="0">
+              <a:rPr lang="en-US" sz="1200" u="sng" dirty="0">
                 <a:solidFill>
                   <a:srgbClr val="8A939B"/>
                 </a:solidFill>
@@ -7241,7 +12705,7 @@
               <a:buNone/>
             </a:pPr>
             <a:r>
-              <a:rPr lang="en-US" sz="1000" dirty="0">
+              <a:rPr lang="en-US" sz="1200" dirty="0">
                 <a:solidFill>
                   <a:srgbClr val="8A939B"/>
                 </a:solidFill>
@@ -7249,9 +12713,9 @@
                 <a:ea typeface="Calibri" pitchFamily="34" charset="-122"/>
                 <a:cs typeface="Calibri" pitchFamily="34" charset="-120"/>
               </a:rPr>
-              <a:t>  ·  7</a:t>
-            </a:r>
-            <a:endParaRPr lang="en-US" sz="1000" dirty="0"/>
+              <a:t>  ·  12</a:t>
+            </a:r>
+            <a:endParaRPr lang="en-US" sz="1200" dirty="0"/>
           </a:p>
         </p:txBody>
       </p:sp>
@@ -7284,7 +12748,7 @@
               <a:buChar char="•"/>
             </a:pPr>
             <a:r>
-              <a:rPr lang="en-US" sz="1450" dirty="0">
+              <a:rPr lang="en-US" sz="1800" dirty="0">
                 <a:solidFill>
                   <a:srgbClr val="1F2429"/>
                 </a:solidFill>
@@ -7294,7 +12758,7 @@
               </a:rPr>
               <a:t>Limited sharing, unanticipated queries — “students who owe a library fine AND a tuition balance” spans two incompatible files; answering it means writing a brand-new program</a:t>
             </a:r>
-            <a:endParaRPr lang="en-US" sz="1450" dirty="0"/>
+            <a:endParaRPr lang="en-US" sz="1800" dirty="0"/>
           </a:p>
           <a:p>
             <a:pPr marL="342900" indent="-342900">
@@ -7305,7 +12769,7 @@
               <a:buChar char="•"/>
             </a:pPr>
             <a:r>
-              <a:rPr lang="en-US" sz="1450" dirty="0">
+              <a:rPr lang="en-US" sz="1800" dirty="0">
                 <a:solidFill>
                   <a:srgbClr val="1F2429"/>
                 </a:solidFill>
@@ -7315,110 +12779,7 @@
               </a:rPr>
               <a:t>Integrity and security are hard to enforce consistently — each program enforces its own rules (or doesn't); there's no single place to say “a fee balance can never be negative”</a:t>
             </a:r>
-            <a:endParaRPr lang="en-US" sz="1450" dirty="0"/>
-          </a:p>
-        </p:txBody>
-      </p:sp>
-      <p:sp>
-        <p:nvSpPr>
-          <p:cNvPr id="5" name="Shape 3"/>
-          <p:cNvSpPr/>
-          <p:nvPr/>
-        </p:nvSpPr>
-        <p:spPr>
-          <a:xfrm>
-            <a:off x="640080" y="3383280"/>
-            <a:ext cx="10881360" cy="2651760"/>
-          </a:xfrm>
-          <a:prstGeom prst="roundRect">
-            <a:avLst>
-              <a:gd name="adj" fmla="val 3448"/>
-            </a:avLst>
-          </a:prstGeom>
-          <a:solidFill>
-            <a:srgbClr val="14181C"/>
-          </a:solidFill>
-          <a:ln/>
-        </p:spPr>
-      </p:sp>
-      <p:sp>
-        <p:nvSpPr>
-          <p:cNvPr id="6" name="Text 4"/>
-          <p:cNvSpPr txBox="1"/>
-          <p:nvPr/>
-        </p:nvSpPr>
-        <p:spPr>
-          <a:xfrm>
-            <a:off x="914400" y="3611880"/>
-            <a:ext cx="10332720" cy="457200"/>
-          </a:xfrm>
-          <a:prstGeom prst="rect">
-            <a:avLst/>
-          </a:prstGeom>
-          <a:noFill/>
-          <a:ln/>
-        </p:spPr>
-        <p:txBody>
-          <a:bodyPr wrap="square" lIns="0" tIns="0" rIns="0" bIns="0" rtlCol="0" anchor="ctr"/>
-          <a:lstStyle/>
-          <a:p>
-            <a:pPr indent="0" marL="0">
-              <a:buNone/>
-            </a:pPr>
-            <a:r>
-              <a:rPr lang="en-US" sz="1600" b="1" dirty="0">
-                <a:solidFill>
-                  <a:srgbClr val="E8A33D"/>
-                </a:solidFill>
-                <a:latin typeface="Calibri" pitchFamily="34" charset="0"/>
-                <a:ea typeface="Calibri" pitchFamily="34" charset="-122"/>
-                <a:cs typeface="Calibri" pitchFamily="34" charset="-120"/>
-              </a:rPr>
-              <a:t>Inconsistency is the most dangerous failure mode — not the most obvious one</a:t>
-            </a:r>
-            <a:endParaRPr lang="en-US" sz="1600" dirty="0"/>
-          </a:p>
-        </p:txBody>
-      </p:sp>
-      <p:sp>
-        <p:nvSpPr>
-          <p:cNvPr id="7" name="Text 5"/>
-          <p:cNvSpPr txBox="1"/>
-          <p:nvPr/>
-        </p:nvSpPr>
-        <p:spPr>
-          <a:xfrm>
-            <a:off x="914400" y="4114800"/>
-            <a:ext cx="10332720" cy="1737360"/>
-          </a:xfrm>
-          <a:prstGeom prst="rect">
-            <a:avLst/>
-          </a:prstGeom>
-          <a:noFill/>
-          <a:ln/>
-        </p:spPr>
-        <p:txBody>
-          <a:bodyPr wrap="square" lIns="0" tIns="0" rIns="0" bIns="0" rtlCol="0" anchor="t"/>
-          <a:lstStyle/>
-          <a:p>
-            <a:pPr indent="0" marL="0">
-              <a:lnSpc>
-                <a:spcPct val="125000"/>
-              </a:lnSpc>
-              <a:buNone/>
-            </a:pPr>
-            <a:r>
-              <a:rPr lang="en-US" sz="1450" dirty="0">
-                <a:solidFill>
-                  <a:srgbClr val="FFFFFF"/>
-                </a:solidFill>
-                <a:latin typeface="Calibri" pitchFamily="34" charset="0"/>
-                <a:ea typeface="Calibri" pitchFamily="34" charset="-122"/>
-                <a:cs typeface="Calibri" pitchFamily="34" charset="-120"/>
-              </a:rPr>
-              <a:t>Wasted storage from redundancy is a cost you can measure and budget for. Inconsistency is worse precisely because it's invisible until it causes damage — a graduating student blocked from receiving their transcript because the finance office's stale copy of their fee balance still shows an unpaid amount that was actually settled weeks earlier, according to the registrar's copy.</a:t>
-            </a:r>
-            <a:endParaRPr lang="en-US" sz="1450" dirty="0"/>
+            <a:endParaRPr lang="en-US" sz="1800" dirty="0"/>
           </a:p>
         </p:txBody>
       </p:sp>
@@ -7518,7 +12879,7 @@
               <a:buNone/>
             </a:pPr>
             <a:r>
-              <a:rPr lang="en-US" sz="1000" u="sng" dirty="0">
+              <a:rPr lang="en-US" sz="1200" u="sng" dirty="0">
                 <a:solidFill>
                   <a:srgbClr val="8A939B"/>
                 </a:solidFill>
@@ -7539,7 +12900,7 @@
               <a:buNone/>
             </a:pPr>
             <a:r>
-              <a:rPr lang="en-US" sz="1000" dirty="0">
+              <a:rPr lang="en-US" sz="1200" dirty="0">
                 <a:solidFill>
                   <a:srgbClr val="8A939B"/>
                 </a:solidFill>
@@ -7547,9 +12908,9 @@
                 <a:ea typeface="Calibri" pitchFamily="34" charset="-122"/>
                 <a:cs typeface="Calibri" pitchFamily="34" charset="-120"/>
               </a:rPr>
-              <a:t>  ·  8</a:t>
-            </a:r>
-            <a:endParaRPr lang="en-US" sz="1000" dirty="0"/>
+              <a:t>  ·  14</a:t>
+            </a:r>
+            <a:endParaRPr lang="en-US" sz="1200" dirty="0"/>
           </a:p>
         </p:txBody>
       </p:sp>
@@ -7578,7 +12939,7 @@
               <a:buNone/>
             </a:pPr>
             <a:r>
-              <a:rPr lang="en-US" sz="1500" dirty="0">
+              <a:rPr lang="en-US" sz="1800" dirty="0">
                 <a:solidFill>
                   <a:srgbClr val="1F2429"/>
                 </a:solidFill>
@@ -7592,7 +12953,7 @@
               <a:buNone/>
             </a:pPr>
             <a:r>
-              <a:rPr lang="en-US" sz="1500" b="1" dirty="0">
+              <a:rPr lang="en-US" sz="1800" b="1" dirty="0">
                 <a:solidFill>
                   <a:srgbClr val="8B7FD9"/>
                 </a:solidFill>
@@ -7602,7 +12963,7 @@
               </a:rPr>
               <a:t>store the data once, centrally, and let every application go through a DBMS to reach it.</a:t>
             </a:r>
-            <a:endParaRPr lang="en-US" sz="1500" dirty="0"/>
+            <a:endParaRPr lang="en-US" sz="1800" dirty="0"/>
           </a:p>
         </p:txBody>
       </p:sp>
@@ -7653,7 +13014,7 @@
               <a:buNone/>
             </a:pPr>
             <a:r>
-              <a:rPr lang="en-US" sz="1350" b="1" dirty="0">
+              <a:rPr lang="en-US" sz="1800" b="1" dirty="0">
                 <a:solidFill>
                   <a:srgbClr val="FFFFFF"/>
                 </a:solidFill>
@@ -7663,7 +13024,7 @@
               </a:rPr>
               <a:t>File-based (before)</a:t>
             </a:r>
-            <a:endParaRPr lang="en-US" sz="1350" dirty="0"/>
+            <a:endParaRPr lang="en-US" sz="1800" dirty="0"/>
           </a:p>
         </p:txBody>
       </p:sp>
@@ -7692,7 +13053,7 @@
               <a:buNone/>
             </a:pPr>
             <a:r>
-              <a:rPr lang="en-US" sz="1050" dirty="0">
+              <a:rPr lang="en-US" sz="1800" dirty="0">
                 <a:solidFill>
                   <a:srgbClr val="FFFFFF"/>
                 </a:solidFill>
@@ -7702,7 +13063,7 @@
               </a:rPr>
               <a:t>Registrar, Library, and Finance each keep their own Name/Address copy — three files, three truths</a:t>
             </a:r>
-            <a:endParaRPr lang="en-US" sz="1050" dirty="0"/>
+            <a:endParaRPr lang="en-US" sz="1800" dirty="0"/>
           </a:p>
         </p:txBody>
       </p:sp>
@@ -7753,7 +13114,7 @@
               <a:buNone/>
             </a:pPr>
             <a:r>
-              <a:rPr lang="en-US" sz="1350" b="1" dirty="0">
+              <a:rPr lang="en-US" sz="1800" b="1" dirty="0">
                 <a:solidFill>
                   <a:srgbClr val="FFFFFF"/>
                 </a:solidFill>
@@ -7763,7 +13124,7 @@
               </a:rPr>
               <a:t>Database approach (after)</a:t>
             </a:r>
-            <a:endParaRPr lang="en-US" sz="1350" dirty="0"/>
+            <a:endParaRPr lang="en-US" sz="1800" dirty="0"/>
           </a:p>
         </p:txBody>
       </p:sp>
@@ -7792,7 +13153,7 @@
               <a:buNone/>
             </a:pPr>
             <a:r>
-              <a:rPr lang="en-US" sz="1050" dirty="0">
+              <a:rPr lang="en-US" sz="1800" dirty="0">
                 <a:solidFill>
                   <a:srgbClr val="FFFFFF"/>
                 </a:solidFill>
@@ -7802,7 +13163,7 @@
               </a:rPr>
               <a:t>One Student table holds Name/Address once; every office reads the same row through the DBMS</a:t>
             </a:r>
-            <a:endParaRPr lang="en-US" sz="1050" dirty="0"/>
+            <a:endParaRPr lang="en-US" sz="1800" dirty="0"/>
           </a:p>
         </p:txBody>
       </p:sp>
@@ -7831,7 +13192,7 @@
               <a:buNone/>
             </a:pPr>
             <a:r>
-              <a:rPr lang="en-US" sz="1300" b="1" dirty="0">
+              <a:rPr lang="en-US" sz="1800" b="1" dirty="0">
                 <a:solidFill>
                   <a:srgbClr val="1F2429"/>
                 </a:solidFill>
@@ -7841,7 +13202,7 @@
               </a:rPr>
               <a:t>Worked example: a single Student relation</a:t>
             </a:r>
-            <a:endParaRPr lang="en-US" sz="1300" dirty="0"/>
+            <a:endParaRPr lang="en-US" sz="1800" dirty="0"/>
           </a:p>
         </p:txBody>
       </p:sp>
@@ -7883,7 +13244,7 @@
                         <a:buNone/>
                       </a:pPr>
                       <a:r>
-                        <a:rPr lang="en-US" sz="1200" b="1" dirty="0">
+                        <a:rPr lang="en-US" sz="1400" b="1" dirty="0">
                           <a:solidFill>
                             <a:srgbClr val="FFFFFF"/>
                           </a:solidFill>
@@ -7893,7 +13254,7 @@
                         </a:rPr>
                         <a:t>RegNo</a:t>
                       </a:r>
-                      <a:endParaRPr lang="en-US" sz="1200" dirty="0">
+                      <a:endParaRPr lang="en-US" sz="1400" dirty="0">
                         <a:latin typeface="Calibri" charset="0"/>
                         <a:ea typeface="Calibri" charset="0"/>
                         <a:cs typeface="Calibri" charset="0"/>
@@ -7951,7 +13312,7 @@
                         <a:buNone/>
                       </a:pPr>
                       <a:r>
-                        <a:rPr lang="en-US" sz="1200" b="1" dirty="0">
+                        <a:rPr lang="en-US" sz="1400" b="1" dirty="0">
                           <a:solidFill>
                             <a:srgbClr val="FFFFFF"/>
                           </a:solidFill>
@@ -7961,7 +13322,7 @@
                         </a:rPr>
                         <a:t>Name</a:t>
                       </a:r>
-                      <a:endParaRPr lang="en-US" sz="1200" dirty="0">
+                      <a:endParaRPr lang="en-US" sz="1400" dirty="0">
                         <a:latin typeface="Calibri" charset="0"/>
                         <a:ea typeface="Calibri" charset="0"/>
                         <a:cs typeface="Calibri" charset="0"/>
@@ -8019,7 +13380,7 @@
                         <a:buNone/>
                       </a:pPr>
                       <a:r>
-                        <a:rPr lang="en-US" sz="1200" b="1" dirty="0">
+                        <a:rPr lang="en-US" sz="1400" b="1" dirty="0">
                           <a:solidFill>
                             <a:srgbClr val="FFFFFF"/>
                           </a:solidFill>
@@ -8029,7 +13390,7 @@
                         </a:rPr>
                         <a:t>Address</a:t>
                       </a:r>
-                      <a:endParaRPr lang="en-US" sz="1200" dirty="0">
+                      <a:endParaRPr lang="en-US" sz="1400" dirty="0">
                         <a:latin typeface="Calibri" charset="0"/>
                         <a:ea typeface="Calibri" charset="0"/>
                         <a:cs typeface="Calibri" charset="0"/>
@@ -8087,7 +13448,7 @@
                         <a:buNone/>
                       </a:pPr>
                       <a:r>
-                        <a:rPr lang="en-US" sz="1200" b="1" dirty="0">
+                        <a:rPr lang="en-US" sz="1400" b="1" dirty="0">
                           <a:solidFill>
                             <a:srgbClr val="FFFFFF"/>
                           </a:solidFill>
@@ -8097,7 +13458,7 @@
                         </a:rPr>
                         <a:t>Program</a:t>
                       </a:r>
-                      <a:endParaRPr lang="en-US" sz="1200" dirty="0">
+                      <a:endParaRPr lang="en-US" sz="1400" dirty="0">
                         <a:latin typeface="Calibri" charset="0"/>
                         <a:ea typeface="Calibri" charset="0"/>
                         <a:cs typeface="Calibri" charset="0"/>
@@ -8157,7 +13518,7 @@
                         <a:buNone/>
                       </a:pPr>
                       <a:r>
-                        <a:rPr lang="en-US" sz="1200" dirty="0">
+                        <a:rPr lang="en-US" sz="1400" dirty="0">
                           <a:solidFill>
                             <a:srgbClr val="000000"/>
                           </a:solidFill>
@@ -8167,7 +13528,7 @@
                         </a:rPr>
                         <a:t>FA21-BCS-001</a:t>
                       </a:r>
-                      <a:endParaRPr lang="en-US" sz="1200" dirty="0">
+                      <a:endParaRPr lang="en-US" sz="1400" dirty="0">
                         <a:latin typeface="Calibri" charset="0"/>
                         <a:ea typeface="Calibri" charset="0"/>
                         <a:cs typeface="Calibri" charset="0"/>
@@ -8222,7 +13583,7 @@
                         <a:buNone/>
                       </a:pPr>
                       <a:r>
-                        <a:rPr lang="en-US" sz="1200" dirty="0">
+                        <a:rPr lang="en-US" sz="1400" dirty="0">
                           <a:solidFill>
                             <a:srgbClr val="000000"/>
                           </a:solidFill>
@@ -8232,7 +13593,7 @@
                         </a:rPr>
                         <a:t>Ali Raza</a:t>
                       </a:r>
-                      <a:endParaRPr lang="en-US" sz="1200" dirty="0">
+                      <a:endParaRPr lang="en-US" sz="1400" dirty="0">
                         <a:latin typeface="Calibri" charset="0"/>
                         <a:ea typeface="Calibri" charset="0"/>
                         <a:cs typeface="Calibri" charset="0"/>
@@ -8287,7 +13648,7 @@
                         <a:buNone/>
                       </a:pPr>
                       <a:r>
-                        <a:rPr lang="en-US" sz="1200" dirty="0">
+                        <a:rPr lang="en-US" sz="1400" dirty="0">
                           <a:solidFill>
                             <a:srgbClr val="000000"/>
                           </a:solidFill>
@@ -8297,7 +13658,7 @@
                         </a:rPr>
                         <a:t>Model Town, Lahore</a:t>
                       </a:r>
-                      <a:endParaRPr lang="en-US" sz="1200" dirty="0">
+                      <a:endParaRPr lang="en-US" sz="1400" dirty="0">
                         <a:latin typeface="Calibri" charset="0"/>
                         <a:ea typeface="Calibri" charset="0"/>
                         <a:cs typeface="Calibri" charset="0"/>
@@ -8352,7 +13713,7 @@
                         <a:buNone/>
                       </a:pPr>
                       <a:r>
-                        <a:rPr lang="en-US" sz="1200" dirty="0">
+                        <a:rPr lang="en-US" sz="1400" dirty="0">
                           <a:solidFill>
                             <a:srgbClr val="000000"/>
                           </a:solidFill>
@@ -8362,7 +13723,7 @@
                         </a:rPr>
                         <a:t>BS Computer Science</a:t>
                       </a:r>
-                      <a:endParaRPr lang="en-US" sz="1200" dirty="0">
+                      <a:endParaRPr lang="en-US" sz="1400" dirty="0">
                         <a:latin typeface="Calibri" charset="0"/>
                         <a:ea typeface="Calibri" charset="0"/>
                         <a:cs typeface="Calibri" charset="0"/>
@@ -8438,7 +13799,7 @@
               <a:buNone/>
             </a:pPr>
             <a:r>
-              <a:rPr lang="en-US" sz="1250" dirty="0">
+              <a:rPr lang="en-US" sz="1800" dirty="0">
                 <a:solidFill>
                   <a:srgbClr val="8A939B"/>
                 </a:solidFill>
@@ -8448,7 +13809,7 @@
               </a:rPr>
               <a:t>The library's and finance's systems no longer keep their own Name/Address copies — they store only BooksIssued / FeeBalance and reference the same shared row through the DBMS.</a:t>
             </a:r>
-            <a:endParaRPr lang="en-US" sz="1250" dirty="0"/>
+            <a:endParaRPr lang="en-US" sz="1800" dirty="0"/>
           </a:p>
         </p:txBody>
       </p:sp>
@@ -8548,7 +13909,7 @@
               <a:buNone/>
             </a:pPr>
             <a:r>
-              <a:rPr lang="en-US" sz="1000" u="sng" dirty="0">
+              <a:rPr lang="en-US" sz="1200" u="sng" dirty="0">
                 <a:solidFill>
                   <a:srgbClr val="8A939B"/>
                 </a:solidFill>
@@ -8569,7 +13930,7 @@
               <a:buNone/>
             </a:pPr>
             <a:r>
-              <a:rPr lang="en-US" sz="1000" dirty="0">
+              <a:rPr lang="en-US" sz="1200" dirty="0">
                 <a:solidFill>
                   <a:srgbClr val="8A939B"/>
                 </a:solidFill>
@@ -8577,9 +13938,9 @@
                 <a:ea typeface="Calibri" pitchFamily="34" charset="-122"/>
                 <a:cs typeface="Calibri" pitchFamily="34" charset="-120"/>
               </a:rPr>
-              <a:t>  ·  9</a:t>
-            </a:r>
-            <a:endParaRPr lang="en-US" sz="1000" dirty="0"/>
+              <a:t>  ·  16</a:t>
+            </a:r>
+            <a:endParaRPr lang="en-US" sz="1200" dirty="0"/>
           </a:p>
         </p:txBody>
       </p:sp>
@@ -8612,7 +13973,7 @@
               <a:buChar char="•"/>
             </a:pPr>
             <a:r>
-              <a:rPr lang="en-US" sz="1400" b="1" dirty="0">
+              <a:rPr lang="en-US" sz="1800" b="1" dirty="0">
                 <a:solidFill>
                   <a:srgbClr val="1F2429"/>
                 </a:solidFill>
@@ -8629,7 +13990,7 @@
               <a:buNone/>
             </a:pPr>
             <a:r>
-              <a:rPr lang="en-US" sz="1400" dirty="0">
+              <a:rPr lang="en-US" sz="1800" dirty="0">
                 <a:solidFill>
                   <a:srgbClr val="1F2429"/>
                 </a:solidFill>
@@ -8639,7 +14000,7 @@
               </a:rPr>
               <a:t> — store each fact once wherever possible</a:t>
             </a:r>
-            <a:endParaRPr lang="en-US" sz="1400" dirty="0"/>
+            <a:endParaRPr lang="en-US" sz="1800" dirty="0"/>
           </a:p>
           <a:p>
             <a:pPr marL="342900" indent="-342900">
@@ -8650,7 +14011,7 @@
               <a:buChar char="•"/>
             </a:pPr>
             <a:r>
-              <a:rPr lang="en-US" sz="1400" b="1" dirty="0">
+              <a:rPr lang="en-US" sz="1800" b="1" dirty="0">
                 <a:solidFill>
                   <a:srgbClr val="1F2429"/>
                 </a:solidFill>
@@ -8667,7 +14028,7 @@
               <a:buNone/>
             </a:pPr>
             <a:r>
-              <a:rPr lang="en-US" sz="1400" dirty="0">
+              <a:rPr lang="en-US" sz="1800" dirty="0">
                 <a:solidFill>
                   <a:srgbClr val="1F2429"/>
                 </a:solidFill>
@@ -8677,7 +14038,7 @@
               </a:rPr>
               <a:t> — with redundancy controlled, copies can't disagree</a:t>
             </a:r>
-            <a:endParaRPr lang="en-US" sz="1400" dirty="0"/>
+            <a:endParaRPr lang="en-US" sz="1800" dirty="0"/>
           </a:p>
           <a:p>
             <a:pPr marL="342900" indent="-342900">
@@ -8688,7 +14049,7 @@
               <a:buChar char="•"/>
             </a:pPr>
             <a:r>
-              <a:rPr lang="en-US" sz="1400" b="1" dirty="0">
+              <a:rPr lang="en-US" sz="1800" b="1" dirty="0">
                 <a:solidFill>
                   <a:srgbClr val="1F2429"/>
                 </a:solidFill>
@@ -8705,7 +14066,7 @@
               <a:buNone/>
             </a:pPr>
             <a:r>
-              <a:rPr lang="en-US" sz="1400" dirty="0">
+              <a:rPr lang="en-US" sz="1800" dirty="0">
                 <a:solidFill>
                   <a:srgbClr val="1F2429"/>
                 </a:solidFill>
@@ -8715,7 +14076,7 @@
               </a:rPr>
               <a:t> — combining files answers questions no single file could</a:t>
             </a:r>
-            <a:endParaRPr lang="en-US" sz="1400" dirty="0"/>
+            <a:endParaRPr lang="en-US" sz="1800" dirty="0"/>
           </a:p>
           <a:p>
             <a:pPr marL="342900" indent="-342900">
@@ -8726,7 +14087,7 @@
               <a:buChar char="•"/>
             </a:pPr>
             <a:r>
-              <a:rPr lang="en-US" sz="1400" b="1" dirty="0">
+              <a:rPr lang="en-US" sz="1800" b="1" dirty="0">
                 <a:solidFill>
                   <a:srgbClr val="1F2429"/>
                 </a:solidFill>
@@ -8743,7 +14104,7 @@
               <a:buNone/>
             </a:pPr>
             <a:r>
-              <a:rPr lang="en-US" sz="1400" dirty="0">
+              <a:rPr lang="en-US" sz="1800" dirty="0">
                 <a:solidFill>
                   <a:srgbClr val="1F2429"/>
                 </a:solidFill>
@@ -8753,7 +14114,7 @@
               </a:rPr>
               <a:t> — existing data can be reused by new applications</a:t>
             </a:r>
-            <a:endParaRPr lang="en-US" sz="1400" dirty="0"/>
+            <a:endParaRPr lang="en-US" sz="1800" dirty="0"/>
           </a:p>
           <a:p>
             <a:pPr marL="342900" indent="-342900">
@@ -8764,7 +14125,7 @@
               <a:buChar char="•"/>
             </a:pPr>
             <a:r>
-              <a:rPr lang="en-US" sz="1400" b="1" dirty="0">
+              <a:rPr lang="en-US" sz="1800" b="1" dirty="0">
                 <a:solidFill>
                   <a:srgbClr val="1F2429"/>
                 </a:solidFill>
@@ -8781,7 +14142,7 @@
               <a:buNone/>
             </a:pPr>
             <a:r>
-              <a:rPr lang="en-US" sz="1400" dirty="0">
+              <a:rPr lang="en-US" sz="1800" dirty="0">
                 <a:solidFill>
                   <a:srgbClr val="1F2429"/>
                 </a:solidFill>
@@ -8791,7 +14152,7 @@
               </a:rPr>
               <a:t> — validation rules are defined once and enforced everywhere</a:t>
             </a:r>
-            <a:endParaRPr lang="en-US" sz="1400" dirty="0"/>
+            <a:endParaRPr lang="en-US" sz="1800" dirty="0"/>
           </a:p>
           <a:p>
             <a:pPr marL="342900" indent="-342900">
@@ -8802,7 +14163,7 @@
               <a:buChar char="•"/>
             </a:pPr>
             <a:r>
-              <a:rPr lang="en-US" sz="1400" b="1" dirty="0">
+              <a:rPr lang="en-US" sz="1800" b="1" dirty="0">
                 <a:solidFill>
                   <a:srgbClr val="1F2429"/>
                 </a:solidFill>
@@ -8819,7 +14180,7 @@
               <a:buNone/>
             </a:pPr>
             <a:r>
-              <a:rPr lang="en-US" sz="1400" dirty="0">
+              <a:rPr lang="en-US" sz="1800" dirty="0">
                 <a:solidFill>
                   <a:srgbClr val="1F2429"/>
                 </a:solidFill>
@@ -8829,7 +14190,7 @@
               </a:rPr>
               <a:t> — access restricted per-user, down to individual columns</a:t>
             </a:r>
-            <a:endParaRPr lang="en-US" sz="1400" dirty="0"/>
+            <a:endParaRPr lang="en-US" sz="1800" dirty="0"/>
           </a:p>
         </p:txBody>
       </p:sp>
